--- a/Industrial_Machine_Log_Integrity_Checker_Deck.pptx
+++ b/Industrial_Machine_Log_Integrity_Checker_Deck.pptx
@@ -3112,7 +3112,7 @@
             <a:avLst/>
           </a:prstGeom>
           <a:solidFill>
-            <a:srgbClr val="0B0F19"/>
+            <a:srgbClr val="FFF8E7"/>
           </a:solidFill>
           <a:ln>
             <a:noFill/>
@@ -3148,8 +3148,8 @@
         </p:nvSpPr>
         <p:spPr>
           <a:xfrm>
-            <a:off x="914400" y="1097280"/>
-            <a:ext cx="5486400" cy="365760"/>
+            <a:off x="731520" y="365760"/>
+            <a:ext cx="7315200" cy="274320"/>
           </a:xfrm>
           <a:prstGeom prst="rect">
             <a:avLst/>
@@ -3163,14 +3163,15 @@
           <a:lstStyle/>
           <a:p>
             <a:pPr>
-              <a:defRPr sz="1100" b="1">
-                <a:solidFill>
-                  <a:srgbClr val="38BDF8"/>
-                </a:solidFill>
-              </a:defRPr>
-            </a:pPr>
-            <a:r>
-              <a:t>INDUSTRIAL TELEMETRY INTEGRITY ENGINE • PRODUCT 8</a:t>
+              <a:defRPr sz="1000" b="1">
+                <a:solidFill>
+                  <a:srgbClr val="6E5D4E"/>
+                </a:solidFill>
+                <a:latin typeface="Arial"/>
+              </a:defRPr>
+            </a:pPr>
+            <a:r>
+              <a:t>SR UNIVERSITY • DEPT OF CSE • OS &amp; CN LAB PROJECT (PRODUCT 8)</a:t>
             </a:r>
           </a:p>
         </p:txBody>
@@ -3183,8 +3184,8 @@
         </p:nvSpPr>
         <p:spPr>
           <a:xfrm>
-            <a:off x="914400" y="1508760"/>
-            <a:ext cx="10332720" cy="2011680"/>
+            <a:off x="731520" y="640080"/>
+            <a:ext cx="10698480" cy="1188720"/>
           </a:xfrm>
           <a:prstGeom prst="rect">
             <a:avLst/>
@@ -3199,32 +3200,30 @@
           <a:p>
             <a:pPr>
               <a:spcAft>
-                <a:spcPts val="800"/>
-              </a:spcAft>
-              <a:defRPr sz="4400" b="1">
-                <a:solidFill>
-                  <a:srgbClr val="FFFFFF"/>
-                </a:solidFill>
-              </a:defRPr>
-            </a:pPr>
-            <a:r>
-              <a:t>Industrial Machine Log</a:t>
-            </a:r>
-            <a:br/>
-            <a:r>
-              <a:t>Integrity Checker</a:t>
-            </a:r>
-          </a:p>
-          <a:p>
-            <a:pPr>
-              <a:defRPr sz="1800">
-                <a:solidFill>
-                  <a:srgbClr val="94A3B8"/>
-                </a:solidFill>
-              </a:defRPr>
-            </a:pPr>
-            <a:r>
-              <a:t>Zero-Latency Modulo-2 Polynomial Verification Engine for Mission-Critical SCADA Systems</a:t>
+                <a:spcPts val="200"/>
+              </a:spcAft>
+              <a:defRPr sz="3400" b="1">
+                <a:solidFill>
+                  <a:srgbClr val="241E17"/>
+                </a:solidFill>
+                <a:latin typeface="Arial"/>
+              </a:defRPr>
+            </a:pPr>
+            <a:r>
+              <a:t>Industrial Machine Log Integrity Checker</a:t>
+            </a:r>
+          </a:p>
+          <a:p>
+            <a:pPr>
+              <a:defRPr sz="1500">
+                <a:solidFill>
+                  <a:srgbClr val="6E5D4E"/>
+                </a:solidFill>
+                <a:latin typeface="Arial"/>
+              </a:defRPr>
+            </a:pPr>
+            <a:r>
+              <a:t>Zero-Dependency Modulo-2 Polynomial Division &amp; Telemetry Error Detection Engine</a:t>
             </a:r>
           </a:p>
         </p:txBody>
@@ -3237,18 +3236,18 @@
         </p:nvSpPr>
         <p:spPr>
           <a:xfrm>
-            <a:off x="914400" y="4114800"/>
-            <a:ext cx="2468880" cy="2011680"/>
+            <a:off x="731520" y="1920240"/>
+            <a:ext cx="5120640" cy="4389120"/>
           </a:xfrm>
           <a:prstGeom prst="roundRect">
             <a:avLst/>
           </a:prstGeom>
           <a:solidFill>
-            <a:srgbClr val="162032"/>
+            <a:srgbClr val="FFFFFF"/>
           </a:solidFill>
-          <a:ln w="15240">
+          <a:ln w="13970">
             <a:solidFill>
-              <a:srgbClr val="24344D"/>
+              <a:srgbClr val="E2D5C3"/>
             </a:solidFill>
           </a:ln>
         </p:spPr>
@@ -3282,8 +3281,8 @@
         </p:nvSpPr>
         <p:spPr>
           <a:xfrm>
-            <a:off x="1097280" y="4297680"/>
-            <a:ext cx="2103120" cy="1645920"/>
+            <a:off x="877824" y="2048256"/>
+            <a:ext cx="4828032" cy="4133088"/>
           </a:xfrm>
           <a:prstGeom prst="rect">
             <a:avLst/>
@@ -3300,44 +3299,95 @@
               <a:spcAft>
                 <a:spcPts val="200"/>
               </a:spcAft>
-              <a:defRPr sz="900" b="1">
-                <a:solidFill>
-                  <a:srgbClr val="94A3B8"/>
-                </a:solidFill>
-              </a:defRPr>
-            </a:pPr>
-            <a:r>
-              <a:t>MATHEMATICS</a:t>
-            </a:r>
-          </a:p>
-          <a:p>
-            <a:pPr>
-              <a:spcAft>
-                <a:spcPts val="800"/>
-              </a:spcAft>
-              <a:defRPr sz="1500" b="1">
-                <a:solidFill>
-                  <a:srgbClr val="38BDF8"/>
-                </a:solidFill>
-              </a:defRPr>
-            </a:pPr>
-            <a:r>
-              <a:t>IEEE 802.3 CRC-32</a:t>
-            </a:r>
-          </a:p>
-          <a:p>
-            <a:pPr>
-              <a:spcAft>
-                <a:spcPts val="400"/>
-              </a:spcAft>
-              <a:defRPr sz="1150">
-                <a:solidFill>
-                  <a:srgbClr val="E2E8F0"/>
-                </a:solidFill>
-              </a:defRPr>
-            </a:pPr>
-            <a:r>
-              <a:t>Handwritten GF(2) XOR Long Division</a:t>
+              <a:defRPr sz="850" b="1">
+                <a:solidFill>
+                  <a:srgbClr val="6E5D4E"/>
+                </a:solidFill>
+                <a:latin typeface="Arial"/>
+              </a:defRPr>
+            </a:pPr>
+            <a:r>
+              <a:t>PRODUCT OVERVIEW</a:t>
+            </a:r>
+          </a:p>
+          <a:p>
+            <a:pPr>
+              <a:spcAft>
+                <a:spcPts val="500"/>
+              </a:spcAft>
+              <a:defRPr sz="1350" b="1">
+                <a:solidFill>
+                  <a:srgbClr val="241E17"/>
+                </a:solidFill>
+                <a:latin typeface="Arial"/>
+              </a:defRPr>
+            </a:pPr>
+            <a:r>
+              <a:t>Problem Statement &amp; Objective</a:t>
+            </a:r>
+          </a:p>
+          <a:p>
+            <a:pPr>
+              <a:spcAft>
+                <a:spcPts val="300"/>
+              </a:spcAft>
+              <a:defRPr sz="1050">
+                <a:solidFill>
+                  <a:srgbClr val="6E5D4E"/>
+                </a:solidFill>
+                <a:latin typeface="Arial"/>
+              </a:defRPr>
+            </a:pPr>
+            <a:r>
+              <a:t>• Industrial Context: SCADA, robotics, and PLC telemetry logs are transmitted across noisy industrial lines (RS-485, CAN bus, Modbus TCP) susceptible to electromagnetic noise and tampering.</a:t>
+            </a:r>
+          </a:p>
+          <a:p>
+            <a:pPr>
+              <a:spcAft>
+                <a:spcPts val="300"/>
+              </a:spcAft>
+              <a:defRPr sz="1050">
+                <a:solidFill>
+                  <a:srgbClr val="6E5D4E"/>
+                </a:solidFill>
+                <a:latin typeface="Arial"/>
+              </a:defRPr>
+            </a:pPr>
+            <a:r>
+              <a:t>• Silent Corruption: A single flipped bit alters critical sensor logs (e.g. '8' -&gt; '9' flips TEMP:82.4C to 92.4C), leading to false shutdowns or unflagged catastrophic failures.</a:t>
+            </a:r>
+          </a:p>
+          <a:p>
+            <a:pPr>
+              <a:spcAft>
+                <a:spcPts val="300"/>
+              </a:spcAft>
+              <a:defRPr sz="1050">
+                <a:solidFill>
+                  <a:srgbClr val="6E5D4E"/>
+                </a:solidFill>
+                <a:latin typeface="Arial"/>
+              </a:defRPr>
+            </a:pPr>
+            <a:r>
+              <a:t>• Core Solution: A hardware-deterministic, session-fixed 33-bit CRC-32 polynomial division engine that validates transmission integrity in real time with 100% burst error detection.</a:t>
+            </a:r>
+          </a:p>
+          <a:p>
+            <a:pPr>
+              <a:spcAft>
+                <a:spcPts val="300"/>
+              </a:spcAft>
+              <a:defRPr sz="1050">
+                <a:solidFill>
+                  <a:srgbClr val="6E5D4E"/>
+                </a:solidFill>
+                <a:latin typeface="Arial"/>
+              </a:defRPr>
+            </a:pPr>
+            <a:r>
+              <a:t>• GitHub Repository: https://github.com/rogeralukka/OS-CN-Product-8</a:t>
             </a:r>
           </a:p>
         </p:txBody>
@@ -3350,18 +3400,18 @@
         </p:nvSpPr>
         <p:spPr>
           <a:xfrm>
-            <a:off x="3520440" y="4114800"/>
-            <a:ext cx="2468880" cy="2011680"/>
+            <a:off x="6035040" y="1920240"/>
+            <a:ext cx="5394960" cy="4389120"/>
           </a:xfrm>
           <a:prstGeom prst="roundRect">
             <a:avLst/>
           </a:prstGeom>
           <a:solidFill>
-            <a:srgbClr val="162032"/>
+            <a:srgbClr val="EFE5D5"/>
           </a:solidFill>
-          <a:ln w="15240">
+          <a:ln w="13970">
             <a:solidFill>
-              <a:srgbClr val="24344D"/>
+              <a:srgbClr val="E3C08F"/>
             </a:solidFill>
           </a:ln>
         </p:spPr>
@@ -3395,8 +3445,8 @@
         </p:nvSpPr>
         <p:spPr>
           <a:xfrm>
-            <a:off x="3703320" y="4297680"/>
-            <a:ext cx="2103120" cy="1645920"/>
+            <a:off x="6181344" y="2048256"/>
+            <a:ext cx="5102352" cy="4133088"/>
           </a:xfrm>
           <a:prstGeom prst="rect">
             <a:avLst/>
@@ -3413,270 +3463,111 @@
               <a:spcAft>
                 <a:spcPts val="200"/>
               </a:spcAft>
-              <a:defRPr sz="900" b="1">
-                <a:solidFill>
-                  <a:srgbClr val="94A3B8"/>
-                </a:solidFill>
-              </a:defRPr>
-            </a:pPr>
-            <a:r>
-              <a:t>ARCHITECTURE</a:t>
-            </a:r>
-          </a:p>
-          <a:p>
-            <a:pPr>
-              <a:spcAft>
-                <a:spcPts val="800"/>
-              </a:spcAft>
-              <a:defRPr sz="1500" b="1">
-                <a:solidFill>
-                  <a:srgbClr val="38BDF8"/>
-                </a:solidFill>
-              </a:defRPr>
-            </a:pPr>
-            <a:r>
-              <a:t>Session-Fixed Divisor</a:t>
-            </a:r>
-          </a:p>
-          <a:p>
-            <a:pPr>
-              <a:spcAft>
-                <a:spcPts val="400"/>
-              </a:spcAft>
-              <a:defRPr sz="1150">
-                <a:solidFill>
-                  <a:srgbClr val="E2E8F0"/>
-                </a:solidFill>
-              </a:defRPr>
-            </a:pPr>
-            <a:r>
-              <a:t>33-bit Generator Polynomial Invariant</a:t>
-            </a:r>
-          </a:p>
-        </p:txBody>
-      </p:sp>
-      <p:sp>
-        <p:nvSpPr>
-          <p:cNvPr id="9" name="Rounded Rectangle 8"/>
-          <p:cNvSpPr/>
-          <p:nvPr/>
-        </p:nvSpPr>
-        <p:spPr>
-          <a:xfrm>
-            <a:off x="6126480" y="4114800"/>
-            <a:ext cx="2468880" cy="2011680"/>
-          </a:xfrm>
-          <a:prstGeom prst="roundRect">
-            <a:avLst/>
-          </a:prstGeom>
-          <a:solidFill>
-            <a:srgbClr val="162032"/>
-          </a:solidFill>
-          <a:ln w="15240">
-            <a:solidFill>
-              <a:srgbClr val="24344D"/>
-            </a:solidFill>
-          </a:ln>
-        </p:spPr>
-        <p:style>
-          <a:lnRef idx="1">
-            <a:schemeClr val="accent1"/>
-          </a:lnRef>
-          <a:fillRef idx="3">
-            <a:schemeClr val="accent1"/>
-          </a:fillRef>
-          <a:effectRef idx="2">
-            <a:schemeClr val="accent1"/>
-          </a:effectRef>
-          <a:fontRef idx="minor">
-            <a:schemeClr val="lt1"/>
-          </a:fontRef>
-        </p:style>
-        <p:txBody>
-          <a:bodyPr rtlCol="0" anchor="ctr"/>
-          <a:lstStyle/>
-          <a:p>
-            <a:pPr algn="ctr"/>
-          </a:p>
-        </p:txBody>
-      </p:sp>
-      <p:sp>
-        <p:nvSpPr>
-          <p:cNvPr id="10" name="TextBox 9"/>
-          <p:cNvSpPr txBox="1"/>
-          <p:nvPr/>
-        </p:nvSpPr>
-        <p:spPr>
-          <a:xfrm>
-            <a:off x="6309360" y="4297680"/>
-            <a:ext cx="2103120" cy="1645920"/>
-          </a:xfrm>
-          <a:prstGeom prst="rect">
-            <a:avLst/>
-          </a:prstGeom>
-          <a:noFill/>
-        </p:spPr>
-        <p:txBody>
-          <a:bodyPr wrap="square">
-            <a:spAutoFit/>
-          </a:bodyPr>
-          <a:lstStyle/>
-          <a:p>
-            <a:pPr>
-              <a:spcAft>
-                <a:spcPts val="200"/>
-              </a:spcAft>
-              <a:defRPr sz="900" b="1">
-                <a:solidFill>
-                  <a:srgbClr val="94A3B8"/>
-                </a:solidFill>
-              </a:defRPr>
-            </a:pPr>
-            <a:r>
-              <a:t>ENGINEERING</a:t>
-            </a:r>
-          </a:p>
-          <a:p>
-            <a:pPr>
-              <a:spcAft>
-                <a:spcPts val="800"/>
-              </a:spcAft>
-              <a:defRPr sz="1500" b="1">
-                <a:solidFill>
-                  <a:srgbClr val="38BDF8"/>
-                </a:solidFill>
-              </a:defRPr>
-            </a:pPr>
-            <a:r>
-              <a:t>Zero Black-Box Deps</a:t>
-            </a:r>
-          </a:p>
-          <a:p>
-            <a:pPr>
-              <a:spcAft>
-                <a:spcPts val="400"/>
-              </a:spcAft>
-              <a:defRPr sz="1150">
-                <a:solidFill>
-                  <a:srgbClr val="E2E8F0"/>
-                </a:solidFill>
-              </a:defRPr>
-            </a:pPr>
-            <a:r>
-              <a:t>Pure Bitstream Math (No zlib)</a:t>
-            </a:r>
-          </a:p>
-        </p:txBody>
-      </p:sp>
-      <p:sp>
-        <p:nvSpPr>
-          <p:cNvPr id="11" name="Rounded Rectangle 10"/>
-          <p:cNvSpPr/>
-          <p:nvPr/>
-        </p:nvSpPr>
-        <p:spPr>
-          <a:xfrm>
-            <a:off x="8732520" y="4114800"/>
-            <a:ext cx="2468880" cy="2011680"/>
-          </a:xfrm>
-          <a:prstGeom prst="roundRect">
-            <a:avLst/>
-          </a:prstGeom>
-          <a:solidFill>
-            <a:srgbClr val="162032"/>
-          </a:solidFill>
-          <a:ln w="15240">
-            <a:solidFill>
-              <a:srgbClr val="24344D"/>
-            </a:solidFill>
-          </a:ln>
-        </p:spPr>
-        <p:style>
-          <a:lnRef idx="1">
-            <a:schemeClr val="accent1"/>
-          </a:lnRef>
-          <a:fillRef idx="3">
-            <a:schemeClr val="accent1"/>
-          </a:fillRef>
-          <a:effectRef idx="2">
-            <a:schemeClr val="accent1"/>
-          </a:effectRef>
-          <a:fontRef idx="minor">
-            <a:schemeClr val="lt1"/>
-          </a:fontRef>
-        </p:style>
-        <p:txBody>
-          <a:bodyPr rtlCol="0" anchor="ctr"/>
-          <a:lstStyle/>
-          <a:p>
-            <a:pPr algn="ctr"/>
-          </a:p>
-        </p:txBody>
-      </p:sp>
-      <p:sp>
-        <p:nvSpPr>
-          <p:cNvPr id="12" name="TextBox 11"/>
-          <p:cNvSpPr txBox="1"/>
-          <p:nvPr/>
-        </p:nvSpPr>
-        <p:spPr>
-          <a:xfrm>
-            <a:off x="8915400" y="4297680"/>
-            <a:ext cx="2103120" cy="1645920"/>
-          </a:xfrm>
-          <a:prstGeom prst="rect">
-            <a:avLst/>
-          </a:prstGeom>
-          <a:noFill/>
-        </p:spPr>
-        <p:txBody>
-          <a:bodyPr wrap="square">
-            <a:spAutoFit/>
-          </a:bodyPr>
-          <a:lstStyle/>
-          <a:p>
-            <a:pPr>
-              <a:spcAft>
-                <a:spcPts val="200"/>
-              </a:spcAft>
-              <a:defRPr sz="900" b="1">
-                <a:solidFill>
-                  <a:srgbClr val="94A3B8"/>
-                </a:solidFill>
-              </a:defRPr>
-            </a:pPr>
-            <a:r>
-              <a:t>INTERFACE</a:t>
-            </a:r>
-          </a:p>
-          <a:p>
-            <a:pPr>
-              <a:spcAft>
-                <a:spcPts val="800"/>
-              </a:spcAft>
-              <a:defRPr sz="1500" b="1">
-                <a:solidFill>
-                  <a:srgbClr val="38BDF8"/>
-                </a:solidFill>
-              </a:defRPr>
-            </a:pPr>
-            <a:r>
-              <a:t>AEGIS Observability</a:t>
-            </a:r>
-          </a:p>
-          <a:p>
-            <a:pPr>
-              <a:spcAft>
-                <a:spcPts val="400"/>
-              </a:spcAft>
-              <a:defRPr sz="1150">
-                <a:solidFill>
-                  <a:srgbClr val="E2E8F0"/>
-                </a:solidFill>
-              </a:defRPr>
-            </a:pPr>
-            <a:r>
-              <a:t>Dual-Row Single Viewport Telemetry</a:t>
+              <a:defRPr sz="850" b="1">
+                <a:solidFill>
+                  <a:srgbClr val="6E5D4E"/>
+                </a:solidFill>
+                <a:latin typeface="Arial"/>
+              </a:defRPr>
+            </a:pPr>
+            <a:r>
+              <a:t>TEAM ROLE DISTRIBUTION (GUIDELINE SECTION 10)</a:t>
+            </a:r>
+          </a:p>
+          <a:p>
+            <a:pPr>
+              <a:spcAft>
+                <a:spcPts val="500"/>
+              </a:spcAft>
+              <a:defRPr sz="1350" b="1">
+                <a:solidFill>
+                  <a:srgbClr val="241E17"/>
+                </a:solidFill>
+                <a:latin typeface="Arial"/>
+              </a:defRPr>
+            </a:pPr>
+            <a:r>
+              <a:t>Group VIII Members &amp; Demonstration Responsibilities</a:t>
+            </a:r>
+          </a:p>
+          <a:p>
+            <a:pPr>
+              <a:spcAft>
+                <a:spcPts val="300"/>
+              </a:spcAft>
+              <a:defRPr sz="1050">
+                <a:solidFill>
+                  <a:srgbClr val="6E5D4E"/>
+                </a:solidFill>
+                <a:latin typeface="Arial"/>
+              </a:defRPr>
+            </a:pPr>
+            <a:r>
+              <a:t>1. ROGER A RAJU (Lead / Architecture): Problem statement, product overview, software workflow &amp; dataset management (Slide 1 &amp; 2).</a:t>
+            </a:r>
+          </a:p>
+          <a:p>
+            <a:pPr>
+              <a:spcAft>
+                <a:spcPts val="300"/>
+              </a:spcAft>
+              <a:defRPr sz="1050">
+                <a:solidFill>
+                  <a:srgbClr val="6E5D4E"/>
+                </a:solidFill>
+                <a:latin typeface="Arial"/>
+              </a:defRPr>
+            </a:pPr>
+            <a:r>
+              <a:t>2. K. ROHIT GOUD (Algorithms Lead): GF(2) Galois field mathematics, Modulo-2 XOR logic &amp; CRC-32 polynomial division (Slide 3 &amp; 4).</a:t>
+            </a:r>
+          </a:p>
+          <a:p>
+            <a:pPr>
+              <a:spcAft>
+                <a:spcPts val="300"/>
+              </a:spcAft>
+              <a:defRPr sz="1050">
+                <a:solidFill>
+                  <a:srgbClr val="6E5D4E"/>
+                </a:solidFill>
+                <a:latin typeface="Arial"/>
+              </a:defRPr>
+            </a:pPr>
+            <a:r>
+              <a:t>3. G. SIDDHARTHA (Data Ingestion Lead): ASCII-to-binary stream mapping, file input parsing (.log/.txt) &amp; dashboard integration (Slide 4 &amp; 5).</a:t>
+            </a:r>
+          </a:p>
+          <a:p>
+            <a:pPr>
+              <a:spcAft>
+                <a:spcPts val="300"/>
+              </a:spcAft>
+              <a:defRPr sz="1050">
+                <a:solidFill>
+                  <a:srgbClr val="6E5D4E"/>
+                </a:solidFill>
+                <a:latin typeface="Arial"/>
+              </a:defRPr>
+            </a:pPr>
+            <a:r>
+              <a:t>4. P. HARSHAVARDHAN (Backend &amp; Telemetry): Flask REST API (/api/compute, /api/verify), session divisor &amp; live step telemetry (Slide 5 &amp; 6).</a:t>
+            </a:r>
+          </a:p>
+          <a:p>
+            <a:pPr>
+              <a:spcAft>
+                <a:spcPts val="300"/>
+              </a:spcAft>
+              <a:defRPr sz="1050">
+                <a:solidFill>
+                  <a:srgbClr val="6E5D4E"/>
+                </a:solidFill>
+                <a:latin typeface="Arial"/>
+              </a:defRPr>
+            </a:pPr>
+            <a:r>
+              <a:t>5. G. REVANTH (QA &amp; Verification Lead): Test cases (TC-01..TC-05), error-injection simulation, challenges &amp; summary (Slide 7 &amp; 8).</a:t>
             </a:r>
           </a:p>
         </p:txBody>
@@ -3714,7 +3605,7 @@
             <a:avLst/>
           </a:prstGeom>
           <a:solidFill>
-            <a:srgbClr val="0B0F19"/>
+            <a:srgbClr val="FFF8E7"/>
           </a:solidFill>
           <a:ln>
             <a:noFill/>
@@ -3750,7 +3641,7 @@
         </p:nvSpPr>
         <p:spPr>
           <a:xfrm>
-            <a:off x="731520" y="365760"/>
+            <a:off x="731520" y="320040"/>
             <a:ext cx="8229600" cy="228600"/>
           </a:xfrm>
           <a:prstGeom prst="rect">
@@ -3765,14 +3656,15 @@
           <a:lstStyle/>
           <a:p>
             <a:pPr>
-              <a:defRPr sz="1000" b="1">
-                <a:solidFill>
-                  <a:srgbClr val="38BDF8"/>
-                </a:solidFill>
-              </a:defRPr>
-            </a:pPr>
-            <a:r>
-              <a:t>VIVA DEFENSE</a:t>
+              <a:defRPr sz="950" b="1">
+                <a:solidFill>
+                  <a:srgbClr val="6E5D4E"/>
+                </a:solidFill>
+                <a:latin typeface="Arial"/>
+              </a:defRPr>
+            </a:pPr>
+            <a:r>
+              <a:t>SLIDE 10 • FINAL SUMMARY</a:t>
             </a:r>
           </a:p>
         </p:txBody>
@@ -3785,8 +3677,8 @@
         </p:nvSpPr>
         <p:spPr>
           <a:xfrm>
-            <a:off x="731520" y="594360"/>
-            <a:ext cx="8686800" cy="548640"/>
+            <a:off x="731520" y="530352"/>
+            <a:ext cx="8961120" cy="548640"/>
           </a:xfrm>
           <a:prstGeom prst="rect">
             <a:avLst/>
@@ -3800,14 +3692,15 @@
           <a:lstStyle/>
           <a:p>
             <a:pPr>
-              <a:defRPr sz="2200" b="1">
-                <a:solidFill>
-                  <a:srgbClr val="FFFFFF"/>
-                </a:solidFill>
-              </a:defRPr>
-            </a:pPr>
-            <a:r>
-              <a:t>Summary &amp; Key Takeaways for Viva</a:t>
+              <a:defRPr sz="2100" b="1">
+                <a:solidFill>
+                  <a:srgbClr val="241E17"/>
+                </a:solidFill>
+                <a:latin typeface="Arial"/>
+              </a:defRPr>
+            </a:pPr>
+            <a:r>
+              <a:t>Product Summary &amp; Key Learning Outcomes</a:t>
             </a:r>
           </a:p>
         </p:txBody>
@@ -3820,18 +3713,18 @@
         </p:nvSpPr>
         <p:spPr>
           <a:xfrm>
-            <a:off x="10241280" y="411480"/>
-            <a:ext cx="1188720" cy="365760"/>
+            <a:off x="10241280" y="365760"/>
+            <a:ext cx="1188720" cy="347472"/>
           </a:xfrm>
           <a:prstGeom prst="roundRect">
             <a:avLst/>
           </a:prstGeom>
           <a:solidFill>
-            <a:srgbClr val="162032"/>
+            <a:srgbClr val="FFFFFF"/>
           </a:solidFill>
           <a:ln>
             <a:solidFill>
-              <a:srgbClr val="24344D"/>
+              <a:srgbClr val="E2D5C3"/>
             </a:solidFill>
           </a:ln>
         </p:spPr>
@@ -3865,8 +3758,8 @@
         </p:nvSpPr>
         <p:spPr>
           <a:xfrm>
-            <a:off x="10241280" y="411480"/>
-            <a:ext cx="1188720" cy="365760"/>
+            <a:off x="10241280" y="365760"/>
+            <a:ext cx="1188720" cy="347472"/>
           </a:xfrm>
           <a:prstGeom prst="rect">
             <a:avLst/>
@@ -3880,10 +3773,11 @@
           <a:lstStyle/>
           <a:p>
             <a:pPr algn="ctr">
-              <a:defRPr sz="1000" b="1">
-                <a:solidFill>
-                  <a:srgbClr val="94A3B8"/>
-                </a:solidFill>
+              <a:defRPr sz="950" b="1">
+                <a:solidFill>
+                  <a:srgbClr val="6E5D4E"/>
+                </a:solidFill>
+                <a:latin typeface="Arial"/>
               </a:defRPr>
             </a:pPr>
             <a:r>
@@ -3900,18 +3794,18 @@
         </p:nvSpPr>
         <p:spPr>
           <a:xfrm>
-            <a:off x="731520" y="1371600"/>
-            <a:ext cx="5120640" cy="4754880"/>
+            <a:off x="731520" y="1280160"/>
+            <a:ext cx="5212080" cy="5029200"/>
           </a:xfrm>
           <a:prstGeom prst="roundRect">
             <a:avLst/>
           </a:prstGeom>
           <a:solidFill>
-            <a:srgbClr val="162032"/>
+            <a:srgbClr val="FFFFFF"/>
           </a:solidFill>
-          <a:ln w="15240">
+          <a:ln w="13970">
             <a:solidFill>
-              <a:srgbClr val="24344D"/>
+              <a:srgbClr val="E2D5C3"/>
             </a:solidFill>
           </a:ln>
         </p:spPr>
@@ -3945,8 +3839,8 @@
         </p:nvSpPr>
         <p:spPr>
           <a:xfrm>
-            <a:off x="914400" y="1554480"/>
-            <a:ext cx="4754880" cy="4389120"/>
+            <a:off x="877824" y="1408176"/>
+            <a:ext cx="4919472" cy="4773168"/>
           </a:xfrm>
           <a:prstGeom prst="rect">
             <a:avLst/>
@@ -3963,89 +3857,111 @@
               <a:spcAft>
                 <a:spcPts val="200"/>
               </a:spcAft>
-              <a:defRPr sz="900" b="1">
-                <a:solidFill>
-                  <a:srgbClr val="94A3B8"/>
-                </a:solidFill>
-              </a:defRPr>
-            </a:pPr>
-            <a:r>
-              <a:t>MILESTONES COMPLETED</a:t>
-            </a:r>
-          </a:p>
-          <a:p>
-            <a:pPr>
-              <a:spcAft>
-                <a:spcPts val="800"/>
-              </a:spcAft>
-              <a:defRPr sz="1500" b="1">
-                <a:solidFill>
-                  <a:srgbClr val="38BDF8"/>
-                </a:solidFill>
-              </a:defRPr>
-            </a:pPr>
-            <a:r>
-              <a:t>Core Engineering Achievements</a:t>
-            </a:r>
-          </a:p>
-          <a:p>
-            <a:pPr>
-              <a:spcAft>
-                <a:spcPts val="400"/>
-              </a:spcAft>
-              <a:defRPr sz="1150">
-                <a:solidFill>
-                  <a:srgbClr val="E2E8F0"/>
-                </a:solidFill>
-              </a:defRPr>
-            </a:pPr>
-            <a:r>
-              <a:t>✓ Handwritten GF(2) Mathematics: Zero black-box dependencies; XOR polynomial long division built from first principles.</a:t>
-            </a:r>
-          </a:p>
-          <a:p>
-            <a:pPr>
-              <a:spcAft>
-                <a:spcPts val="400"/>
-              </a:spcAft>
-              <a:defRPr sz="1150">
-                <a:solidFill>
-                  <a:srgbClr val="E2E8F0"/>
-                </a:solidFill>
-              </a:defRPr>
-            </a:pPr>
-            <a:r>
-              <a:t>✓ Session-Level Generator Invariant: Generates and preserves a 33-bit divisor across all client/server exchanges.</a:t>
-            </a:r>
-          </a:p>
-          <a:p>
-            <a:pPr>
-              <a:spcAft>
-                <a:spcPts val="400"/>
-              </a:spcAft>
-              <a:defRPr sz="1150">
-                <a:solidFill>
-                  <a:srgbClr val="E2E8F0"/>
-                </a:solidFill>
-              </a:defRPr>
-            </a:pPr>
-            <a:r>
-              <a:t>✓ Rich Observability Contract: Exposes bitstream conversion, zero-padding, XOR stages, and 32-bit remainders via REST APIs.</a:t>
-            </a:r>
-          </a:p>
-          <a:p>
-            <a:pPr>
-              <a:spcAft>
-                <a:spcPts val="400"/>
-              </a:spcAft>
-              <a:defRPr sz="1150">
-                <a:solidFill>
-                  <a:srgbClr val="E2E8F0"/>
-                </a:solidFill>
-              </a:defRPr>
-            </a:pPr>
-            <a:r>
-              <a:t>✓ Production-Ready Repository: Pushed to GitHub with complete clean separation between frontend and backend.</a:t>
+              <a:defRPr sz="850" b="1">
+                <a:solidFill>
+                  <a:srgbClr val="6E5D4E"/>
+                </a:solidFill>
+                <a:latin typeface="Arial"/>
+              </a:defRPr>
+            </a:pPr>
+            <a:r>
+              <a:t>SYSTEM SPECIFICATIONS</a:t>
+            </a:r>
+          </a:p>
+          <a:p>
+            <a:pPr>
+              <a:spcAft>
+                <a:spcPts val="500"/>
+              </a:spcAft>
+              <a:defRPr sz="1350" b="1">
+                <a:solidFill>
+                  <a:srgbClr val="241E17"/>
+                </a:solidFill>
+                <a:latin typeface="Arial"/>
+              </a:defRPr>
+            </a:pPr>
+            <a:r>
+              <a:t>Product Summary &amp; Deliverables</a:t>
+            </a:r>
+          </a:p>
+          <a:p>
+            <a:pPr>
+              <a:spcAft>
+                <a:spcPts val="300"/>
+              </a:spcAft>
+              <a:defRPr sz="1050">
+                <a:solidFill>
+                  <a:srgbClr val="6E5D4E"/>
+                </a:solidFill>
+                <a:latin typeface="Arial"/>
+              </a:defRPr>
+            </a:pPr>
+            <a:r>
+              <a:t>• Developed Product: Industrial Machine Log Integrity Checker (Product 8).</a:t>
+            </a:r>
+          </a:p>
+          <a:p>
+            <a:pPr>
+              <a:spcAft>
+                <a:spcPts val="300"/>
+              </a:spcAft>
+              <a:defRPr sz="1050">
+                <a:solidFill>
+                  <a:srgbClr val="6E5D4E"/>
+                </a:solidFill>
+                <a:latin typeface="Arial"/>
+              </a:defRPr>
+            </a:pPr>
+            <a:r>
+              <a:t>• Supported Input Types: Raw binary bitstreams, UTF-8 text strings, and industrial .log / .txt telemetry files.</a:t>
+            </a:r>
+          </a:p>
+          <a:p>
+            <a:pPr>
+              <a:spcAft>
+                <a:spcPts val="300"/>
+              </a:spcAft>
+              <a:defRPr sz="1050">
+                <a:solidFill>
+                  <a:srgbClr val="6E5D4E"/>
+                </a:solidFill>
+                <a:latin typeface="Arial"/>
+              </a:defRPr>
+            </a:pPr>
+            <a:r>
+              <a:t>• Supported CRC Algorithm: Pure Modulo-2 XOR CRC-32 with session-fixed 33-bit generator polynomial.</a:t>
+            </a:r>
+          </a:p>
+          <a:p>
+            <a:pPr>
+              <a:spcAft>
+                <a:spcPts val="300"/>
+              </a:spcAft>
+              <a:defRPr sz="1050">
+                <a:solidFill>
+                  <a:srgbClr val="6E5D4E"/>
+                </a:solidFill>
+                <a:latin typeface="Arial"/>
+              </a:defRPr>
+            </a:pPr>
+            <a:r>
+              <a:t>• Error Detection Capabilities: 100% single bit, 100% double bit, 100% bursts &lt;= 32 bits, 99.99999997% longer bursts.</a:t>
+            </a:r>
+          </a:p>
+          <a:p>
+            <a:pPr>
+              <a:spcAft>
+                <a:spcPts val="300"/>
+              </a:spcAft>
+              <a:defRPr sz="1050">
+                <a:solidFill>
+                  <a:srgbClr val="6E5D4E"/>
+                </a:solidFill>
+                <a:latin typeface="Arial"/>
+              </a:defRPr>
+            </a:pPr>
+            <a:r>
+              <a:t>• Software Stack: Python 3, Flask REST API, Vanilla HTML5/CSS3/JS, Warm Monotone Single-Screen UI.</a:t>
             </a:r>
           </a:p>
         </p:txBody>
@@ -4058,18 +3974,18 @@
         </p:nvSpPr>
         <p:spPr>
           <a:xfrm>
-            <a:off x="6217920" y="1371600"/>
-            <a:ext cx="5212080" cy="4754880"/>
+            <a:off x="6217920" y="1280160"/>
+            <a:ext cx="5212080" cy="5029200"/>
           </a:xfrm>
           <a:prstGeom prst="roundRect">
             <a:avLst/>
           </a:prstGeom>
           <a:solidFill>
-            <a:srgbClr val="162032"/>
+            <a:srgbClr val="EDF5E8"/>
           </a:solidFill>
-          <a:ln w="15240">
+          <a:ln w="13970">
             <a:solidFill>
-              <a:srgbClr val="38BDF8"/>
+              <a:srgbClr val="B5D8AC"/>
             </a:solidFill>
           </a:ln>
         </p:spPr>
@@ -4103,8 +4019,8 @@
         </p:nvSpPr>
         <p:spPr>
           <a:xfrm>
-            <a:off x="6400800" y="1554480"/>
-            <a:ext cx="4846320" cy="4389120"/>
+            <a:off x="6364224" y="1408176"/>
+            <a:ext cx="4919472" cy="4773168"/>
           </a:xfrm>
           <a:prstGeom prst="rect">
             <a:avLst/>
@@ -4121,89 +4037,111 @@
               <a:spcAft>
                 <a:spcPts val="200"/>
               </a:spcAft>
-              <a:defRPr sz="900" b="1">
-                <a:solidFill>
-                  <a:srgbClr val="94A3B8"/>
-                </a:solidFill>
-              </a:defRPr>
-            </a:pPr>
-            <a:r>
-              <a:t>AUTHORITATIVE ANSWERS</a:t>
-            </a:r>
-          </a:p>
-          <a:p>
-            <a:pPr>
-              <a:spcAft>
-                <a:spcPts val="800"/>
-              </a:spcAft>
-              <a:defRPr sz="1500" b="1">
-                <a:solidFill>
-                  <a:srgbClr val="38BDF8"/>
-                </a:solidFill>
-              </a:defRPr>
-            </a:pPr>
-            <a:r>
-              <a:t>Viva Rapid-Fire Cheatsheet</a:t>
-            </a:r>
-          </a:p>
-          <a:p>
-            <a:pPr>
-              <a:spcAft>
-                <a:spcPts val="400"/>
-              </a:spcAft>
-              <a:defRPr sz="1150">
-                <a:solidFill>
-                  <a:srgbClr val="E2E8F0"/>
-                </a:solidFill>
-              </a:defRPr>
-            </a:pPr>
-            <a:r>
-              <a:t>• Q: Why Modulo-2? Addition and subtraction are bitwise XOR (no carries/borrows), making arithmetic fast, deterministic, and hardware-friendly.</a:t>
-            </a:r>
-          </a:p>
-          <a:p>
-            <a:pPr>
-              <a:spcAft>
-                <a:spcPts val="400"/>
-              </a:spcAft>
-              <a:defRPr sz="1150">
-                <a:solidFill>
-                  <a:srgbClr val="E2E8F0"/>
-                </a:solidFill>
-              </a:defRPr>
-            </a:pPr>
-            <a:r>
-              <a:t>• Q: Why a 33-bit divisor for 32-bit CRC? Dividing by a degree-32 polynomial guarantees a remainder of degree &lt;= 31 (strictly 32 bits).</a:t>
-            </a:r>
-          </a:p>
-          <a:p>
-            <a:pPr>
-              <a:spcAft>
-                <a:spcPts val="400"/>
-              </a:spcAft>
-              <a:defRPr sz="1150">
-                <a:solidFill>
-                  <a:srgbClr val="E2E8F0"/>
-                </a:solidFill>
-              </a:defRPr>
-            </a:pPr>
-            <a:r>
-              <a:t>• Q: Why zero remainder on verification? Codeword T(x) = M(x)·x^32 ⊕ R(x). Since R(x) is the remainder of M(x)·x^32 / G(x), adding R(x) cancels the remainder modulo G(x).</a:t>
-            </a:r>
-          </a:p>
-          <a:p>
-            <a:pPr>
-              <a:spcAft>
-                <a:spcPts val="400"/>
-              </a:spcAft>
-              <a:defRPr sz="1150">
-                <a:solidFill>
-                  <a:srgbClr val="E2E8F0"/>
-                </a:solidFill>
-              </a:defRPr>
-            </a:pPr>
-            <a:r>
-              <a:t>• Repository: github.com/rogeralukka/OS-CN-Product-8</a:t>
+              <a:defRPr sz="850" b="1">
+                <a:solidFill>
+                  <a:srgbClr val="6E5D4E"/>
+                </a:solidFill>
+                <a:latin typeface="Arial"/>
+              </a:defRPr>
+            </a:pPr>
+            <a:r>
+              <a:t>ACADEMIC &amp; PRACTICAL LEARNING</a:t>
+            </a:r>
+          </a:p>
+          <a:p>
+            <a:pPr>
+              <a:spcAft>
+                <a:spcPts val="500"/>
+              </a:spcAft>
+              <a:defRPr sz="1350" b="1">
+                <a:solidFill>
+                  <a:srgbClr val="275222"/>
+                </a:solidFill>
+                <a:latin typeface="Arial"/>
+              </a:defRPr>
+            </a:pPr>
+            <a:r>
+              <a:t>Key Learning Outcomes (OS &amp; Computer Networks)</a:t>
+            </a:r>
+          </a:p>
+          <a:p>
+            <a:pPr>
+              <a:spcAft>
+                <a:spcPts val="300"/>
+              </a:spcAft>
+              <a:defRPr sz="1050">
+                <a:solidFill>
+                  <a:srgbClr val="6E5D4E"/>
+                </a:solidFill>
+                <a:latin typeface="Arial"/>
+              </a:defRPr>
+            </a:pPr>
+            <a:r>
+              <a:t>1. Protocol Parity: Implemented synchronized sender-receiver telemetry pipelines using shared algebraic invariants.</a:t>
+            </a:r>
+          </a:p>
+          <a:p>
+            <a:pPr>
+              <a:spcAft>
+                <a:spcPts val="300"/>
+              </a:spcAft>
+              <a:defRPr sz="1050">
+                <a:solidFill>
+                  <a:srgbClr val="6E5D4E"/>
+                </a:solidFill>
+                <a:latin typeface="Arial"/>
+              </a:defRPr>
+            </a:pPr>
+            <a:r>
+              <a:t>2. Bitwise Computing: Built low-level bit shifting and XOR operations without relying on opaque external libraries (zlib).</a:t>
+            </a:r>
+          </a:p>
+          <a:p>
+            <a:pPr>
+              <a:spcAft>
+                <a:spcPts val="300"/>
+              </a:spcAft>
+              <a:defRPr sz="1050">
+                <a:solidFill>
+                  <a:srgbClr val="6E5D4E"/>
+                </a:solidFill>
+                <a:latin typeface="Arial"/>
+              </a:defRPr>
+            </a:pPr>
+            <a:r>
+              <a:t>3. Network Error Detection: Understood why polynomial division surpasses additive checksums in noisy transmission channels.</a:t>
+            </a:r>
+          </a:p>
+          <a:p>
+            <a:pPr>
+              <a:spcAft>
+                <a:spcPts val="300"/>
+              </a:spcAft>
+              <a:defRPr sz="1050">
+                <a:solidFill>
+                  <a:srgbClr val="6E5D4E"/>
+                </a:solidFill>
+                <a:latin typeface="Arial"/>
+              </a:defRPr>
+            </a:pPr>
+            <a:r>
+              <a:t>4. Full-Stack Integration: Integrated Flask REST endpoints with real-time UI telemetry and FileReader APIs.</a:t>
+            </a:r>
+          </a:p>
+          <a:p>
+            <a:pPr>
+              <a:spcAft>
+                <a:spcPts val="300"/>
+              </a:spcAft>
+              <a:defRPr sz="1050">
+                <a:solidFill>
+                  <a:srgbClr val="6E5D4E"/>
+                </a:solidFill>
+                <a:latin typeface="Arial"/>
+              </a:defRPr>
+            </a:pPr>
+            <a:r>
+              <a:t>5. Teamwork &amp; Collaboration: Successfully divided roles across architecture, algorithms, UI, backend, and QA testing.</a:t>
             </a:r>
           </a:p>
         </p:txBody>
@@ -4241,7 +4179,7 @@
             <a:avLst/>
           </a:prstGeom>
           <a:solidFill>
-            <a:srgbClr val="0B0F19"/>
+            <a:srgbClr val="FFF8E7"/>
           </a:solidFill>
           <a:ln>
             <a:noFill/>
@@ -4277,7 +4215,7 @@
         </p:nvSpPr>
         <p:spPr>
           <a:xfrm>
-            <a:off x="731520" y="365760"/>
+            <a:off x="731520" y="320040"/>
             <a:ext cx="8229600" cy="228600"/>
           </a:xfrm>
           <a:prstGeom prst="rect">
@@ -4292,14 +4230,15 @@
           <a:lstStyle/>
           <a:p>
             <a:pPr>
-              <a:defRPr sz="1000" b="1">
-                <a:solidFill>
-                  <a:srgbClr val="38BDF8"/>
-                </a:solidFill>
-              </a:defRPr>
-            </a:pPr>
-            <a:r>
-              <a:t>PROBLEM STATEMENT</a:t>
+              <a:defRPr sz="950" b="1">
+                <a:solidFill>
+                  <a:srgbClr val="6E5D4E"/>
+                </a:solidFill>
+                <a:latin typeface="Arial"/>
+              </a:defRPr>
+            </a:pPr>
+            <a:r>
+              <a:t>SLIDE 2 • PRODUCT SUMMARY</a:t>
             </a:r>
           </a:p>
         </p:txBody>
@@ -4312,8 +4251,8 @@
         </p:nvSpPr>
         <p:spPr>
           <a:xfrm>
-            <a:off x="731520" y="594360"/>
-            <a:ext cx="8686800" cy="548640"/>
+            <a:off x="731520" y="530352"/>
+            <a:ext cx="8961120" cy="548640"/>
           </a:xfrm>
           <a:prstGeom prst="rect">
             <a:avLst/>
@@ -4327,14 +4266,15 @@
           <a:lstStyle/>
           <a:p>
             <a:pPr>
-              <a:defRPr sz="2200" b="1">
-                <a:solidFill>
-                  <a:srgbClr val="FFFFFF"/>
-                </a:solidFill>
-              </a:defRPr>
-            </a:pPr>
-            <a:r>
-              <a:t>The Industrial Telemetry Fault Line</a:t>
+              <a:defRPr sz="2100" b="1">
+                <a:solidFill>
+                  <a:srgbClr val="241E17"/>
+                </a:solidFill>
+                <a:latin typeface="Arial"/>
+              </a:defRPr>
+            </a:pPr>
+            <a:r>
+              <a:t>Introduction to the Product &amp; Software Workflow</a:t>
             </a:r>
           </a:p>
         </p:txBody>
@@ -4347,18 +4287,18 @@
         </p:nvSpPr>
         <p:spPr>
           <a:xfrm>
-            <a:off x="10241280" y="411480"/>
-            <a:ext cx="1188720" cy="365760"/>
+            <a:off x="10241280" y="365760"/>
+            <a:ext cx="1188720" cy="347472"/>
           </a:xfrm>
           <a:prstGeom prst="roundRect">
             <a:avLst/>
           </a:prstGeom>
           <a:solidFill>
-            <a:srgbClr val="162032"/>
+            <a:srgbClr val="FFFFFF"/>
           </a:solidFill>
           <a:ln>
             <a:solidFill>
-              <a:srgbClr val="24344D"/>
+              <a:srgbClr val="E2D5C3"/>
             </a:solidFill>
           </a:ln>
         </p:spPr>
@@ -4392,8 +4332,8 @@
         </p:nvSpPr>
         <p:spPr>
           <a:xfrm>
-            <a:off x="10241280" y="411480"/>
-            <a:ext cx="1188720" cy="365760"/>
+            <a:off x="10241280" y="365760"/>
+            <a:ext cx="1188720" cy="347472"/>
           </a:xfrm>
           <a:prstGeom prst="rect">
             <a:avLst/>
@@ -4407,10 +4347,11 @@
           <a:lstStyle/>
           <a:p>
             <a:pPr algn="ctr">
-              <a:defRPr sz="1000" b="1">
-                <a:solidFill>
-                  <a:srgbClr val="94A3B8"/>
-                </a:solidFill>
+              <a:defRPr sz="950" b="1">
+                <a:solidFill>
+                  <a:srgbClr val="6E5D4E"/>
+                </a:solidFill>
+                <a:latin typeface="Arial"/>
               </a:defRPr>
             </a:pPr>
             <a:r>
@@ -4419,322 +4360,332 @@
           </a:p>
         </p:txBody>
       </p:sp>
-      <p:sp>
-        <p:nvSpPr>
-          <p:cNvPr id="7" name="Rounded Rectangle 6"/>
-          <p:cNvSpPr/>
+      <p:graphicFrame>
+        <p:nvGraphicFramePr>
+          <p:cNvPr id="7" name="Table 6"/>
+          <p:cNvGraphicFramePr>
+            <a:graphicFrameLocks noGrp="1"/>
+          </p:cNvGraphicFramePr>
           <p:nvPr/>
-        </p:nvSpPr>
-        <p:spPr>
-          <a:xfrm>
-            <a:off x="731520" y="1371600"/>
-            <a:ext cx="5120640" cy="4754880"/>
-          </a:xfrm>
-          <a:prstGeom prst="roundRect">
-            <a:avLst/>
-          </a:prstGeom>
-          <a:solidFill>
-            <a:srgbClr val="2D0F14"/>
-          </a:solidFill>
-          <a:ln w="15240">
-            <a:solidFill>
-              <a:srgbClr val="991B1B"/>
-            </a:solidFill>
-          </a:ln>
-        </p:spPr>
-        <p:style>
-          <a:lnRef idx="1">
-            <a:schemeClr val="accent1"/>
-          </a:lnRef>
-          <a:fillRef idx="3">
-            <a:schemeClr val="accent1"/>
-          </a:fillRef>
-          <a:effectRef idx="2">
-            <a:schemeClr val="accent1"/>
-          </a:effectRef>
-          <a:fontRef idx="minor">
-            <a:schemeClr val="lt1"/>
-          </a:fontRef>
-        </p:style>
-        <p:txBody>
-          <a:bodyPr rtlCol="0" anchor="ctr"/>
-          <a:lstStyle/>
-          <a:p>
-            <a:pPr algn="ctr"/>
-          </a:p>
-        </p:txBody>
-      </p:sp>
-      <p:sp>
-        <p:nvSpPr>
-          <p:cNvPr id="8" name="TextBox 7"/>
-          <p:cNvSpPr txBox="1"/>
-          <p:nvPr/>
-        </p:nvSpPr>
-        <p:spPr>
-          <a:xfrm>
-            <a:off x="914400" y="1554480"/>
-            <a:ext cx="4754880" cy="4389120"/>
-          </a:xfrm>
-          <a:prstGeom prst="rect">
-            <a:avLst/>
-          </a:prstGeom>
-          <a:noFill/>
-        </p:spPr>
-        <p:txBody>
-          <a:bodyPr wrap="square">
-            <a:spAutoFit/>
-          </a:bodyPr>
-          <a:lstStyle/>
-          <a:p>
-            <a:pPr>
-              <a:spcAft>
-                <a:spcPts val="200"/>
-              </a:spcAft>
-              <a:defRPr sz="900" b="1">
-                <a:solidFill>
-                  <a:srgbClr val="94A3B8"/>
-                </a:solidFill>
-              </a:defRPr>
-            </a:pPr>
-            <a:r>
-              <a:t>VULNERABILITY MATRIX</a:t>
-            </a:r>
-          </a:p>
-          <a:p>
-            <a:pPr>
-              <a:spcAft>
-                <a:spcPts val="800"/>
-              </a:spcAft>
-              <a:defRPr sz="1500" b="1">
-                <a:solidFill>
-                  <a:srgbClr val="F87171"/>
-                </a:solidFill>
-              </a:defRPr>
-            </a:pPr>
-            <a:r>
-              <a:t>The Threat: Silent Bit Inversion</a:t>
-            </a:r>
-          </a:p>
-          <a:p>
-            <a:pPr>
-              <a:spcAft>
-                <a:spcPts val="400"/>
-              </a:spcAft>
-              <a:defRPr sz="1150">
-                <a:solidFill>
-                  <a:srgbClr val="E2E8F0"/>
-                </a:solidFill>
-              </a:defRPr>
-            </a:pPr>
-            <a:r>
-              <a:t>• High-EMI Industrial Environments: Heavy motors, arc welding, and power line sags flip bits in transit.</a:t>
-            </a:r>
-          </a:p>
-          <a:p>
-            <a:pPr>
-              <a:spcAft>
-                <a:spcPts val="400"/>
-              </a:spcAft>
-              <a:defRPr sz="1150">
-                <a:solidFill>
-                  <a:srgbClr val="E2E8F0"/>
-                </a:solidFill>
-              </a:defRPr>
-            </a:pPr>
-            <a:r>
-              <a:t>• Sub-Perceptual Data Drift: Changing RPM 3450 -&gt; 3451 or Temp 82.4C -&gt; 92.4C looks valid to parsers but corrupts automated control loops.</a:t>
-            </a:r>
-          </a:p>
-          <a:p>
-            <a:pPr>
-              <a:spcAft>
-                <a:spcPts val="400"/>
-              </a:spcAft>
-              <a:defRPr sz="1150">
-                <a:solidFill>
-                  <a:srgbClr val="E2E8F0"/>
-                </a:solidFill>
-              </a:defRPr>
-            </a:pPr>
-            <a:r>
-              <a:t>• Traditional Checksum Blindness: Simple summing checksums fail when compensating bit errors occur.</a:t>
-            </a:r>
-          </a:p>
-          <a:p>
-            <a:pPr>
-              <a:spcAft>
-                <a:spcPts val="400"/>
-              </a:spcAft>
-              <a:defRPr sz="1150">
-                <a:solidFill>
-                  <a:srgbClr val="E2E8F0"/>
-                </a:solidFill>
-              </a:defRPr>
-            </a:pPr>
-            <a:r>
-              <a:t>• Man-in-the-Middle Forgery: Plaintext logs lack mathematical immutability proofs.</a:t>
-            </a:r>
-          </a:p>
-        </p:txBody>
-      </p:sp>
-      <p:sp>
-        <p:nvSpPr>
-          <p:cNvPr id="9" name="Rounded Rectangle 8"/>
-          <p:cNvSpPr/>
-          <p:nvPr/>
-        </p:nvSpPr>
-        <p:spPr>
-          <a:xfrm>
-            <a:off x="6217920" y="1371600"/>
-            <a:ext cx="5212080" cy="4754880"/>
-          </a:xfrm>
-          <a:prstGeom prst="roundRect">
-            <a:avLst/>
-          </a:prstGeom>
-          <a:solidFill>
-            <a:srgbClr val="0A2819"/>
-          </a:solidFill>
-          <a:ln w="15240">
-            <a:solidFill>
-              <a:srgbClr val="166534"/>
-            </a:solidFill>
-          </a:ln>
-        </p:spPr>
-        <p:style>
-          <a:lnRef idx="1">
-            <a:schemeClr val="accent1"/>
-          </a:lnRef>
-          <a:fillRef idx="3">
-            <a:schemeClr val="accent1"/>
-          </a:fillRef>
-          <a:effectRef idx="2">
-            <a:schemeClr val="accent1"/>
-          </a:effectRef>
-          <a:fontRef idx="minor">
-            <a:schemeClr val="lt1"/>
-          </a:fontRef>
-        </p:style>
-        <p:txBody>
-          <a:bodyPr rtlCol="0" anchor="ctr"/>
-          <a:lstStyle/>
-          <a:p>
-            <a:pPr algn="ctr"/>
-          </a:p>
-        </p:txBody>
-      </p:sp>
-      <p:sp>
-        <p:nvSpPr>
-          <p:cNvPr id="10" name="TextBox 9"/>
-          <p:cNvSpPr txBox="1"/>
-          <p:nvPr/>
-        </p:nvSpPr>
-        <p:spPr>
-          <a:xfrm>
-            <a:off x="6400800" y="1554480"/>
-            <a:ext cx="4846320" cy="4389120"/>
-          </a:xfrm>
-          <a:prstGeom prst="rect">
-            <a:avLst/>
-          </a:prstGeom>
-          <a:noFill/>
-        </p:spPr>
-        <p:txBody>
-          <a:bodyPr wrap="square">
-            <a:spAutoFit/>
-          </a:bodyPr>
-          <a:lstStyle/>
-          <a:p>
-            <a:pPr>
-              <a:spcAft>
-                <a:spcPts val="200"/>
-              </a:spcAft>
-              <a:defRPr sz="900" b="1">
-                <a:solidFill>
-                  <a:srgbClr val="94A3B8"/>
-                </a:solidFill>
-              </a:defRPr>
-            </a:pPr>
-            <a:r>
-              <a:t>ENGINEERING DEFENSE</a:t>
-            </a:r>
-          </a:p>
-          <a:p>
-            <a:pPr>
-              <a:spcAft>
-                <a:spcPts val="800"/>
-              </a:spcAft>
-              <a:defRPr sz="1500" b="1">
-                <a:solidFill>
-                  <a:srgbClr val="4ADE80"/>
-                </a:solidFill>
-              </a:defRPr>
-            </a:pPr>
-            <a:r>
-              <a:t>The Solution: Bitstream Polynomial Proof</a:t>
-            </a:r>
-          </a:p>
-          <a:p>
-            <a:pPr>
-              <a:spcAft>
-                <a:spcPts val="400"/>
-              </a:spcAft>
-              <a:defRPr sz="1150">
-                <a:solidFill>
-                  <a:srgbClr val="E2E8F0"/>
-                </a:solidFill>
-              </a:defRPr>
-            </a:pPr>
-            <a:r>
-              <a:t>• 100% Burst Error Elimination: Catches all contiguous bit corruptions up to 32 bits with mathematical certainty.</a:t>
-            </a:r>
-          </a:p>
-          <a:p>
-            <a:pPr>
-              <a:spcAft>
-                <a:spcPts val="400"/>
-              </a:spcAft>
-              <a:defRPr sz="1150">
-                <a:solidFill>
-                  <a:srgbClr val="E2E8F0"/>
-                </a:solidFill>
-              </a:defRPr>
-            </a:pPr>
-            <a:r>
-              <a:t>• Zero-Carrying Arithmetic: Operates strictly in GF(2) using binary XOR without CPU borrow overhead.</a:t>
-            </a:r>
-          </a:p>
-          <a:p>
-            <a:pPr>
-              <a:spcAft>
-                <a:spcPts val="400"/>
-              </a:spcAft>
-              <a:defRPr sz="1150">
-                <a:solidFill>
-                  <a:srgbClr val="E2E8F0"/>
-                </a:solidFill>
-              </a:defRPr>
-            </a:pPr>
-            <a:r>
-              <a:t>• Transparent Step Observability: Exposes full bit streams: ASCII conversion -&gt; zero-padding -&gt; remainder reduction.</a:t>
-            </a:r>
-          </a:p>
-          <a:p>
-            <a:pPr>
-              <a:spcAft>
-                <a:spcPts val="400"/>
-              </a:spcAft>
-              <a:defRPr sz="1150">
-                <a:solidFill>
-                  <a:srgbClr val="E2E8F0"/>
-                </a:solidFill>
-              </a:defRPr>
-            </a:pPr>
-            <a:r>
-              <a:t>• Session Invariance: Client and server share a fixed 33-bit divisor across the telemetry lifecycle.</a:t>
-            </a:r>
-          </a:p>
-        </p:txBody>
-      </p:sp>
+        </p:nvGraphicFramePr>
+        <p:xfrm>
+          <a:off x="731520" y="1280160"/>
+          <a:ext cx="10698480" cy="5029200"/>
+        </p:xfrm>
+        <a:graphic>
+          <a:graphicData uri="http://schemas.openxmlformats.org/drawingml/2006/table">
+            <a:tbl>
+              <a:tblPr firstRow="1" bandRow="1">
+                <a:tableStyleId>{5C22544A-7EE6-4342-B048-85BDC9FD1C3A}</a:tableStyleId>
+              </a:tblPr>
+              <a:tblGrid>
+                <a:gridCol w="2377440"/>
+                <a:gridCol w="8321040"/>
+              </a:tblGrid>
+              <a:tr h="838200">
+                <a:tc>
+                  <a:txBody>
+                    <a:bodyPr/>
+                    <a:lstStyle/>
+                    <a:p>
+                      <a:pPr algn="l">
+                        <a:defRPr sz="1000" b="1">
+                          <a:solidFill>
+                            <a:srgbClr val="241E17"/>
+                          </a:solidFill>
+                          <a:latin typeface="Arial"/>
+                        </a:defRPr>
+                      </a:pPr>
+                      <a:r>
+                        <a:t>Area</a:t>
+                      </a:r>
+                    </a:p>
+                  </a:txBody>
+                  <a:tcPr>
+                    <a:solidFill>
+                      <a:srgbClr val="F6E3C8"/>
+                    </a:solidFill>
+                  </a:tcPr>
+                </a:tc>
+                <a:tc>
+                  <a:txBody>
+                    <a:bodyPr/>
+                    <a:lstStyle/>
+                    <a:p>
+                      <a:pPr algn="l">
+                        <a:defRPr sz="1000" b="1">
+                          <a:solidFill>
+                            <a:srgbClr val="241E17"/>
+                          </a:solidFill>
+                          <a:latin typeface="Arial"/>
+                        </a:defRPr>
+                      </a:pPr>
+                      <a:r>
+                        <a:t>What is Implemented in Product 8</a:t>
+                      </a:r>
+                    </a:p>
+                  </a:txBody>
+                  <a:tcPr>
+                    <a:solidFill>
+                      <a:srgbClr val="F6E3C8"/>
+                    </a:solidFill>
+                  </a:tcPr>
+                </a:tc>
+              </a:tr>
+              <a:tr h="838200">
+                <a:tc>
+                  <a:txBody>
+                    <a:bodyPr/>
+                    <a:lstStyle/>
+                    <a:p>
+                      <a:pPr algn="l">
+                        <a:defRPr sz="950">
+                          <a:solidFill>
+                            <a:srgbClr val="6E5D4E"/>
+                          </a:solidFill>
+                          <a:latin typeface="Arial"/>
+                        </a:defRPr>
+                      </a:pPr>
+                      <a:r>
+                        <a:t>Problem Requirement</a:t>
+                      </a:r>
+                    </a:p>
+                  </a:txBody>
+                  <a:tcPr>
+                    <a:solidFill>
+                      <a:srgbClr val="FFFFFF"/>
+                    </a:solidFill>
+                  </a:tcPr>
+                </a:tc>
+                <a:tc>
+                  <a:txBody>
+                    <a:bodyPr/>
+                    <a:lstStyle/>
+                    <a:p>
+                      <a:pPr algn="l">
+                        <a:defRPr sz="950">
+                          <a:solidFill>
+                            <a:srgbClr val="6E5D4E"/>
+                          </a:solidFill>
+                          <a:latin typeface="Arial"/>
+                        </a:defRPr>
+                      </a:pPr>
+                      <a:r>
+                        <a:t>Detects bit-level telemetry mutations, transmission noise, and log tampering in real-time industrial SCADA systems. CRC is required because additive checksums fail on bit swaps and burst noise.</a:t>
+                      </a:r>
+                    </a:p>
+                  </a:txBody>
+                  <a:tcPr>
+                    <a:solidFill>
+                      <a:srgbClr val="FFFFFF"/>
+                    </a:solidFill>
+                  </a:tcPr>
+                </a:tc>
+              </a:tr>
+              <a:tr h="838200">
+                <a:tc>
+                  <a:txBody>
+                    <a:bodyPr/>
+                    <a:lstStyle/>
+                    <a:p>
+                      <a:pPr algn="l">
+                        <a:defRPr sz="950">
+                          <a:solidFill>
+                            <a:srgbClr val="6E5D4E"/>
+                          </a:solidFill>
+                          <a:latin typeface="Arial"/>
+                        </a:defRPr>
+                      </a:pPr>
+                      <a:r>
+                        <a:t>Implementation Plan</a:t>
+                      </a:r>
+                    </a:p>
+                  </a:txBody>
+                  <a:tcPr>
+                    <a:solidFill>
+                      <a:srgbClr val="F3E6D6"/>
+                    </a:solidFill>
+                  </a:tcPr>
+                </a:tc>
+                <a:tc>
+                  <a:txBody>
+                    <a:bodyPr/>
+                    <a:lstStyle/>
+                    <a:p>
+                      <a:pPr algn="l">
+                        <a:defRPr sz="950">
+                          <a:solidFill>
+                            <a:srgbClr val="6E5D4E"/>
+                          </a:solidFill>
+                          <a:latin typeface="Arial"/>
+                        </a:defRPr>
+                      </a:pPr>
+                      <a:r>
+                        <a:t>1. User Input (Text/File) -&gt; 2. ASCII-to-Binary Conversion -&gt; 3. Append 32 Zeros -&gt; 4. Handwritten Modulo-2 Division (xordiv) -&gt; 5. 32-bit CRC Generated -&gt; 6. Codeword Re-division at Receiver -&gt; 7. Syndrome Zero Check.</a:t>
+                      </a:r>
+                    </a:p>
+                  </a:txBody>
+                  <a:tcPr>
+                    <a:solidFill>
+                      <a:srgbClr val="F3E6D6"/>
+                    </a:solidFill>
+                  </a:tcPr>
+                </a:tc>
+              </a:tr>
+              <a:tr h="838200">
+                <a:tc>
+                  <a:txBody>
+                    <a:bodyPr/>
+                    <a:lstStyle/>
+                    <a:p>
+                      <a:pPr algn="l">
+                        <a:defRPr sz="950">
+                          <a:solidFill>
+                            <a:srgbClr val="6E5D4E"/>
+                          </a:solidFill>
+                          <a:latin typeface="Arial"/>
+                        </a:defRPr>
+                      </a:pPr>
+                      <a:r>
+                        <a:t>Software &amp; Stack Used</a:t>
+                      </a:r>
+                    </a:p>
+                  </a:txBody>
+                  <a:tcPr>
+                    <a:solidFill>
+                      <a:srgbClr val="FFFFFF"/>
+                    </a:solidFill>
+                  </a:tcPr>
+                </a:tc>
+                <a:tc>
+                  <a:txBody>
+                    <a:bodyPr/>
+                    <a:lstStyle/>
+                    <a:p>
+                      <a:pPr algn="l">
+                        <a:defRPr sz="950">
+                          <a:solidFill>
+                            <a:srgbClr val="6E5D4E"/>
+                          </a:solidFill>
+                          <a:latin typeface="Arial"/>
+                        </a:defRPr>
+                      </a:pPr>
+                      <a:r>
+                        <a:t>Backend: Python 3, Flask REST API, Flask-CORS. Frontend: Vanilla HTML5, CSS3 (Warm Monotone Single-Viewport), JavaScript Fetch API. Tools: VS Code, Git, Chrome.</a:t>
+                      </a:r>
+                    </a:p>
+                  </a:txBody>
+                  <a:tcPr>
+                    <a:solidFill>
+                      <a:srgbClr val="FFFFFF"/>
+                    </a:solidFill>
+                  </a:tcPr>
+                </a:tc>
+              </a:tr>
+              <a:tr h="838200">
+                <a:tc>
+                  <a:txBody>
+                    <a:bodyPr/>
+                    <a:lstStyle/>
+                    <a:p>
+                      <a:pPr algn="l">
+                        <a:defRPr sz="950">
+                          <a:solidFill>
+                            <a:srgbClr val="6E5D4E"/>
+                          </a:solidFill>
+                          <a:latin typeface="Arial"/>
+                        </a:defRPr>
+                      </a:pPr>
+                      <a:r>
+                        <a:t>Input / Test Data</a:t>
+                      </a:r>
+                    </a:p>
+                  </a:txBody>
+                  <a:tcPr>
+                    <a:solidFill>
+                      <a:srgbClr val="F3E6D6"/>
+                    </a:solidFill>
+                  </a:tcPr>
+                </a:tc>
+                <a:tc>
+                  <a:txBody>
+                    <a:bodyPr/>
+                    <a:lstStyle/>
+                    <a:p>
+                      <a:pPr algn="l">
+                        <a:defRPr sz="950">
+                          <a:solidFill>
+                            <a:srgbClr val="6E5D4E"/>
+                          </a:solidFill>
+                          <a:latin typeface="Arial"/>
+                        </a:defRPr>
+                      </a:pPr>
+                      <a:r>
+                        <a:t>Supports direct binary streams, raw log text messages, and full industrial .log / .txt files (10 pre-built demo reports provided in Downloads).</a:t>
+                      </a:r>
+                    </a:p>
+                  </a:txBody>
+                  <a:tcPr>
+                    <a:solidFill>
+                      <a:srgbClr val="F3E6D6"/>
+                    </a:solidFill>
+                  </a:tcPr>
+                </a:tc>
+              </a:tr>
+              <a:tr h="838200">
+                <a:tc>
+                  <a:txBody>
+                    <a:bodyPr/>
+                    <a:lstStyle/>
+                    <a:p>
+                      <a:pPr algn="l">
+                        <a:defRPr sz="950">
+                          <a:solidFill>
+                            <a:srgbClr val="6E5D4E"/>
+                          </a:solidFill>
+                          <a:latin typeface="Arial"/>
+                        </a:defRPr>
+                      </a:pPr>
+                      <a:r>
+                        <a:t>Final Output</a:t>
+                      </a:r>
+                    </a:p>
+                  </a:txBody>
+                  <a:tcPr>
+                    <a:solidFill>
+                      <a:srgbClr val="FFFFFF"/>
+                    </a:solidFill>
+                  </a:tcPr>
+                </a:tc>
+                <a:tc>
+                  <a:txBody>
+                    <a:bodyPr/>
+                    <a:lstStyle/>
+                    <a:p>
+                      <a:pPr algn="l">
+                        <a:defRPr sz="950">
+                          <a:solidFill>
+                            <a:srgbClr val="6E5D4E"/>
+                          </a:solidFill>
+                          <a:latin typeface="Arial"/>
+                        </a:defRPr>
+                      </a:pPr>
+                      <a:r>
+                        <a:t>Calculated 32-bit CRC, Hex digest (0x4964A71B), complete bitwise step-by-step audit trail, and instant binary ACCEPT (0^32) or REJECT chip.</a:t>
+                      </a:r>
+                    </a:p>
+                  </a:txBody>
+                  <a:tcPr>
+                    <a:solidFill>
+                      <a:srgbClr val="FFFFFF"/>
+                    </a:solidFill>
+                  </a:tcPr>
+                </a:tc>
+              </a:tr>
+            </a:tbl>
+          </a:graphicData>
+        </a:graphic>
+      </p:graphicFrame>
     </p:spTree>
   </p:cSld>
   <p:clrMapOvr>
@@ -4768,7 +4719,7 @@
             <a:avLst/>
           </a:prstGeom>
           <a:solidFill>
-            <a:srgbClr val="0B0F19"/>
+            <a:srgbClr val="FFF8E7"/>
           </a:solidFill>
           <a:ln>
             <a:noFill/>
@@ -4804,7 +4755,7 @@
         </p:nvSpPr>
         <p:spPr>
           <a:xfrm>
-            <a:off x="731520" y="365760"/>
+            <a:off x="731520" y="320040"/>
             <a:ext cx="8229600" cy="228600"/>
           </a:xfrm>
           <a:prstGeom prst="rect">
@@ -4819,14 +4770,15 @@
           <a:lstStyle/>
           <a:p>
             <a:pPr>
-              <a:defRPr sz="1000" b="1">
-                <a:solidFill>
-                  <a:srgbClr val="38BDF8"/>
-                </a:solidFill>
-              </a:defRPr>
-            </a:pPr>
-            <a:r>
-              <a:t>POLYNOMIAL ALGEBRA</a:t>
+              <a:defRPr sz="950" b="1">
+                <a:solidFill>
+                  <a:srgbClr val="6E5D4E"/>
+                </a:solidFill>
+                <a:latin typeface="Arial"/>
+              </a:defRPr>
+            </a:pPr>
+            <a:r>
+              <a:t>SLIDE 3 • CRC MATHEMATICS</a:t>
             </a:r>
           </a:p>
         </p:txBody>
@@ -4839,8 +4791,8 @@
         </p:nvSpPr>
         <p:spPr>
           <a:xfrm>
-            <a:off x="731520" y="594360"/>
-            <a:ext cx="8686800" cy="548640"/>
+            <a:off x="731520" y="530352"/>
+            <a:ext cx="8961120" cy="548640"/>
           </a:xfrm>
           <a:prstGeom prst="rect">
             <a:avLst/>
@@ -4854,14 +4806,15 @@
           <a:lstStyle/>
           <a:p>
             <a:pPr>
-              <a:defRPr sz="2200" b="1">
-                <a:solidFill>
-                  <a:srgbClr val="FFFFFF"/>
-                </a:solidFill>
-              </a:defRPr>
-            </a:pPr>
-            <a:r>
-              <a:t>Mathematical Foundation: Galois Field GF(2)</a:t>
+              <a:defRPr sz="2100" b="1">
+                <a:solidFill>
+                  <a:srgbClr val="241E17"/>
+                </a:solidFill>
+                <a:latin typeface="Arial"/>
+              </a:defRPr>
+            </a:pPr>
+            <a:r>
+              <a:t>Operating Principle of CRC: Mathematical Foundations</a:t>
             </a:r>
           </a:p>
         </p:txBody>
@@ -4874,18 +4827,18 @@
         </p:nvSpPr>
         <p:spPr>
           <a:xfrm>
-            <a:off x="10241280" y="411480"/>
-            <a:ext cx="1188720" cy="365760"/>
+            <a:off x="10241280" y="365760"/>
+            <a:ext cx="1188720" cy="347472"/>
           </a:xfrm>
           <a:prstGeom prst="roundRect">
             <a:avLst/>
           </a:prstGeom>
           <a:solidFill>
-            <a:srgbClr val="162032"/>
+            <a:srgbClr val="FFFFFF"/>
           </a:solidFill>
           <a:ln>
             <a:solidFill>
-              <a:srgbClr val="24344D"/>
+              <a:srgbClr val="E2D5C3"/>
             </a:solidFill>
           </a:ln>
         </p:spPr>
@@ -4919,8 +4872,8 @@
         </p:nvSpPr>
         <p:spPr>
           <a:xfrm>
-            <a:off x="10241280" y="411480"/>
-            <a:ext cx="1188720" cy="365760"/>
+            <a:off x="10241280" y="365760"/>
+            <a:ext cx="1188720" cy="347472"/>
           </a:xfrm>
           <a:prstGeom prst="rect">
             <a:avLst/>
@@ -4934,10 +4887,11 @@
           <a:lstStyle/>
           <a:p>
             <a:pPr algn="ctr">
-              <a:defRPr sz="1000" b="1">
-                <a:solidFill>
-                  <a:srgbClr val="94A3B8"/>
-                </a:solidFill>
+              <a:defRPr sz="950" b="1">
+                <a:solidFill>
+                  <a:srgbClr val="6E5D4E"/>
+                </a:solidFill>
+                <a:latin typeface="Arial"/>
               </a:defRPr>
             </a:pPr>
             <a:r>
@@ -4954,18 +4908,18 @@
         </p:nvSpPr>
         <p:spPr>
           <a:xfrm>
-            <a:off x="731520" y="1371600"/>
-            <a:ext cx="3383280" cy="4754880"/>
+            <a:off x="731520" y="1280160"/>
+            <a:ext cx="3474720" cy="5029200"/>
           </a:xfrm>
           <a:prstGeom prst="roundRect">
             <a:avLst/>
           </a:prstGeom>
           <a:solidFill>
-            <a:srgbClr val="162032"/>
+            <a:srgbClr val="FFFFFF"/>
           </a:solidFill>
-          <a:ln w="15240">
+          <a:ln w="13970">
             <a:solidFill>
-              <a:srgbClr val="24344D"/>
+              <a:srgbClr val="E2D5C3"/>
             </a:solidFill>
           </a:ln>
         </p:spPr>
@@ -4999,8 +4953,8 @@
         </p:nvSpPr>
         <p:spPr>
           <a:xfrm>
-            <a:off x="914400" y="1554480"/>
-            <a:ext cx="3017520" cy="4389120"/>
+            <a:off x="877824" y="1408176"/>
+            <a:ext cx="3182112" cy="4773168"/>
           </a:xfrm>
           <a:prstGeom prst="rect">
             <a:avLst/>
@@ -5017,161 +4971,95 @@
               <a:spcAft>
                 <a:spcPts val="200"/>
               </a:spcAft>
-              <a:defRPr sz="900" b="1">
-                <a:solidFill>
-                  <a:srgbClr val="94A3B8"/>
-                </a:solidFill>
-              </a:defRPr>
-            </a:pPr>
-            <a:r>
-              <a:t>FIELD PROPERTIES</a:t>
-            </a:r>
-          </a:p>
-          <a:p>
-            <a:pPr>
-              <a:spcAft>
-                <a:spcPts val="800"/>
-              </a:spcAft>
-              <a:defRPr sz="1500" b="1">
-                <a:solidFill>
-                  <a:srgbClr val="38BDF8"/>
-                </a:solidFill>
-              </a:defRPr>
-            </a:pPr>
-            <a:r>
-              <a:t>Modulo-2 XOR Laws</a:t>
-            </a:r>
-          </a:p>
-          <a:p>
-            <a:pPr>
-              <a:spcAft>
-                <a:spcPts val="400"/>
-              </a:spcAft>
-              <a:defRPr sz="1150">
-                <a:solidFill>
-                  <a:srgbClr val="E2E8F0"/>
-                </a:solidFill>
-              </a:defRPr>
-            </a:pPr>
-            <a:r>
-              <a:t>XOR Addition &amp; Subtraction:</a:t>
-            </a:r>
-          </a:p>
-          <a:p>
-            <a:pPr>
-              <a:spcAft>
-                <a:spcPts val="400"/>
-              </a:spcAft>
-              <a:defRPr sz="1150">
-                <a:solidFill>
-                  <a:srgbClr val="E2E8F0"/>
-                </a:solidFill>
-              </a:defRPr>
-            </a:pPr>
-            <a:r>
-              <a:t>0 ⊕ 0 = 0</a:t>
-            </a:r>
-          </a:p>
-          <a:p>
-            <a:pPr>
-              <a:spcAft>
-                <a:spcPts val="400"/>
-              </a:spcAft>
-              <a:defRPr sz="1150">
-                <a:solidFill>
-                  <a:srgbClr val="E2E8F0"/>
-                </a:solidFill>
-              </a:defRPr>
-            </a:pPr>
-            <a:r>
-              <a:t>0 ⊕ 1 = 1</a:t>
-            </a:r>
-          </a:p>
-          <a:p>
-            <a:pPr>
-              <a:spcAft>
-                <a:spcPts val="400"/>
-              </a:spcAft>
-              <a:defRPr sz="1150">
-                <a:solidFill>
-                  <a:srgbClr val="E2E8F0"/>
-                </a:solidFill>
-              </a:defRPr>
-            </a:pPr>
-            <a:r>
-              <a:t>1 ⊕ 0 = 1</a:t>
-            </a:r>
-          </a:p>
-          <a:p>
-            <a:pPr>
-              <a:spcAft>
-                <a:spcPts val="400"/>
-              </a:spcAft>
-              <a:defRPr sz="1150">
-                <a:solidFill>
-                  <a:srgbClr val="E2E8F0"/>
-                </a:solidFill>
-              </a:defRPr>
-            </a:pPr>
-            <a:r>
-              <a:t>1 ⊕ 1 = 0 (No Carry!)</a:t>
-            </a:r>
-          </a:p>
-          <a:p>
-            <a:pPr>
-              <a:spcAft>
-                <a:spcPts val="400"/>
-              </a:spcAft>
-              <a:defRPr sz="1150">
-                <a:solidFill>
-                  <a:srgbClr val="E2E8F0"/>
-                </a:solidFill>
-              </a:defRPr>
-            </a:pPr>
-          </a:p>
-          <a:p>
-            <a:pPr>
-              <a:spcAft>
-                <a:spcPts val="400"/>
-              </a:spcAft>
-              <a:defRPr sz="1150">
-                <a:solidFill>
-                  <a:srgbClr val="E2E8F0"/>
-                </a:solidFill>
-              </a:defRPr>
-            </a:pPr>
-            <a:r>
-              <a:t>Key Theorem:</a:t>
-            </a:r>
-          </a:p>
-          <a:p>
-            <a:pPr>
-              <a:spcAft>
-                <a:spcPts val="400"/>
-              </a:spcAft>
-              <a:defRPr sz="1150">
-                <a:solidFill>
-                  <a:srgbClr val="E2E8F0"/>
-                </a:solidFill>
-              </a:defRPr>
-            </a:pPr>
-            <a:r>
-              <a:t>A ⊕ B = A - B in GF(2)</a:t>
-            </a:r>
-          </a:p>
-          <a:p>
-            <a:pPr>
-              <a:spcAft>
-                <a:spcPts val="400"/>
-              </a:spcAft>
-              <a:defRPr sz="1150">
-                <a:solidFill>
-                  <a:srgbClr val="E2E8F0"/>
-                </a:solidFill>
-              </a:defRPr>
-            </a:pPr>
-            <a:r>
-              <a:t>All division steps are executed purely as bitwise XOR.</a:t>
+              <a:defRPr sz="850" b="1">
+                <a:solidFill>
+                  <a:srgbClr val="6E5D4E"/>
+                </a:solidFill>
+                <a:latin typeface="Arial"/>
+              </a:defRPr>
+            </a:pPr>
+            <a:r>
+              <a:t>POLYNOMIAL MAPPING</a:t>
+            </a:r>
+          </a:p>
+          <a:p>
+            <a:pPr>
+              <a:spcAft>
+                <a:spcPts val="500"/>
+              </a:spcAft>
+              <a:defRPr sz="1350" b="1">
+                <a:solidFill>
+                  <a:srgbClr val="241E17"/>
+                </a:solidFill>
+                <a:latin typeface="Arial"/>
+              </a:defRPr>
+            </a:pPr>
+            <a:r>
+              <a:t>1. Polynomial Mapping &amp; GF(2)</a:t>
+            </a:r>
+          </a:p>
+          <a:p>
+            <a:pPr>
+              <a:spcAft>
+                <a:spcPts val="300"/>
+              </a:spcAft>
+              <a:defRPr sz="1050">
+                <a:solidFill>
+                  <a:srgbClr val="6E5D4E"/>
+                </a:solidFill>
+                <a:latin typeface="Arial"/>
+              </a:defRPr>
+            </a:pPr>
+            <a:r>
+              <a:t>• Bitstream is treated as polynomial coefficients over Galois Field GF(2).</a:t>
+            </a:r>
+          </a:p>
+          <a:p>
+            <a:pPr>
+              <a:spcAft>
+                <a:spcPts val="300"/>
+              </a:spcAft>
+              <a:defRPr sz="1050">
+                <a:solidFill>
+                  <a:srgbClr val="6E5D4E"/>
+                </a:solidFill>
+                <a:latin typeface="Arial"/>
+              </a:defRPr>
+            </a:pPr>
+            <a:r>
+              <a:t>• Example: 'A' = 01000001₂ -&gt; P(x) = x⁶ + 1.</a:t>
+            </a:r>
+          </a:p>
+          <a:p>
+            <a:pPr>
+              <a:spcAft>
+                <a:spcPts val="300"/>
+              </a:spcAft>
+              <a:defRPr sz="1050">
+                <a:solidFill>
+                  <a:srgbClr val="6E5D4E"/>
+                </a:solidFill>
+                <a:latin typeface="Arial"/>
+              </a:defRPr>
+            </a:pPr>
+            <a:r>
+              <a:t>• Arithmetic Rule: Addition and subtraction are identical to bitwise XOR (⊕).</a:t>
+            </a:r>
+          </a:p>
+          <a:p>
+            <a:pPr>
+              <a:spcAft>
+                <a:spcPts val="300"/>
+              </a:spcAft>
+              <a:defRPr sz="1050">
+                <a:solidFill>
+                  <a:srgbClr val="6E5D4E"/>
+                </a:solidFill>
+                <a:latin typeface="Arial"/>
+              </a:defRPr>
+            </a:pPr>
+            <a:r>
+              <a:t>• Zero Carry/Borrow: Enables line-rate single-cycle hardware execution.</a:t>
             </a:r>
           </a:p>
         </p:txBody>
@@ -5184,18 +5072,18 @@
         </p:nvSpPr>
         <p:spPr>
           <a:xfrm>
-            <a:off x="4389120" y="1371600"/>
-            <a:ext cx="3383280" cy="4754880"/>
+            <a:off x="4343400" y="1280160"/>
+            <a:ext cx="3474720" cy="5029200"/>
           </a:xfrm>
           <a:prstGeom prst="roundRect">
             <a:avLst/>
           </a:prstGeom>
           <a:solidFill>
-            <a:srgbClr val="162032"/>
+            <a:srgbClr val="FFFFFF"/>
           </a:solidFill>
-          <a:ln w="15240">
+          <a:ln w="13970">
             <a:solidFill>
-              <a:srgbClr val="24344D"/>
+              <a:srgbClr val="E2D5C3"/>
             </a:solidFill>
           </a:ln>
         </p:spPr>
@@ -5229,8 +5117,8 @@
         </p:nvSpPr>
         <p:spPr>
           <a:xfrm>
-            <a:off x="4572000" y="1554480"/>
-            <a:ext cx="3017520" cy="4389120"/>
+            <a:off x="4489704" y="1408176"/>
+            <a:ext cx="3182112" cy="4773168"/>
           </a:xfrm>
           <a:prstGeom prst="rect">
             <a:avLst/>
@@ -5247,158 +5135,95 @@
               <a:spcAft>
                 <a:spcPts val="200"/>
               </a:spcAft>
-              <a:defRPr sz="900" b="1">
-                <a:solidFill>
-                  <a:srgbClr val="94A3B8"/>
-                </a:solidFill>
-              </a:defRPr>
-            </a:pPr>
-            <a:r>
-              <a:t>GENERATOR SPECS</a:t>
-            </a:r>
-          </a:p>
-          <a:p>
-            <a:pPr>
-              <a:spcAft>
-                <a:spcPts val="800"/>
-              </a:spcAft>
-              <a:defRPr sz="1500" b="1">
-                <a:solidFill>
-                  <a:srgbClr val="38BDF8"/>
-                </a:solidFill>
-              </a:defRPr>
-            </a:pPr>
-            <a:r>
-              <a:t>33-Bit Divisor G(x)</a:t>
-            </a:r>
-          </a:p>
-          <a:p>
-            <a:pPr>
-              <a:spcAft>
-                <a:spcPts val="400"/>
-              </a:spcAft>
-              <a:defRPr sz="1150">
-                <a:solidFill>
-                  <a:srgbClr val="E2E8F0"/>
-                </a:solidFill>
-              </a:defRPr>
-            </a:pPr>
-            <a:r>
-              <a:t>Degree: k = 32</a:t>
-            </a:r>
-          </a:p>
-          <a:p>
-            <a:pPr>
-              <a:spcAft>
-                <a:spcPts val="400"/>
-              </a:spcAft>
-              <a:defRPr sz="1150">
-                <a:solidFill>
-                  <a:srgbClr val="E2E8F0"/>
-                </a:solidFill>
-              </a:defRPr>
-            </a:pPr>
-            <a:r>
-              <a:t>Coefficients: k + 1 = 33 bits</a:t>
-            </a:r>
-          </a:p>
-          <a:p>
-            <a:pPr>
-              <a:spcAft>
-                <a:spcPts val="400"/>
-              </a:spcAft>
-              <a:defRPr sz="1150">
-                <a:solidFill>
-                  <a:srgbClr val="E2E8F0"/>
-                </a:solidFill>
-              </a:defRPr>
-            </a:pPr>
-            <a:r>
-              <a:t>Boundary Rule: Bits 0 and 32 are strictly '1'.</a:t>
-            </a:r>
-          </a:p>
-          <a:p>
-            <a:pPr>
-              <a:spcAft>
-                <a:spcPts val="400"/>
-              </a:spcAft>
-              <a:defRPr sz="1150">
-                <a:solidFill>
-                  <a:srgbClr val="E2E8F0"/>
-                </a:solidFill>
-              </a:defRPr>
-            </a:pPr>
-          </a:p>
-          <a:p>
-            <a:pPr>
-              <a:spcAft>
-                <a:spcPts val="400"/>
-              </a:spcAft>
-              <a:defRPr sz="1150">
-                <a:solidFill>
-                  <a:srgbClr val="E2E8F0"/>
-                </a:solidFill>
-              </a:defRPr>
-            </a:pPr>
-            <a:r>
-              <a:t>Example Polynomial:</a:t>
-            </a:r>
-          </a:p>
-          <a:p>
-            <a:pPr>
-              <a:spcAft>
-                <a:spcPts val="400"/>
-              </a:spcAft>
-              <a:defRPr sz="1150">
-                <a:solidFill>
-                  <a:srgbClr val="E2E8F0"/>
-                </a:solidFill>
-              </a:defRPr>
-            </a:pPr>
-            <a:r>
-              <a:t>100001010100110001101111101000111</a:t>
-            </a:r>
-          </a:p>
-          <a:p>
-            <a:pPr>
-              <a:spcAft>
-                <a:spcPts val="400"/>
-              </a:spcAft>
-              <a:defRPr sz="1150">
-                <a:solidFill>
-                  <a:srgbClr val="E2E8F0"/>
-                </a:solidFill>
-              </a:defRPr>
-            </a:pPr>
-          </a:p>
-          <a:p>
-            <a:pPr>
-              <a:spcAft>
-                <a:spcPts val="400"/>
-              </a:spcAft>
-              <a:defRPr sz="1150">
-                <a:solidFill>
-                  <a:srgbClr val="E2E8F0"/>
-                </a:solidFill>
-              </a:defRPr>
-            </a:pPr>
-            <a:r>
-              <a:t>Why 33 bits?</a:t>
-            </a:r>
-          </a:p>
-          <a:p>
-            <a:pPr>
-              <a:spcAft>
-                <a:spcPts val="400"/>
-              </a:spcAft>
-              <a:defRPr sz="1150">
-                <a:solidFill>
-                  <a:srgbClr val="E2E8F0"/>
-                </a:solidFill>
-              </a:defRPr>
-            </a:pPr>
-            <a:r>
-              <a:t>Dividing by degree 32 guarantees a remainder of degree &lt;= 31 (exactly 32 bits).</a:t>
+              <a:defRPr sz="850" b="1">
+                <a:solidFill>
+                  <a:srgbClr val="6E5D4E"/>
+                </a:solidFill>
+                <a:latin typeface="Arial"/>
+              </a:defRPr>
+            </a:pPr>
+            <a:r>
+              <a:t>DIVISION MECHANICS</a:t>
+            </a:r>
+          </a:p>
+          <a:p>
+            <a:pPr>
+              <a:spcAft>
+                <a:spcPts val="500"/>
+              </a:spcAft>
+              <a:defRPr sz="1350" b="1">
+                <a:solidFill>
+                  <a:srgbClr val="241E17"/>
+                </a:solidFill>
+                <a:latin typeface="Arial"/>
+              </a:defRPr>
+            </a:pPr>
+            <a:r>
+              <a:t>2. Modulo-2 Division &amp; 32-Zero Padding</a:t>
+            </a:r>
+          </a:p>
+          <a:p>
+            <a:pPr>
+              <a:spcAft>
+                <a:spcPts val="300"/>
+              </a:spcAft>
+              <a:defRPr sz="1050">
+                <a:solidFill>
+                  <a:srgbClr val="6E5D4E"/>
+                </a:solidFill>
+                <a:latin typeface="Arial"/>
+              </a:defRPr>
+            </a:pPr>
+            <a:r>
+              <a:t>• Sender appends 32 zeros to data: M(x) · x³².</a:t>
+            </a:r>
+          </a:p>
+          <a:p>
+            <a:pPr>
+              <a:spcAft>
+                <a:spcPts val="300"/>
+              </a:spcAft>
+              <a:defRPr sz="1050">
+                <a:solidFill>
+                  <a:srgbClr val="6E5D4E"/>
+                </a:solidFill>
+                <a:latin typeface="Arial"/>
+              </a:defRPr>
+            </a:pPr>
+            <a:r>
+              <a:t>• Long division performed with 33-bit Generator G(x).</a:t>
+            </a:r>
+          </a:p>
+          <a:p>
+            <a:pPr>
+              <a:spcAft>
+                <a:spcPts val="300"/>
+              </a:spcAft>
+              <a:defRPr sz="1050">
+                <a:solidFill>
+                  <a:srgbClr val="6E5D4E"/>
+                </a:solidFill>
+                <a:latin typeface="Arial"/>
+              </a:defRPr>
+            </a:pPr>
+            <a:r>
+              <a:t>• If current bit is 1, XOR with divisor; if 0, shift 1 bit right.</a:t>
+            </a:r>
+          </a:p>
+          <a:p>
+            <a:pPr>
+              <a:spcAft>
+                <a:spcPts val="300"/>
+              </a:spcAft>
+              <a:defRPr sz="1050">
+                <a:solidFill>
+                  <a:srgbClr val="6E5D4E"/>
+                </a:solidFill>
+                <a:latin typeface="Arial"/>
+              </a:defRPr>
+            </a:pPr>
+            <a:r>
+              <a:t>• M(x) · x³² = Q(x)·G(x) ⊕ R(x). Remainder R(x) is the 32-bit CRC.</a:t>
             </a:r>
           </a:p>
         </p:txBody>
@@ -5411,18 +5236,18 @@
         </p:nvSpPr>
         <p:spPr>
           <a:xfrm>
-            <a:off x="8046720" y="1371600"/>
-            <a:ext cx="3383280" cy="4754880"/>
+            <a:off x="7955280" y="1280160"/>
+            <a:ext cx="3474720" cy="5029200"/>
           </a:xfrm>
           <a:prstGeom prst="roundRect">
             <a:avLst/>
           </a:prstGeom>
           <a:solidFill>
-            <a:srgbClr val="0A2819"/>
+            <a:srgbClr val="FFFFFF"/>
           </a:solidFill>
-          <a:ln w="15240">
+          <a:ln w="13970">
             <a:solidFill>
-              <a:srgbClr val="166534"/>
+              <a:srgbClr val="E2D5C3"/>
             </a:solidFill>
           </a:ln>
         </p:spPr>
@@ -5456,8 +5281,8 @@
         </p:nvSpPr>
         <p:spPr>
           <a:xfrm>
-            <a:off x="8229600" y="1554480"/>
-            <a:ext cx="3017520" cy="4389120"/>
+            <a:off x="8101584" y="1408176"/>
+            <a:ext cx="3182112" cy="4773168"/>
           </a:xfrm>
           <a:prstGeom prst="rect">
             <a:avLst/>
@@ -5474,173 +5299,95 @@
               <a:spcAft>
                 <a:spcPts val="200"/>
               </a:spcAft>
-              <a:defRPr sz="900" b="1">
-                <a:solidFill>
-                  <a:srgbClr val="94A3B8"/>
-                </a:solidFill>
-              </a:defRPr>
-            </a:pPr>
-            <a:r>
-              <a:t>MATHEMATICAL PROOF</a:t>
-            </a:r>
-          </a:p>
-          <a:p>
-            <a:pPr>
-              <a:spcAft>
-                <a:spcPts val="800"/>
-              </a:spcAft>
-              <a:defRPr sz="1500" b="1">
-                <a:solidFill>
-                  <a:srgbClr val="4ADE80"/>
-                </a:solidFill>
-              </a:defRPr>
-            </a:pPr>
-            <a:r>
-              <a:t>The Zero-Remainder Invariant</a:t>
-            </a:r>
-          </a:p>
-          <a:p>
-            <a:pPr>
-              <a:spcAft>
-                <a:spcPts val="400"/>
-              </a:spcAft>
-              <a:defRPr sz="1150">
-                <a:solidFill>
-                  <a:srgbClr val="E2E8F0"/>
-                </a:solidFill>
-              </a:defRPr>
-            </a:pPr>
-            <a:r>
-              <a:t>Codeword Construction:</a:t>
-            </a:r>
-          </a:p>
-          <a:p>
-            <a:pPr>
-              <a:spcAft>
-                <a:spcPts val="400"/>
-              </a:spcAft>
-              <a:defRPr sz="1150">
-                <a:solidFill>
-                  <a:srgbClr val="E2E8F0"/>
-                </a:solidFill>
-              </a:defRPr>
-            </a:pPr>
-            <a:r>
-              <a:t>T(x) = M(x)·x^32 ⊕ R(x)</a:t>
-            </a:r>
-          </a:p>
-          <a:p>
-            <a:pPr>
-              <a:spcAft>
-                <a:spcPts val="400"/>
-              </a:spcAft>
-              <a:defRPr sz="1150">
-                <a:solidFill>
-                  <a:srgbClr val="E2E8F0"/>
-                </a:solidFill>
-              </a:defRPr>
-            </a:pPr>
-          </a:p>
-          <a:p>
-            <a:pPr>
-              <a:spcAft>
-                <a:spcPts val="400"/>
-              </a:spcAft>
-              <a:defRPr sz="1150">
-                <a:solidFill>
-                  <a:srgbClr val="E2E8F0"/>
-                </a:solidFill>
-              </a:defRPr>
-            </a:pPr>
-            <a:r>
-              <a:t>Algebraic Substitution:</a:t>
-            </a:r>
-          </a:p>
-          <a:p>
-            <a:pPr>
-              <a:spcAft>
-                <a:spcPts val="400"/>
-              </a:spcAft>
-              <a:defRPr sz="1150">
-                <a:solidFill>
-                  <a:srgbClr val="E2E8F0"/>
-                </a:solidFill>
-              </a:defRPr>
-            </a:pPr>
-            <a:r>
-              <a:t>M(x)·x^32 = Q(x)·G(x) ⊕ R(x)</a:t>
-            </a:r>
-          </a:p>
-          <a:p>
-            <a:pPr>
-              <a:spcAft>
-                <a:spcPts val="400"/>
-              </a:spcAft>
-              <a:defRPr sz="1150">
-                <a:solidFill>
-                  <a:srgbClr val="E2E8F0"/>
-                </a:solidFill>
-              </a:defRPr>
-            </a:pPr>
-            <a:r>
-              <a:t>T(x) = Q(x)·G(x) ⊕ R(x) ⊕ R(x)</a:t>
-            </a:r>
-          </a:p>
-          <a:p>
-            <a:pPr>
-              <a:spcAft>
-                <a:spcPts val="400"/>
-              </a:spcAft>
-              <a:defRPr sz="1150">
-                <a:solidFill>
-                  <a:srgbClr val="E2E8F0"/>
-                </a:solidFill>
-              </a:defRPr>
-            </a:pPr>
-            <a:r>
-              <a:t>T(x) = Q(x)·G(x) ⊕ 0</a:t>
-            </a:r>
-          </a:p>
-          <a:p>
-            <a:pPr>
-              <a:spcAft>
-                <a:spcPts val="400"/>
-              </a:spcAft>
-              <a:defRPr sz="1150">
-                <a:solidFill>
-                  <a:srgbClr val="E2E8F0"/>
-                </a:solidFill>
-              </a:defRPr>
-            </a:pPr>
-          </a:p>
-          <a:p>
-            <a:pPr>
-              <a:spcAft>
-                <a:spcPts val="400"/>
-              </a:spcAft>
-              <a:defRPr sz="1150">
-                <a:solidFill>
-                  <a:srgbClr val="E2E8F0"/>
-                </a:solidFill>
-              </a:defRPr>
-            </a:pPr>
-            <a:r>
-              <a:t>Proof:</a:t>
-            </a:r>
-          </a:p>
-          <a:p>
-            <a:pPr>
-              <a:spcAft>
-                <a:spcPts val="400"/>
-              </a:spcAft>
-              <a:defRPr sz="1150">
-                <a:solidFill>
-                  <a:srgbClr val="E2E8F0"/>
-                </a:solidFill>
-              </a:defRPr>
-            </a:pPr>
-            <a:r>
-              <a:t>T(x) mod G(x) ≡ 0 (32 zeros) iff data is 100% unaltered.</a:t>
+              <a:defRPr sz="850" b="1">
+                <a:solidFill>
+                  <a:srgbClr val="6E5D4E"/>
+                </a:solidFill>
+                <a:latin typeface="Arial"/>
+              </a:defRPr>
+            </a:pPr>
+            <a:r>
+              <a:t>SYNDROME INVARIANT</a:t>
+            </a:r>
+          </a:p>
+          <a:p>
+            <a:pPr>
+              <a:spcAft>
+                <a:spcPts val="500"/>
+              </a:spcAft>
+              <a:defRPr sz="1350" b="1">
+                <a:solidFill>
+                  <a:srgbClr val="241E17"/>
+                </a:solidFill>
+                <a:latin typeface="Arial"/>
+              </a:defRPr>
+            </a:pPr>
+            <a:r>
+              <a:t>3. Codeword &amp; Receiver Syndrome Proof</a:t>
+            </a:r>
+          </a:p>
+          <a:p>
+            <a:pPr>
+              <a:spcAft>
+                <a:spcPts val="300"/>
+              </a:spcAft>
+              <a:defRPr sz="1050">
+                <a:solidFill>
+                  <a:srgbClr val="6E5D4E"/>
+                </a:solidFill>
+                <a:latin typeface="Arial"/>
+              </a:defRPr>
+            </a:pPr>
+            <a:r>
+              <a:t>• Codeword Transmitted: T(x) = M(x) · x³² ⊕ R(x).</a:t>
+            </a:r>
+          </a:p>
+          <a:p>
+            <a:pPr>
+              <a:spcAft>
+                <a:spcPts val="300"/>
+              </a:spcAft>
+              <a:defRPr sz="1050">
+                <a:solidFill>
+                  <a:srgbClr val="6E5D4E"/>
+                </a:solidFill>
+                <a:latin typeface="Arial"/>
+              </a:defRPr>
+            </a:pPr>
+            <a:r>
+              <a:t>• Algebraic Invariant: T(x) = Q(x)·G(x) ⊕ R(x) ⊕ R(x) = Q(x)·G(x).</a:t>
+            </a:r>
+          </a:p>
+          <a:p>
+            <a:pPr>
+              <a:spcAft>
+                <a:spcPts val="300"/>
+              </a:spcAft>
+              <a:defRPr sz="1050">
+                <a:solidFill>
+                  <a:srgbClr val="6E5D4E"/>
+                </a:solidFill>
+                <a:latin typeface="Arial"/>
+              </a:defRPr>
+            </a:pPr>
+            <a:r>
+              <a:t>• Receiver Division: T'(x) mod G(x) = R'(x).</a:t>
+            </a:r>
+          </a:p>
+          <a:p>
+            <a:pPr>
+              <a:spcAft>
+                <a:spcPts val="300"/>
+              </a:spcAft>
+              <a:defRPr sz="1050">
+                <a:solidFill>
+                  <a:srgbClr val="6E5D4E"/>
+                </a:solidFill>
+                <a:latin typeface="Arial"/>
+              </a:defRPr>
+            </a:pPr>
+            <a:r>
+              <a:t>• Decision Rule: If R'(x) == 0³² -&gt; ACCEPT (No Error); else REJECT.</a:t>
             </a:r>
           </a:p>
         </p:txBody>
@@ -5678,7 +5425,7 @@
             <a:avLst/>
           </a:prstGeom>
           <a:solidFill>
-            <a:srgbClr val="0B0F19"/>
+            <a:srgbClr val="FFF8E7"/>
           </a:solidFill>
           <a:ln>
             <a:noFill/>
@@ -5714,7 +5461,7 @@
         </p:nvSpPr>
         <p:spPr>
           <a:xfrm>
-            <a:off x="731520" y="365760"/>
+            <a:off x="731520" y="320040"/>
             <a:ext cx="8229600" cy="228600"/>
           </a:xfrm>
           <a:prstGeom prst="rect">
@@ -5729,14 +5476,15 @@
           <a:lstStyle/>
           <a:p>
             <a:pPr>
-              <a:defRPr sz="1000" b="1">
-                <a:solidFill>
-                  <a:srgbClr val="38BDF8"/>
-                </a:solidFill>
-              </a:defRPr>
-            </a:pPr>
-            <a:r>
-              <a:t>SYSTEM ARCHITECTURE</a:t>
+              <a:defRPr sz="950" b="1">
+                <a:solidFill>
+                  <a:srgbClr val="6E5D4E"/>
+                </a:solidFill>
+                <a:latin typeface="Arial"/>
+              </a:defRPr>
+            </a:pPr>
+            <a:r>
+              <a:t>SLIDE 4 • PYTHON IMPLEMENTATION</a:t>
             </a:r>
           </a:p>
         </p:txBody>
@@ -5749,8 +5497,8 @@
         </p:nvSpPr>
         <p:spPr>
           <a:xfrm>
-            <a:off x="731520" y="594360"/>
-            <a:ext cx="8686800" cy="548640"/>
+            <a:off x="731520" y="530352"/>
+            <a:ext cx="8961120" cy="548640"/>
           </a:xfrm>
           <a:prstGeom prst="rect">
             <a:avLst/>
@@ -5764,14 +5512,15 @@
           <a:lstStyle/>
           <a:p>
             <a:pPr>
-              <a:defRPr sz="2200" b="1">
-                <a:solidFill>
-                  <a:srgbClr val="FFFFFF"/>
-                </a:solidFill>
-              </a:defRPr>
-            </a:pPr>
-            <a:r>
-              <a:t>End-to-End Telemetry Codeword Pipeline</a:t>
+              <a:defRPr sz="2100" b="1">
+                <a:solidFill>
+                  <a:srgbClr val="241E17"/>
+                </a:solidFill>
+                <a:latin typeface="Arial"/>
+              </a:defRPr>
+            </a:pPr>
+            <a:r>
+              <a:t>Python Implementation of CRC (crc_checker.py)</a:t>
             </a:r>
           </a:p>
         </p:txBody>
@@ -5784,18 +5533,18 @@
         </p:nvSpPr>
         <p:spPr>
           <a:xfrm>
-            <a:off x="10241280" y="411480"/>
-            <a:ext cx="1188720" cy="365760"/>
+            <a:off x="10241280" y="365760"/>
+            <a:ext cx="1188720" cy="347472"/>
           </a:xfrm>
           <a:prstGeom prst="roundRect">
             <a:avLst/>
           </a:prstGeom>
           <a:solidFill>
-            <a:srgbClr val="162032"/>
+            <a:srgbClr val="FFFFFF"/>
           </a:solidFill>
           <a:ln>
             <a:solidFill>
-              <a:srgbClr val="24344D"/>
+              <a:srgbClr val="E2D5C3"/>
             </a:solidFill>
           </a:ln>
         </p:spPr>
@@ -5829,8 +5578,8 @@
         </p:nvSpPr>
         <p:spPr>
           <a:xfrm>
-            <a:off x="10241280" y="411480"/>
-            <a:ext cx="1188720" cy="365760"/>
+            <a:off x="10241280" y="365760"/>
+            <a:ext cx="1188720" cy="347472"/>
           </a:xfrm>
           <a:prstGeom prst="rect">
             <a:avLst/>
@@ -5844,10 +5593,11 @@
           <a:lstStyle/>
           <a:p>
             <a:pPr algn="ctr">
-              <a:defRPr sz="1000" b="1">
-                <a:solidFill>
-                  <a:srgbClr val="94A3B8"/>
-                </a:solidFill>
+              <a:defRPr sz="950" b="1">
+                <a:solidFill>
+                  <a:srgbClr val="6E5D4E"/>
+                </a:solidFill>
+                <a:latin typeface="Arial"/>
               </a:defRPr>
             </a:pPr>
             <a:r>
@@ -5864,18 +5614,18 @@
         </p:nvSpPr>
         <p:spPr>
           <a:xfrm>
-            <a:off x="731520" y="1371600"/>
-            <a:ext cx="5120640" cy="4754880"/>
+            <a:off x="731520" y="1280160"/>
+            <a:ext cx="5669280" cy="5029200"/>
           </a:xfrm>
           <a:prstGeom prst="roundRect">
             <a:avLst/>
           </a:prstGeom>
           <a:solidFill>
-            <a:srgbClr val="162032"/>
+            <a:srgbClr val="F5ECE0"/>
           </a:solidFill>
-          <a:ln w="15240">
+          <a:ln w="13970">
             <a:solidFill>
-              <a:srgbClr val="24344D"/>
+              <a:srgbClr val="E6D8C4"/>
             </a:solidFill>
           </a:ln>
         </p:spPr>
@@ -5909,8 +5659,8 @@
         </p:nvSpPr>
         <p:spPr>
           <a:xfrm>
-            <a:off x="914400" y="1554480"/>
-            <a:ext cx="4754880" cy="4389120"/>
+            <a:off x="877824" y="1408176"/>
+            <a:ext cx="5376672" cy="4773168"/>
           </a:xfrm>
           <a:prstGeom prst="rect">
             <a:avLst/>
@@ -5927,128 +5677,528 @@
               <a:spcAft>
                 <a:spcPts val="200"/>
               </a:spcAft>
-              <a:defRPr sz="900" b="1">
-                <a:solidFill>
-                  <a:srgbClr val="94A3B8"/>
-                </a:solidFill>
-              </a:defRPr>
-            </a:pPr>
-            <a:r>
-              <a:t>SENDER PIPELINE</a:t>
-            </a:r>
-          </a:p>
-          <a:p>
-            <a:pPr>
-              <a:spcAft>
-                <a:spcPts val="800"/>
-              </a:spcAft>
-              <a:defRPr sz="1500" b="1">
-                <a:solidFill>
-                  <a:srgbClr val="38BDF8"/>
-                </a:solidFill>
-              </a:defRPr>
-            </a:pPr>
-            <a:r>
-              <a:t>Transmitter Stage (Compute CRC)</a:t>
-            </a:r>
-          </a:p>
-          <a:p>
-            <a:pPr>
-              <a:spcAft>
-                <a:spcPts val="400"/>
-              </a:spcAft>
-              <a:defRPr sz="1150">
-                <a:solidFill>
-                  <a:srgbClr val="E2E8F0"/>
-                </a:solidFill>
-              </a:defRPr>
-            </a:pPr>
-            <a:r>
-              <a:t>1. Raw ASCII Telemetry: Machine controller emits log string.</a:t>
-            </a:r>
-          </a:p>
-          <a:p>
-            <a:pPr>
-              <a:spcAft>
-                <a:spcPts val="400"/>
-              </a:spcAft>
-              <a:defRPr sz="1150">
-                <a:solidFill>
-                  <a:srgbClr val="E2E8F0"/>
-                </a:solidFill>
-              </a:defRPr>
-            </a:pPr>
-            <a:r>
-              <a:t>2. Binary Serialization: Maps each character to 8-bit ASCII bitstream (ord(c) -&gt; 08b).</a:t>
-            </a:r>
-          </a:p>
-          <a:p>
-            <a:pPr>
-              <a:spcAft>
-                <a:spcPts val="400"/>
-              </a:spcAft>
-              <a:defRPr sz="1150">
-                <a:solidFill>
-                  <a:srgbClr val="E2E8F0"/>
-                </a:solidFill>
-              </a:defRPr>
-            </a:pPr>
-            <a:r>
-              <a:t>3. 32-Bit Zero Augmentation: Appends 32 zeros: Padded = M·2^32.</a:t>
-            </a:r>
-          </a:p>
-          <a:p>
-            <a:pPr>
-              <a:spcAft>
-                <a:spcPts val="400"/>
-              </a:spcAft>
-              <a:defRPr sz="1150">
-                <a:solidFill>
-                  <a:srgbClr val="E2E8F0"/>
-                </a:solidFill>
-              </a:defRPr>
-            </a:pPr>
-            <a:r>
-              <a:t>4. Polynomial XOR Division: Divides Padded by 33-bit G(x) via xordiv().</a:t>
-            </a:r>
-          </a:p>
-          <a:p>
-            <a:pPr>
-              <a:spcAft>
-                <a:spcPts val="400"/>
-              </a:spcAft>
-              <a:defRPr sz="1150">
-                <a:solidFill>
-                  <a:srgbClr val="E2E8F0"/>
-                </a:solidFill>
-              </a:defRPr>
-            </a:pPr>
-            <a:r>
-              <a:t>5. Checksum Extraction: The 32-bit remainder R is the CRC checksum.</a:t>
-            </a:r>
-          </a:p>
-        </p:txBody>
-      </p:sp>
-      <p:sp>
-        <p:nvSpPr>
-          <p:cNvPr id="9" name="Rounded Rectangle 8"/>
+              <a:defRPr sz="850" b="1">
+                <a:solidFill>
+                  <a:srgbClr val="6E5D4E"/>
+                </a:solidFill>
+                <a:latin typeface="Arial"/>
+              </a:defRPr>
+            </a:pPr>
+            <a:r>
+              <a:t>HANDWRITTEN PYTHON LOGIC</a:t>
+            </a:r>
+          </a:p>
+          <a:p>
+            <a:pPr>
+              <a:spcAft>
+                <a:spcPts val="500"/>
+              </a:spcAft>
+              <a:defRPr sz="1350" b="1">
+                <a:solidFill>
+                  <a:srgbClr val="241E17"/>
+                </a:solidFill>
+                <a:latin typeface="Arial"/>
+              </a:defRPr>
+            </a:pPr>
+            <a:r>
+              <a:t>Core Algorithmic Functions (No Black-Box / No zlib)</a:t>
+            </a:r>
+          </a:p>
+          <a:p>
+            <a:pPr>
+              <a:spcAft>
+                <a:spcPts val="300"/>
+              </a:spcAft>
+              <a:defRPr sz="1050">
+                <a:solidFill>
+                  <a:srgbClr val="6E5D4E"/>
+                </a:solidFill>
+                <a:latin typeface="Arial"/>
+              </a:defRPr>
+            </a:pPr>
+            <a:r>
+              <a:t>def ascii2binary(text):</a:t>
+            </a:r>
+          </a:p>
+          <a:p>
+            <a:pPr>
+              <a:spcAft>
+                <a:spcPts val="300"/>
+              </a:spcAft>
+              <a:defRPr sz="1050">
+                <a:solidFill>
+                  <a:srgbClr val="6E5D4E"/>
+                </a:solidFill>
+                <a:latin typeface="Arial"/>
+              </a:defRPr>
+            </a:pPr>
+            <a:r>
+              <a:t>    return ''.join(f'{ord(c):08b}' for c in text)</a:t>
+            </a:r>
+          </a:p>
+          <a:p>
+            <a:pPr>
+              <a:spcAft>
+                <a:spcPts val="300"/>
+              </a:spcAft>
+              <a:defRPr sz="1050">
+                <a:solidFill>
+                  <a:srgbClr val="6E5D4E"/>
+                </a:solidFill>
+                <a:latin typeface="Arial"/>
+              </a:defRPr>
+            </a:pPr>
+          </a:p>
+          <a:p>
+            <a:pPr>
+              <a:spcAft>
+                <a:spcPts val="300"/>
+              </a:spcAft>
+              <a:defRPr sz="1050">
+                <a:solidFill>
+                  <a:srgbClr val="6E5D4E"/>
+                </a:solidFill>
+                <a:latin typeface="Arial"/>
+              </a:defRPr>
+            </a:pPr>
+            <a:r>
+              <a:t>def xordiv(dividend, divisor):</a:t>
+            </a:r>
+          </a:p>
+          <a:p>
+            <a:pPr>
+              <a:spcAft>
+                <a:spcPts val="300"/>
+              </a:spcAft>
+              <a:defRPr sz="1050">
+                <a:solidFill>
+                  <a:srgbClr val="6E5D4E"/>
+                </a:solidFill>
+                <a:latin typeface="Arial"/>
+              </a:defRPr>
+            </a:pPr>
+            <a:r>
+              <a:t>    d, m = list(dividend), len(divisor)  # 33 bits</a:t>
+            </a:r>
+          </a:p>
+          <a:p>
+            <a:pPr>
+              <a:spcAft>
+                <a:spcPts val="300"/>
+              </a:spcAft>
+              <a:defRPr sz="1050">
+                <a:solidFill>
+                  <a:srgbClr val="6E5D4E"/>
+                </a:solidFill>
+                <a:latin typeface="Arial"/>
+              </a:defRPr>
+            </a:pPr>
+            <a:r>
+              <a:t>    for i in range(len(d) - m + 1):</a:t>
+            </a:r>
+          </a:p>
+          <a:p>
+            <a:pPr>
+              <a:spcAft>
+                <a:spcPts val="300"/>
+              </a:spcAft>
+              <a:defRPr sz="1050">
+                <a:solidFill>
+                  <a:srgbClr val="6E5D4E"/>
+                </a:solidFill>
+                <a:latin typeface="Arial"/>
+              </a:defRPr>
+            </a:pPr>
+            <a:r>
+              <a:t>        if d[i] == '1':</a:t>
+            </a:r>
+          </a:p>
+          <a:p>
+            <a:pPr>
+              <a:spcAft>
+                <a:spcPts val="300"/>
+              </a:spcAft>
+              <a:defRPr sz="1050">
+                <a:solidFill>
+                  <a:srgbClr val="6E5D4E"/>
+                </a:solidFill>
+                <a:latin typeface="Arial"/>
+              </a:defRPr>
+            </a:pPr>
+            <a:r>
+              <a:t>            for j in range(m):</a:t>
+            </a:r>
+          </a:p>
+          <a:p>
+            <a:pPr>
+              <a:spcAft>
+                <a:spcPts val="300"/>
+              </a:spcAft>
+              <a:defRPr sz="1050">
+                <a:solidFill>
+                  <a:srgbClr val="6E5D4E"/>
+                </a:solidFill>
+                <a:latin typeface="Arial"/>
+              </a:defRPr>
+            </a:pPr>
+            <a:r>
+              <a:t>                d[i+j] = '1' if d[i+j] != divisor[j] else '0'</a:t>
+            </a:r>
+          </a:p>
+          <a:p>
+            <a:pPr>
+              <a:spcAft>
+                <a:spcPts val="300"/>
+              </a:spcAft>
+              <a:defRPr sz="1050">
+                <a:solidFill>
+                  <a:srgbClr val="6E5D4E"/>
+                </a:solidFill>
+                <a:latin typeface="Arial"/>
+              </a:defRPr>
+            </a:pPr>
+            <a:r>
+              <a:t>    return ''.join(d[-(m-1):])  # Returns last 32 bits</a:t>
+            </a:r>
+          </a:p>
+          <a:p>
+            <a:pPr>
+              <a:spcAft>
+                <a:spcPts val="300"/>
+              </a:spcAft>
+              <a:defRPr sz="1050">
+                <a:solidFill>
+                  <a:srgbClr val="6E5D4E"/>
+                </a:solidFill>
+                <a:latin typeface="Arial"/>
+              </a:defRPr>
+            </a:pPr>
+          </a:p>
+          <a:p>
+            <a:pPr>
+              <a:spcAft>
+                <a:spcPts val="300"/>
+              </a:spcAft>
+              <a:defRPr sz="1050">
+                <a:solidFill>
+                  <a:srgbClr val="6E5D4E"/>
+                </a:solidFill>
+                <a:latin typeface="Arial"/>
+              </a:defRPr>
+            </a:pPr>
+            <a:r>
+              <a:t>def compute_crc(text):</a:t>
+            </a:r>
+          </a:p>
+          <a:p>
+            <a:pPr>
+              <a:spcAft>
+                <a:spcPts val="300"/>
+              </a:spcAft>
+              <a:defRPr sz="1050">
+                <a:solidFill>
+                  <a:srgbClr val="6E5D4E"/>
+                </a:solidFill>
+                <a:latin typeface="Arial"/>
+              </a:defRPr>
+            </a:pPr>
+            <a:r>
+              <a:t>    return xordiv(ascii2binary(text) + '0'*32, get_divisor())</a:t>
+            </a:r>
+          </a:p>
+          <a:p>
+            <a:pPr>
+              <a:spcAft>
+                <a:spcPts val="300"/>
+              </a:spcAft>
+              <a:defRPr sz="1050">
+                <a:solidFill>
+                  <a:srgbClr val="6E5D4E"/>
+                </a:solidFill>
+                <a:latin typeface="Arial"/>
+              </a:defRPr>
+            </a:pPr>
+          </a:p>
+          <a:p>
+            <a:pPr>
+              <a:spcAft>
+                <a:spcPts val="300"/>
+              </a:spcAft>
+              <a:defRPr sz="1050">
+                <a:solidFill>
+                  <a:srgbClr val="6E5D4E"/>
+                </a:solidFill>
+                <a:latin typeface="Arial"/>
+              </a:defRPr>
+            </a:pPr>
+            <a:r>
+              <a:t>def verify(text, received_crc):</a:t>
+            </a:r>
+          </a:p>
+          <a:p>
+            <a:pPr>
+              <a:spcAft>
+                <a:spcPts val="300"/>
+              </a:spcAft>
+              <a:defRPr sz="1050">
+                <a:solidFill>
+                  <a:srgbClr val="6E5D4E"/>
+                </a:solidFill>
+                <a:latin typeface="Arial"/>
+              </a:defRPr>
+            </a:pPr>
+            <a:r>
+              <a:t>    return xordiv(ascii2binary(text) + received_crc, get_divisor()) == '0'*32</a:t>
+            </a:r>
+          </a:p>
+        </p:txBody>
+      </p:sp>
+      <p:graphicFrame>
+        <p:nvGraphicFramePr>
+          <p:cNvPr id="9" name="Table 8"/>
+          <p:cNvGraphicFramePr>
+            <a:graphicFrameLocks noGrp="1"/>
+          </p:cNvGraphicFramePr>
+          <p:nvPr/>
+        </p:nvGraphicFramePr>
+        <p:xfrm>
+          <a:off x="6583680" y="1280160"/>
+          <a:ext cx="4846320" cy="2286000"/>
+        </p:xfrm>
+        <a:graphic>
+          <a:graphicData uri="http://schemas.openxmlformats.org/drawingml/2006/table">
+            <a:tbl>
+              <a:tblPr firstRow="1" bandRow="1">
+                <a:tableStyleId>{5C22544A-7EE6-4342-B048-85BDC9FD1C3A}</a:tableStyleId>
+              </a:tblPr>
+              <a:tblGrid>
+                <a:gridCol w="1371600"/>
+                <a:gridCol w="3474720"/>
+              </a:tblGrid>
+              <a:tr h="571500">
+                <a:tc>
+                  <a:txBody>
+                    <a:bodyPr/>
+                    <a:lstStyle/>
+                    <a:p>
+                      <a:pPr algn="l">
+                        <a:defRPr sz="1000" b="1">
+                          <a:solidFill>
+                            <a:srgbClr val="241E17"/>
+                          </a:solidFill>
+                          <a:latin typeface="Arial"/>
+                        </a:defRPr>
+                      </a:pPr>
+                      <a:r>
+                        <a:t>Input Type</a:t>
+                      </a:r>
+                    </a:p>
+                  </a:txBody>
+                  <a:tcPr>
+                    <a:solidFill>
+                      <a:srgbClr val="F6E3C8"/>
+                    </a:solidFill>
+                  </a:tcPr>
+                </a:tc>
+                <a:tc>
+                  <a:txBody>
+                    <a:bodyPr/>
+                    <a:lstStyle/>
+                    <a:p>
+                      <a:pPr algn="l">
+                        <a:defRPr sz="1000" b="1">
+                          <a:solidFill>
+                            <a:srgbClr val="241E17"/>
+                          </a:solidFill>
+                          <a:latin typeface="Arial"/>
+                        </a:defRPr>
+                      </a:pPr>
+                      <a:r>
+                        <a:t>Processing Flow in Code</a:t>
+                      </a:r>
+                    </a:p>
+                  </a:txBody>
+                  <a:tcPr>
+                    <a:solidFill>
+                      <a:srgbClr val="F6E3C8"/>
+                    </a:solidFill>
+                  </a:tcPr>
+                </a:tc>
+              </a:tr>
+              <a:tr h="571500">
+                <a:tc>
+                  <a:txBody>
+                    <a:bodyPr/>
+                    <a:lstStyle/>
+                    <a:p>
+                      <a:pPr algn="l">
+                        <a:defRPr sz="950">
+                          <a:solidFill>
+                            <a:srgbClr val="6E5D4E"/>
+                          </a:solidFill>
+                          <a:latin typeface="Arial"/>
+                        </a:defRPr>
+                      </a:pPr>
+                      <a:r>
+                        <a:t>Binary Input</a:t>
+                      </a:r>
+                    </a:p>
+                  </a:txBody>
+                  <a:tcPr>
+                    <a:solidFill>
+                      <a:srgbClr val="FFFFFF"/>
+                    </a:solidFill>
+                  </a:tcPr>
+                </a:tc>
+                <a:tc>
+                  <a:txBody>
+                    <a:bodyPr/>
+                    <a:lstStyle/>
+                    <a:p>
+                      <a:pPr algn="l">
+                        <a:defRPr sz="950">
+                          <a:solidFill>
+                            <a:srgbClr val="6E5D4E"/>
+                          </a:solidFill>
+                          <a:latin typeface="Arial"/>
+                        </a:defRPr>
+                      </a:pPr>
+                      <a:r>
+                        <a:t>Binary String -&gt; Direct Length Validation -&gt; xordiv() -&gt; 32-bit CRC</a:t>
+                      </a:r>
+                    </a:p>
+                  </a:txBody>
+                  <a:tcPr>
+                    <a:solidFill>
+                      <a:srgbClr val="FFFFFF"/>
+                    </a:solidFill>
+                  </a:tcPr>
+                </a:tc>
+              </a:tr>
+              <a:tr h="571500">
+                <a:tc>
+                  <a:txBody>
+                    <a:bodyPr/>
+                    <a:lstStyle/>
+                    <a:p>
+                      <a:pPr algn="l">
+                        <a:defRPr sz="950">
+                          <a:solidFill>
+                            <a:srgbClr val="6E5D4E"/>
+                          </a:solidFill>
+                          <a:latin typeface="Arial"/>
+                        </a:defRPr>
+                      </a:pPr>
+                      <a:r>
+                        <a:t>Text Input</a:t>
+                      </a:r>
+                    </a:p>
+                  </a:txBody>
+                  <a:tcPr>
+                    <a:solidFill>
+                      <a:srgbClr val="F3E6D6"/>
+                    </a:solidFill>
+                  </a:tcPr>
+                </a:tc>
+                <a:tc>
+                  <a:txBody>
+                    <a:bodyPr/>
+                    <a:lstStyle/>
+                    <a:p>
+                      <a:pPr algn="l">
+                        <a:defRPr sz="950">
+                          <a:solidFill>
+                            <a:srgbClr val="6E5D4E"/>
+                          </a:solidFill>
+                          <a:latin typeface="Arial"/>
+                        </a:defRPr>
+                      </a:pPr>
+                      <a:r>
+                        <a:t>Text String -&gt; ascii2binary() (8-bit ASCII) -&gt; Append 32 Zeros -&gt; xordiv() -&gt; CRC</a:t>
+                      </a:r>
+                    </a:p>
+                  </a:txBody>
+                  <a:tcPr>
+                    <a:solidFill>
+                      <a:srgbClr val="F3E6D6"/>
+                    </a:solidFill>
+                  </a:tcPr>
+                </a:tc>
+              </a:tr>
+              <a:tr h="571500">
+                <a:tc>
+                  <a:txBody>
+                    <a:bodyPr/>
+                    <a:lstStyle/>
+                    <a:p>
+                      <a:pPr algn="l">
+                        <a:defRPr sz="950">
+                          <a:solidFill>
+                            <a:srgbClr val="6E5D4E"/>
+                          </a:solidFill>
+                          <a:latin typeface="Arial"/>
+                        </a:defRPr>
+                      </a:pPr>
+                      <a:r>
+                        <a:t>File Input</a:t>
+                      </a:r>
+                    </a:p>
+                  </a:txBody>
+                  <a:tcPr>
+                    <a:solidFill>
+                      <a:srgbClr val="FFFFFF"/>
+                    </a:solidFill>
+                  </a:tcPr>
+                </a:tc>
+                <a:tc>
+                  <a:txBody>
+                    <a:bodyPr/>
+                    <a:lstStyle/>
+                    <a:p>
+                      <a:pPr algn="l">
+                        <a:defRPr sz="950">
+                          <a:solidFill>
+                            <a:srgbClr val="6E5D4E"/>
+                          </a:solidFill>
+                          <a:latin typeface="Arial"/>
+                        </a:defRPr>
+                      </a:pPr>
+                      <a:r>
+                        <a:t>File Upload -&gt; FileReader (JS) -&gt; utf-8 text -&gt; ascii2binary() -&gt; xordiv() -&gt; CRC</a:t>
+                      </a:r>
+                    </a:p>
+                  </a:txBody>
+                  <a:tcPr>
+                    <a:solidFill>
+                      <a:srgbClr val="FFFFFF"/>
+                    </a:solidFill>
+                  </a:tcPr>
+                </a:tc>
+              </a:tr>
+            </a:tbl>
+          </a:graphicData>
+        </a:graphic>
+      </p:graphicFrame>
+      <p:sp>
+        <p:nvSpPr>
+          <p:cNvPr id="10" name="Rounded Rectangle 9"/>
           <p:cNvSpPr/>
           <p:nvPr/>
         </p:nvSpPr>
         <p:spPr>
           <a:xfrm>
-            <a:off x="6217920" y="1371600"/>
-            <a:ext cx="5212080" cy="4754880"/>
+            <a:off x="6583680" y="3749039"/>
+            <a:ext cx="4846320" cy="2560320"/>
           </a:xfrm>
           <a:prstGeom prst="roundRect">
             <a:avLst/>
           </a:prstGeom>
           <a:solidFill>
-            <a:srgbClr val="162032"/>
+            <a:srgbClr val="EFE5D5"/>
           </a:solidFill>
-          <a:ln w="15240">
+          <a:ln w="13970">
             <a:solidFill>
-              <a:srgbClr val="38BDF8"/>
+              <a:srgbClr val="E3C08F"/>
             </a:solidFill>
           </a:ln>
         </p:spPr>
@@ -6076,14 +6226,14 @@
       </p:sp>
       <p:sp>
         <p:nvSpPr>
-          <p:cNvPr id="10" name="TextBox 9"/>
+          <p:cNvPr id="11" name="TextBox 10"/>
           <p:cNvSpPr txBox="1"/>
           <p:nvPr/>
         </p:nvSpPr>
         <p:spPr>
           <a:xfrm>
-            <a:off x="6400800" y="1554480"/>
-            <a:ext cx="4846320" cy="4389120"/>
+            <a:off x="6729984" y="3877055"/>
+            <a:ext cx="4553712" cy="2304288"/>
           </a:xfrm>
           <a:prstGeom prst="rect">
             <a:avLst/>
@@ -6100,119 +6250,95 @@
               <a:spcAft>
                 <a:spcPts val="200"/>
               </a:spcAft>
-              <a:defRPr sz="900" b="1">
-                <a:solidFill>
-                  <a:srgbClr val="94A3B8"/>
-                </a:solidFill>
-              </a:defRPr>
-            </a:pPr>
-            <a:r>
-              <a:t>RECEIVER PIPELINE</a:t>
-            </a:r>
-          </a:p>
-          <a:p>
-            <a:pPr>
-              <a:spcAft>
-                <a:spcPts val="800"/>
-              </a:spcAft>
-              <a:defRPr sz="1500" b="1">
-                <a:solidFill>
-                  <a:srgbClr val="38BDF8"/>
-                </a:solidFill>
-              </a:defRPr>
-            </a:pPr>
-            <a:r>
-              <a:t>Gateway Stage (Verify Integrity)</a:t>
-            </a:r>
-          </a:p>
-          <a:p>
-            <a:pPr>
-              <a:spcAft>
-                <a:spcPts val="400"/>
-              </a:spcAft>
-              <a:defRPr sz="1150">
-                <a:solidFill>
-                  <a:srgbClr val="E2E8F0"/>
-                </a:solidFill>
-              </a:defRPr>
-            </a:pPr>
-            <a:r>
-              <a:t>1. Codeword Assembly: Codeword T' = Received Bits + Received CRC.</a:t>
-            </a:r>
-          </a:p>
-          <a:p>
-            <a:pPr>
-              <a:spcAft>
-                <a:spcPts val="400"/>
-              </a:spcAft>
-              <a:defRPr sz="1150">
-                <a:solidFill>
-                  <a:srgbClr val="E2E8F0"/>
-                </a:solidFill>
-              </a:defRPr>
-            </a:pPr>
-            <a:r>
-              <a:t>2. Modulo-2 Division: Divides T' by the IDENTICAL 33-bit G(x).</a:t>
-            </a:r>
-          </a:p>
-          <a:p>
-            <a:pPr>
-              <a:spcAft>
-                <a:spcPts val="400"/>
-              </a:spcAft>
-              <a:defRPr sz="1150">
-                <a:solidFill>
-                  <a:srgbClr val="E2E8F0"/>
-                </a:solidFill>
-              </a:defRPr>
-            </a:pPr>
-            <a:r>
-              <a:t>3. Remainder Evaluation:</a:t>
-            </a:r>
-          </a:p>
-          <a:p>
-            <a:pPr>
-              <a:spcAft>
-                <a:spcPts val="400"/>
-              </a:spcAft>
-              <a:defRPr sz="1150">
-                <a:solidFill>
-                  <a:srgbClr val="E2E8F0"/>
-                </a:solidFill>
-              </a:defRPr>
-            </a:pPr>
-            <a:r>
-              <a:t>   • Remainder == '0'*32 -&gt; ACCEPT ✓ (Zero bit errors)</a:t>
-            </a:r>
-          </a:p>
-          <a:p>
-            <a:pPr>
-              <a:spcAft>
-                <a:spcPts val="400"/>
-              </a:spcAft>
-              <a:defRPr sz="1150">
-                <a:solidFill>
-                  <a:srgbClr val="E2E8F0"/>
-                </a:solidFill>
-              </a:defRPr>
-            </a:pPr>
-            <a:r>
-              <a:t>   • Remainder != '0'*32 -&gt; REJECT ✗ (Corruption detected)</a:t>
-            </a:r>
-          </a:p>
-          <a:p>
-            <a:pPr>
-              <a:spcAft>
-                <a:spcPts val="400"/>
-              </a:spcAft>
-              <a:defRPr sz="1150">
-                <a:solidFill>
-                  <a:srgbClr val="E2E8F0"/>
-                </a:solidFill>
-              </a:defRPr>
-            </a:pPr>
-            <a:r>
-              <a:t>4. Live Telemetry Update: Injects real-time step analysis to UI.</a:t>
+              <a:defRPr sz="850" b="1">
+                <a:solidFill>
+                  <a:srgbClr val="6E5D4E"/>
+                </a:solidFill>
+                <a:latin typeface="Arial"/>
+              </a:defRPr>
+            </a:pPr>
+            <a:r>
+              <a:t>FUNCTION SPECIFICATION</a:t>
+            </a:r>
+          </a:p>
+          <a:p>
+            <a:pPr>
+              <a:spcAft>
+                <a:spcPts val="500"/>
+              </a:spcAft>
+              <a:defRPr sz="1350" b="1">
+                <a:solidFill>
+                  <a:srgbClr val="241E17"/>
+                </a:solidFill>
+                <a:latin typeface="Arial"/>
+              </a:defRPr>
+            </a:pPr>
+            <a:r>
+              <a:t>Function Interface &amp; Data Flow</a:t>
+            </a:r>
+          </a:p>
+          <a:p>
+            <a:pPr>
+              <a:spcAft>
+                <a:spcPts val="300"/>
+              </a:spcAft>
+              <a:defRPr sz="1050">
+                <a:solidFill>
+                  <a:srgbClr val="6E5D4E"/>
+                </a:solidFill>
+                <a:latin typeface="Arial"/>
+              </a:defRPr>
+            </a:pPr>
+            <a:r>
+              <a:t>• Input Passed: UTF-8 log message string or file buffer.</a:t>
+            </a:r>
+          </a:p>
+          <a:p>
+            <a:pPr>
+              <a:spcAft>
+                <a:spcPts val="300"/>
+              </a:spcAft>
+              <a:defRPr sz="1050">
+                <a:solidFill>
+                  <a:srgbClr val="6E5D4E"/>
+                </a:solidFill>
+                <a:latin typeface="Arial"/>
+              </a:defRPr>
+            </a:pPr>
+            <a:r>
+              <a:t>• Processing: Bit-by-bit Modulo-2 long division against session divisor.</a:t>
+            </a:r>
+          </a:p>
+          <a:p>
+            <a:pPr>
+              <a:spcAft>
+                <a:spcPts val="300"/>
+              </a:spcAft>
+              <a:defRPr sz="1050">
+                <a:solidFill>
+                  <a:srgbClr val="6E5D4E"/>
+                </a:solidFill>
+                <a:latin typeface="Arial"/>
+              </a:defRPr>
+            </a:pPr>
+            <a:r>
+              <a:t>• Output Returned: 32-bit CRC string, Hex checksum, intermediate steps.</a:t>
+            </a:r>
+          </a:p>
+          <a:p>
+            <a:pPr>
+              <a:spcAft>
+                <a:spcPts val="300"/>
+              </a:spcAft>
+              <a:defRPr sz="1050">
+                <a:solidFill>
+                  <a:srgbClr val="6E5D4E"/>
+                </a:solidFill>
+                <a:latin typeface="Arial"/>
+              </a:defRPr>
+            </a:pPr>
+            <a:r>
+              <a:t>• Invariant: Both compute_crc() and verify() call the identical get_divisor().</a:t>
             </a:r>
           </a:p>
         </p:txBody>
@@ -6250,7 +6376,7 @@
             <a:avLst/>
           </a:prstGeom>
           <a:solidFill>
-            <a:srgbClr val="0B0F19"/>
+            <a:srgbClr val="FFF8E7"/>
           </a:solidFill>
           <a:ln>
             <a:noFill/>
@@ -6286,7 +6412,7 @@
         </p:nvSpPr>
         <p:spPr>
           <a:xfrm>
-            <a:off x="731520" y="365760"/>
+            <a:off x="731520" y="320040"/>
             <a:ext cx="8229600" cy="228600"/>
           </a:xfrm>
           <a:prstGeom prst="rect">
@@ -6301,14 +6427,15 @@
           <a:lstStyle/>
           <a:p>
             <a:pPr>
-              <a:defRPr sz="1000" b="1">
-                <a:solidFill>
-                  <a:srgbClr val="38BDF8"/>
-                </a:solidFill>
-              </a:defRPr>
-            </a:pPr>
-            <a:r>
-              <a:t>CODEBASE INSPECTION</a:t>
+              <a:defRPr sz="950" b="1">
+                <a:solidFill>
+                  <a:srgbClr val="6E5D4E"/>
+                </a:solidFill>
+                <a:latin typeface="Arial"/>
+              </a:defRPr>
+            </a:pPr>
+            <a:r>
+              <a:t>SLIDE 5 • DASHBOARD DETAILS</a:t>
             </a:r>
           </a:p>
         </p:txBody>
@@ -6321,8 +6448,8 @@
         </p:nvSpPr>
         <p:spPr>
           <a:xfrm>
-            <a:off x="731520" y="594360"/>
-            <a:ext cx="8686800" cy="548640"/>
+            <a:off x="731520" y="530352"/>
+            <a:ext cx="8961120" cy="548640"/>
           </a:xfrm>
           <a:prstGeom prst="rect">
             <a:avLst/>
@@ -6336,14 +6463,15 @@
           <a:lstStyle/>
           <a:p>
             <a:pPr>
-              <a:defRPr sz="2200" b="1">
-                <a:solidFill>
-                  <a:srgbClr val="FFFFFF"/>
-                </a:solidFill>
-              </a:defRPr>
-            </a:pPr>
-            <a:r>
-              <a:t>Algorithmic Implementation: crc_checker.py</a:t>
+              <a:defRPr sz="2100" b="1">
+                <a:solidFill>
+                  <a:srgbClr val="241E17"/>
+                </a:solidFill>
+                <a:latin typeface="Arial"/>
+              </a:defRPr>
+            </a:pPr>
+            <a:r>
+              <a:t>Dashboard &amp; Application Details (User Perspective)</a:t>
             </a:r>
           </a:p>
         </p:txBody>
@@ -6356,18 +6484,18 @@
         </p:nvSpPr>
         <p:spPr>
           <a:xfrm>
-            <a:off x="10241280" y="411480"/>
-            <a:ext cx="1188720" cy="365760"/>
+            <a:off x="10241280" y="365760"/>
+            <a:ext cx="1188720" cy="347472"/>
           </a:xfrm>
           <a:prstGeom prst="roundRect">
             <a:avLst/>
           </a:prstGeom>
           <a:solidFill>
-            <a:srgbClr val="162032"/>
+            <a:srgbClr val="FFFFFF"/>
           </a:solidFill>
           <a:ln>
             <a:solidFill>
-              <a:srgbClr val="24344D"/>
+              <a:srgbClr val="E2D5C3"/>
             </a:solidFill>
           </a:ln>
         </p:spPr>
@@ -6401,8 +6529,8 @@
         </p:nvSpPr>
         <p:spPr>
           <a:xfrm>
-            <a:off x="10241280" y="411480"/>
-            <a:ext cx="1188720" cy="365760"/>
+            <a:off x="10241280" y="365760"/>
+            <a:ext cx="1188720" cy="347472"/>
           </a:xfrm>
           <a:prstGeom prst="rect">
             <a:avLst/>
@@ -6416,10 +6544,11 @@
           <a:lstStyle/>
           <a:p>
             <a:pPr algn="ctr">
-              <a:defRPr sz="1000" b="1">
-                <a:solidFill>
-                  <a:srgbClr val="94A3B8"/>
-                </a:solidFill>
+              <a:defRPr sz="950" b="1">
+                <a:solidFill>
+                  <a:srgbClr val="6E5D4E"/>
+                </a:solidFill>
+                <a:latin typeface="Arial"/>
               </a:defRPr>
             </a:pPr>
             <a:r>
@@ -6428,26 +6557,302 @@
           </a:p>
         </p:txBody>
       </p:sp>
-      <p:sp>
-        <p:nvSpPr>
-          <p:cNvPr id="7" name="Rounded Rectangle 6"/>
+      <p:graphicFrame>
+        <p:nvGraphicFramePr>
+          <p:cNvPr id="7" name="Table 6"/>
+          <p:cNvGraphicFramePr>
+            <a:graphicFrameLocks noGrp="1"/>
+          </p:cNvGraphicFramePr>
+          <p:nvPr/>
+        </p:nvGraphicFramePr>
+        <p:xfrm>
+          <a:off x="731520" y="1280160"/>
+          <a:ext cx="10698480" cy="2651760"/>
+        </p:xfrm>
+        <a:graphic>
+          <a:graphicData uri="http://schemas.openxmlformats.org/drawingml/2006/table">
+            <a:tbl>
+              <a:tblPr firstRow="1" bandRow="1">
+                <a:tableStyleId>{5C22544A-7EE6-4342-B048-85BDC9FD1C3A}</a:tableStyleId>
+              </a:tblPr>
+              <a:tblGrid>
+                <a:gridCol w="2286000"/>
+                <a:gridCol w="8412480"/>
+              </a:tblGrid>
+              <a:tr h="530352">
+                <a:tc>
+                  <a:txBody>
+                    <a:bodyPr/>
+                    <a:lstStyle/>
+                    <a:p>
+                      <a:pPr algn="l">
+                        <a:defRPr sz="1000" b="1">
+                          <a:solidFill>
+                            <a:srgbClr val="241E17"/>
+                          </a:solidFill>
+                          <a:latin typeface="Arial"/>
+                        </a:defRPr>
+                      </a:pPr>
+                      <a:r>
+                        <a:t>Aspect</a:t>
+                      </a:r>
+                    </a:p>
+                  </a:txBody>
+                  <a:tcPr>
+                    <a:solidFill>
+                      <a:srgbClr val="F6E3C8"/>
+                    </a:solidFill>
+                  </a:tcPr>
+                </a:tc>
+                <a:tc>
+                  <a:txBody>
+                    <a:bodyPr/>
+                    <a:lstStyle/>
+                    <a:p>
+                      <a:pPr algn="l">
+                        <a:defRPr sz="1000" b="1">
+                          <a:solidFill>
+                            <a:srgbClr val="241E17"/>
+                          </a:solidFill>
+                          <a:latin typeface="Arial"/>
+                        </a:defRPr>
+                      </a:pPr>
+                      <a:r>
+                        <a:t>System Details &amp; Implementation</a:t>
+                      </a:r>
+                    </a:p>
+                  </a:txBody>
+                  <a:tcPr>
+                    <a:solidFill>
+                      <a:srgbClr val="F6E3C8"/>
+                    </a:solidFill>
+                  </a:tcPr>
+                </a:tc>
+              </a:tr>
+              <a:tr h="530352">
+                <a:tc>
+                  <a:txBody>
+                    <a:bodyPr/>
+                    <a:lstStyle/>
+                    <a:p>
+                      <a:pPr algn="l">
+                        <a:defRPr sz="950">
+                          <a:solidFill>
+                            <a:srgbClr val="6E5D4E"/>
+                          </a:solidFill>
+                          <a:latin typeface="Arial"/>
+                        </a:defRPr>
+                      </a:pPr>
+                      <a:r>
+                        <a:t>Software Used</a:t>
+                      </a:r>
+                    </a:p>
+                  </a:txBody>
+                  <a:tcPr>
+                    <a:solidFill>
+                      <a:srgbClr val="FFFFFF"/>
+                    </a:solidFill>
+                  </a:tcPr>
+                </a:tc>
+                <a:tc>
+                  <a:txBody>
+                    <a:bodyPr/>
+                    <a:lstStyle/>
+                    <a:p>
+                      <a:pPr algn="l">
+                        <a:defRPr sz="950">
+                          <a:solidFill>
+                            <a:srgbClr val="6E5D4E"/>
+                          </a:solidFill>
+                          <a:latin typeface="Arial"/>
+                        </a:defRPr>
+                      </a:pPr>
+                      <a:r>
+                        <a:t>Flask 2.3+ REST backend (Port 5000), Vanilla JS frontend, Modern HTML5/CSS3 with Warm Monotone palette.</a:t>
+                      </a:r>
+                    </a:p>
+                  </a:txBody>
+                  <a:tcPr>
+                    <a:solidFill>
+                      <a:srgbClr val="FFFFFF"/>
+                    </a:solidFill>
+                  </a:tcPr>
+                </a:tc>
+              </a:tr>
+              <a:tr h="530352">
+                <a:tc>
+                  <a:txBody>
+                    <a:bodyPr/>
+                    <a:lstStyle/>
+                    <a:p>
+                      <a:pPr algn="l">
+                        <a:defRPr sz="950">
+                          <a:solidFill>
+                            <a:srgbClr val="6E5D4E"/>
+                          </a:solidFill>
+                          <a:latin typeface="Arial"/>
+                        </a:defRPr>
+                      </a:pPr>
+                      <a:r>
+                        <a:t>Intended Users</a:t>
+                      </a:r>
+                    </a:p>
+                  </a:txBody>
+                  <a:tcPr>
+                    <a:solidFill>
+                      <a:srgbClr val="F3E6D6"/>
+                    </a:solidFill>
+                  </a:tcPr>
+                </a:tc>
+                <a:tc>
+                  <a:txBody>
+                    <a:bodyPr/>
+                    <a:lstStyle/>
+                    <a:p>
+                      <a:pPr algn="l">
+                        <a:defRPr sz="950">
+                          <a:solidFill>
+                            <a:srgbClr val="6E5D4E"/>
+                          </a:solidFill>
+                          <a:latin typeface="Arial"/>
+                        </a:defRPr>
+                      </a:pPr>
+                      <a:r>
+                        <a:t>Industrial plant operators, SCADA instrumentation engineers, edge gateway monitors, QA compliance auditors.</a:t>
+                      </a:r>
+                    </a:p>
+                  </a:txBody>
+                  <a:tcPr>
+                    <a:solidFill>
+                      <a:srgbClr val="F3E6D6"/>
+                    </a:solidFill>
+                  </a:tcPr>
+                </a:tc>
+              </a:tr>
+              <a:tr h="530352">
+                <a:tc>
+                  <a:txBody>
+                    <a:bodyPr/>
+                    <a:lstStyle/>
+                    <a:p>
+                      <a:pPr algn="l">
+                        <a:defRPr sz="950">
+                          <a:solidFill>
+                            <a:srgbClr val="6E5D4E"/>
+                          </a:solidFill>
+                          <a:latin typeface="Arial"/>
+                        </a:defRPr>
+                      </a:pPr>
+                      <a:r>
+                        <a:t>Dashboard Inputs</a:t>
+                      </a:r>
+                    </a:p>
+                  </a:txBody>
+                  <a:tcPr>
+                    <a:solidFill>
+                      <a:srgbClr val="FFFFFF"/>
+                    </a:solidFill>
+                  </a:tcPr>
+                </a:tc>
+                <a:tc>
+                  <a:txBody>
+                    <a:bodyPr/>
+                    <a:lstStyle/>
+                    <a:p>
+                      <a:pPr algn="l">
+                        <a:defRPr sz="950">
+                          <a:solidFill>
+                            <a:srgbClr val="6E5D4E"/>
+                          </a:solidFill>
+                          <a:latin typeface="Arial"/>
+                        </a:defRPr>
+                      </a:pPr>
+                      <a:r>
+                        <a:t>Original log textarea, file upload (.txt/.log), random telemetry generator, received log textarea, received CRC input.</a:t>
+                      </a:r>
+                    </a:p>
+                  </a:txBody>
+                  <a:tcPr>
+                    <a:solidFill>
+                      <a:srgbClr val="FFFFFF"/>
+                    </a:solidFill>
+                  </a:tcPr>
+                </a:tc>
+              </a:tr>
+              <a:tr h="530352">
+                <a:tc>
+                  <a:txBody>
+                    <a:bodyPr/>
+                    <a:lstStyle/>
+                    <a:p>
+                      <a:pPr algn="l">
+                        <a:defRPr sz="950">
+                          <a:solidFill>
+                            <a:srgbClr val="6E5D4E"/>
+                          </a:solidFill>
+                          <a:latin typeface="Arial"/>
+                        </a:defRPr>
+                      </a:pPr>
+                      <a:r>
+                        <a:t>Dashboard Outputs</a:t>
+                      </a:r>
+                    </a:p>
+                  </a:txBody>
+                  <a:tcPr>
+                    <a:solidFill>
+                      <a:srgbClr val="F3E6D6"/>
+                    </a:solidFill>
+                  </a:tcPr>
+                </a:tc>
+                <a:tc>
+                  <a:txBody>
+                    <a:bodyPr/>
+                    <a:lstStyle/>
+                    <a:p>
+                      <a:pPr algn="l">
+                        <a:defRPr sz="950">
+                          <a:solidFill>
+                            <a:srgbClr val="6E5D4E"/>
+                          </a:solidFill>
+                          <a:latin typeface="Arial"/>
+                        </a:defRPr>
+                      </a:pPr>
+                      <a:r>
+                        <a:t>Calculated 32-bit CRC, Hex digest, step-by-step binary/padding/remainder calculations, ACCEPT/REJECT status badge.</a:t>
+                      </a:r>
+                    </a:p>
+                  </a:txBody>
+                  <a:tcPr>
+                    <a:solidFill>
+                      <a:srgbClr val="F3E6D6"/>
+                    </a:solidFill>
+                  </a:tcPr>
+                </a:tc>
+              </a:tr>
+            </a:tbl>
+          </a:graphicData>
+        </a:graphic>
+      </p:graphicFrame>
+      <p:sp>
+        <p:nvSpPr>
+          <p:cNvPr id="8" name="Rounded Rectangle 7"/>
           <p:cNvSpPr/>
           <p:nvPr/>
         </p:nvSpPr>
         <p:spPr>
           <a:xfrm>
-            <a:off x="731520" y="1371600"/>
-            <a:ext cx="5120640" cy="4754880"/>
+            <a:off x="731520" y="4114800"/>
+            <a:ext cx="10698480" cy="2194560"/>
           </a:xfrm>
           <a:prstGeom prst="roundRect">
             <a:avLst/>
           </a:prstGeom>
           <a:solidFill>
-            <a:srgbClr val="162032"/>
+            <a:srgbClr val="EFE5D5"/>
           </a:solidFill>
-          <a:ln w="15240">
+          <a:ln w="13970">
             <a:solidFill>
-              <a:srgbClr val="24344D"/>
+              <a:srgbClr val="E3C08F"/>
             </a:solidFill>
           </a:ln>
         </p:spPr>
@@ -6475,14 +6880,14 @@
       </p:sp>
       <p:sp>
         <p:nvSpPr>
-          <p:cNvPr id="8" name="TextBox 7"/>
+          <p:cNvPr id="9" name="TextBox 8"/>
           <p:cNvSpPr txBox="1"/>
           <p:nvPr/>
         </p:nvSpPr>
         <p:spPr>
           <a:xfrm>
-            <a:off x="914400" y="1554480"/>
-            <a:ext cx="4754880" cy="4389120"/>
+            <a:off x="877824" y="4242816"/>
+            <a:ext cx="10405872" cy="1938528"/>
           </a:xfrm>
           <a:prstGeom prst="rect">
             <a:avLst/>
@@ -6499,463 +6904,79 @@
               <a:spcAft>
                 <a:spcPts val="200"/>
               </a:spcAft>
-              <a:defRPr sz="900" b="1">
-                <a:solidFill>
-                  <a:srgbClr val="94A3B8"/>
-                </a:solidFill>
-              </a:defRPr>
-            </a:pPr>
-            <a:r>
-              <a:t>CORE DIVISION</a:t>
-            </a:r>
-          </a:p>
-          <a:p>
-            <a:pPr>
-              <a:spcAft>
-                <a:spcPts val="800"/>
-              </a:spcAft>
-              <a:defRPr sz="1500" b="1">
-                <a:solidFill>
-                  <a:srgbClr val="38BDF8"/>
-                </a:solidFill>
-              </a:defRPr>
-            </a:pPr>
-            <a:r>
-              <a:t>Handwritten xordiv() Division</a:t>
-            </a:r>
-          </a:p>
-          <a:p>
-            <a:pPr>
-              <a:spcAft>
-                <a:spcPts val="400"/>
-              </a:spcAft>
-              <a:defRPr sz="1150">
-                <a:solidFill>
-                  <a:srgbClr val="E2E8F0"/>
-                </a:solidFill>
-              </a:defRPr>
-            </a:pPr>
-            <a:r>
-              <a:t>def xordiv(dividend, divisor):</a:t>
-            </a:r>
-          </a:p>
-          <a:p>
-            <a:pPr>
-              <a:spcAft>
-                <a:spcPts val="400"/>
-              </a:spcAft>
-              <a:defRPr sz="1150">
-                <a:solidFill>
-                  <a:srgbClr val="E2E8F0"/>
-                </a:solidFill>
-              </a:defRPr>
-            </a:pPr>
-            <a:r>
-              <a:t>    d = list(dividend)</a:t>
-            </a:r>
-          </a:p>
-          <a:p>
-            <a:pPr>
-              <a:spcAft>
-                <a:spcPts val="400"/>
-              </a:spcAft>
-              <a:defRPr sz="1150">
-                <a:solidFill>
-                  <a:srgbClr val="E2E8F0"/>
-                </a:solidFill>
-              </a:defRPr>
-            </a:pPr>
-            <a:r>
-              <a:t>    m = len(divisor) # 33 bits</a:t>
-            </a:r>
-          </a:p>
-          <a:p>
-            <a:pPr>
-              <a:spcAft>
-                <a:spcPts val="400"/>
-              </a:spcAft>
-              <a:defRPr sz="1150">
-                <a:solidFill>
-                  <a:srgbClr val="E2E8F0"/>
-                </a:solidFill>
-              </a:defRPr>
-            </a:pPr>
-            <a:r>
-              <a:t>    for i in range(len(d) - m + 1):</a:t>
-            </a:r>
-          </a:p>
-          <a:p>
-            <a:pPr>
-              <a:spcAft>
-                <a:spcPts val="400"/>
-              </a:spcAft>
-              <a:defRPr sz="1150">
-                <a:solidFill>
-                  <a:srgbClr val="E2E8F0"/>
-                </a:solidFill>
-              </a:defRPr>
-            </a:pPr>
-            <a:r>
-              <a:t>        if d[i] == '1':</a:t>
-            </a:r>
-          </a:p>
-          <a:p>
-            <a:pPr>
-              <a:spcAft>
-                <a:spcPts val="400"/>
-              </a:spcAft>
-              <a:defRPr sz="1150">
-                <a:solidFill>
-                  <a:srgbClr val="E2E8F0"/>
-                </a:solidFill>
-              </a:defRPr>
-            </a:pPr>
-            <a:r>
-              <a:t>            for j in range(m):</a:t>
-            </a:r>
-          </a:p>
-          <a:p>
-            <a:pPr>
-              <a:spcAft>
-                <a:spcPts val="400"/>
-              </a:spcAft>
-              <a:defRPr sz="1150">
-                <a:solidFill>
-                  <a:srgbClr val="E2E8F0"/>
-                </a:solidFill>
-              </a:defRPr>
-            </a:pPr>
-            <a:r>
-              <a:t>                d[i+j] = '1' if d[i+j] != divisor[j] else '0'</a:t>
-            </a:r>
-          </a:p>
-          <a:p>
-            <a:pPr>
-              <a:spcAft>
-                <a:spcPts val="400"/>
-              </a:spcAft>
-              <a:defRPr sz="1150">
-                <a:solidFill>
-                  <a:srgbClr val="E2E8F0"/>
-                </a:solidFill>
-              </a:defRPr>
-            </a:pPr>
-            <a:r>
-              <a:t>    return ''.join(d[-(m - 1):]) # 32 bits</a:t>
-            </a:r>
-          </a:p>
-          <a:p>
-            <a:pPr>
-              <a:spcAft>
-                <a:spcPts val="400"/>
-              </a:spcAft>
-              <a:defRPr sz="1150">
-                <a:solidFill>
-                  <a:srgbClr val="E2E8F0"/>
-                </a:solidFill>
-              </a:defRPr>
-            </a:pPr>
-          </a:p>
-          <a:p>
-            <a:pPr>
-              <a:spcAft>
-                <a:spcPts val="400"/>
-              </a:spcAft>
-              <a:defRPr sz="1150">
-                <a:solidFill>
-                  <a:srgbClr val="E2E8F0"/>
-                </a:solidFill>
-              </a:defRPr>
-            </a:pPr>
-            <a:r>
-              <a:t>✓ In-place array mutation without string allocations</a:t>
-            </a:r>
-          </a:p>
-          <a:p>
-            <a:pPr>
-              <a:spcAft>
-                <a:spcPts val="400"/>
-              </a:spcAft>
-              <a:defRPr sz="1150">
-                <a:solidFill>
-                  <a:srgbClr val="E2E8F0"/>
-                </a:solidFill>
-              </a:defRPr>
-            </a:pPr>
-            <a:r>
-              <a:t>✓ Slices strictly the last (m - 1) bits as remainder</a:t>
-            </a:r>
-          </a:p>
-        </p:txBody>
-      </p:sp>
-      <p:sp>
-        <p:nvSpPr>
-          <p:cNvPr id="9" name="Rounded Rectangle 8"/>
-          <p:cNvSpPr/>
-          <p:nvPr/>
-        </p:nvSpPr>
-        <p:spPr>
-          <a:xfrm>
-            <a:off x="6217920" y="1371600"/>
-            <a:ext cx="5212080" cy="4754880"/>
-          </a:xfrm>
-          <a:prstGeom prst="roundRect">
-            <a:avLst/>
-          </a:prstGeom>
-          <a:solidFill>
-            <a:srgbClr val="162032"/>
-          </a:solidFill>
-          <a:ln w="15240">
-            <a:solidFill>
-              <a:srgbClr val="24344D"/>
-            </a:solidFill>
-          </a:ln>
-        </p:spPr>
-        <p:style>
-          <a:lnRef idx="1">
-            <a:schemeClr val="accent1"/>
-          </a:lnRef>
-          <a:fillRef idx="3">
-            <a:schemeClr val="accent1"/>
-          </a:fillRef>
-          <a:effectRef idx="2">
-            <a:schemeClr val="accent1"/>
-          </a:effectRef>
-          <a:fontRef idx="minor">
-            <a:schemeClr val="lt1"/>
-          </a:fontRef>
-        </p:style>
-        <p:txBody>
-          <a:bodyPr rtlCol="0" anchor="ctr"/>
-          <a:lstStyle/>
-          <a:p>
-            <a:pPr algn="ctr"/>
-          </a:p>
-        </p:txBody>
-      </p:sp>
-      <p:sp>
-        <p:nvSpPr>
-          <p:cNvPr id="10" name="TextBox 9"/>
-          <p:cNvSpPr txBox="1"/>
-          <p:nvPr/>
-        </p:nvSpPr>
-        <p:spPr>
-          <a:xfrm>
-            <a:off x="6400800" y="1554480"/>
-            <a:ext cx="4846320" cy="4389120"/>
-          </a:xfrm>
-          <a:prstGeom prst="rect">
-            <a:avLst/>
-          </a:prstGeom>
-          <a:noFill/>
-        </p:spPr>
-        <p:txBody>
-          <a:bodyPr wrap="square">
-            <a:spAutoFit/>
-          </a:bodyPr>
-          <a:lstStyle/>
-          <a:p>
-            <a:pPr>
-              <a:spcAft>
-                <a:spcPts val="200"/>
-              </a:spcAft>
-              <a:defRPr sz="900" b="1">
-                <a:solidFill>
-                  <a:srgbClr val="94A3B8"/>
-                </a:solidFill>
-              </a:defRPr>
-            </a:pPr>
-            <a:r>
-              <a:t>SESSION INVARIANT</a:t>
-            </a:r>
-          </a:p>
-          <a:p>
-            <a:pPr>
-              <a:spcAft>
-                <a:spcPts val="800"/>
-              </a:spcAft>
-              <a:defRPr sz="1500" b="1">
-                <a:solidFill>
-                  <a:srgbClr val="38BDF8"/>
-                </a:solidFill>
-              </a:defRPr>
-            </a:pPr>
-            <a:r>
-              <a:t>Session Divisor &amp; Verification Flow</a:t>
-            </a:r>
-          </a:p>
-          <a:p>
-            <a:pPr>
-              <a:spcAft>
-                <a:spcPts val="400"/>
-              </a:spcAft>
-              <a:defRPr sz="1150">
-                <a:solidFill>
-                  <a:srgbClr val="E2E8F0"/>
-                </a:solidFill>
-              </a:defRPr>
-            </a:pPr>
-            <a:r>
-              <a:t>GENERATOR = None # Session-level singleton</a:t>
-            </a:r>
-          </a:p>
-          <a:p>
-            <a:pPr>
-              <a:spcAft>
-                <a:spcPts val="400"/>
-              </a:spcAft>
-              <a:defRPr sz="1150">
-                <a:solidFill>
-                  <a:srgbClr val="E2E8F0"/>
-                </a:solidFill>
-              </a:defRPr>
-            </a:pPr>
-          </a:p>
-          <a:p>
-            <a:pPr>
-              <a:spcAft>
-                <a:spcPts val="400"/>
-              </a:spcAft>
-              <a:defRPr sz="1150">
-                <a:solidFill>
-                  <a:srgbClr val="E2E8F0"/>
-                </a:solidFill>
-              </a:defRPr>
-            </a:pPr>
-            <a:r>
-              <a:t>def get_divisor():</a:t>
-            </a:r>
-          </a:p>
-          <a:p>
-            <a:pPr>
-              <a:spcAft>
-                <a:spcPts val="400"/>
-              </a:spcAft>
-              <a:defRPr sz="1150">
-                <a:solidFill>
-                  <a:srgbClr val="E2E8F0"/>
-                </a:solidFill>
-              </a:defRPr>
-            </a:pPr>
-            <a:r>
-              <a:t>    global GENERATOR</a:t>
-            </a:r>
-          </a:p>
-          <a:p>
-            <a:pPr>
-              <a:spcAft>
-                <a:spcPts val="400"/>
-              </a:spcAft>
-              <a:defRPr sz="1150">
-                <a:solidFill>
-                  <a:srgbClr val="E2E8F0"/>
-                </a:solidFill>
-              </a:defRPr>
-            </a:pPr>
-            <a:r>
-              <a:t>    if GENERATOR is None:</a:t>
-            </a:r>
-          </a:p>
-          <a:p>
-            <a:pPr>
-              <a:spcAft>
-                <a:spcPts val="400"/>
-              </a:spcAft>
-              <a:defRPr sz="1150">
-                <a:solidFill>
-                  <a:srgbClr val="E2E8F0"/>
-                </a:solidFill>
-              </a:defRPr>
-            </a:pPr>
-            <a:r>
-              <a:t>        GENERATOR = generate_divisor()</a:t>
-            </a:r>
-          </a:p>
-          <a:p>
-            <a:pPr>
-              <a:spcAft>
-                <a:spcPts val="400"/>
-              </a:spcAft>
-              <a:defRPr sz="1150">
-                <a:solidFill>
-                  <a:srgbClr val="E2E8F0"/>
-                </a:solidFill>
-              </a:defRPr>
-            </a:pPr>
-            <a:r>
-              <a:t>    return GENERATOR</a:t>
-            </a:r>
-          </a:p>
-          <a:p>
-            <a:pPr>
-              <a:spcAft>
-                <a:spcPts val="400"/>
-              </a:spcAft>
-              <a:defRPr sz="1150">
-                <a:solidFill>
-                  <a:srgbClr val="E2E8F0"/>
-                </a:solidFill>
-              </a:defRPr>
-            </a:pPr>
-          </a:p>
-          <a:p>
-            <a:pPr>
-              <a:spcAft>
-                <a:spcPts val="400"/>
-              </a:spcAft>
-              <a:defRPr sz="1150">
-                <a:solidFill>
-                  <a:srgbClr val="E2E8F0"/>
-                </a:solidFill>
-              </a:defRPr>
-            </a:pPr>
-            <a:r>
-              <a:t>def verify(text, received_crc):</a:t>
-            </a:r>
-          </a:p>
-          <a:p>
-            <a:pPr>
-              <a:spcAft>
-                <a:spcPts val="400"/>
-              </a:spcAft>
-              <a:defRPr sz="1150">
-                <a:solidFill>
-                  <a:srgbClr val="E2E8F0"/>
-                </a:solidFill>
-              </a:defRPr>
-            </a:pPr>
-            <a:r>
-              <a:t>    codeword = ascii2binary(text) + received_crc</a:t>
-            </a:r>
-          </a:p>
-          <a:p>
-            <a:pPr>
-              <a:spcAft>
-                <a:spcPts val="400"/>
-              </a:spcAft>
-              <a:defRPr sz="1150">
-                <a:solidFill>
-                  <a:srgbClr val="E2E8F0"/>
-                </a:solidFill>
-              </a:defRPr>
-            </a:pPr>
-            <a:r>
-              <a:t>    remainder = xordiv(codeword, get_divisor())</a:t>
-            </a:r>
-          </a:p>
-          <a:p>
-            <a:pPr>
-              <a:spcAft>
-                <a:spcPts val="400"/>
-              </a:spcAft>
-              <a:defRPr sz="1150">
-                <a:solidFill>
-                  <a:srgbClr val="E2E8F0"/>
-                </a:solidFill>
-              </a:defRPr>
-            </a:pPr>
-            <a:r>
-              <a:t>    return remainder == '0' * 32</a:t>
+              <a:defRPr sz="850" b="1">
+                <a:solidFill>
+                  <a:srgbClr val="6E5D4E"/>
+                </a:solidFill>
+                <a:latin typeface="Arial"/>
+              </a:defRPr>
+            </a:pPr>
+            <a:r>
+              <a:t>DASHBOARD-TO-CODE-TO-DASHBOARD PIPELINE</a:t>
+            </a:r>
+          </a:p>
+          <a:p>
+            <a:pPr>
+              <a:spcAft>
+                <a:spcPts val="500"/>
+              </a:spcAft>
+              <a:defRPr sz="1350" b="1">
+                <a:solidFill>
+                  <a:srgbClr val="241E17"/>
+                </a:solidFill>
+                <a:latin typeface="Arial"/>
+              </a:defRPr>
+            </a:pPr>
+            <a:r>
+              <a:t>Complete End-to-End System Execution Flow (Guideline Flowchart)</a:t>
+            </a:r>
+          </a:p>
+          <a:p>
+            <a:pPr>
+              <a:spcAft>
+                <a:spcPts val="300"/>
+              </a:spcAft>
+              <a:defRPr sz="1050">
+                <a:solidFill>
+                  <a:srgbClr val="6E5D4E"/>
+                </a:solidFill>
+                <a:latin typeface="Arial"/>
+              </a:defRPr>
+            </a:pPr>
+            <a:r>
+              <a:t>User Input (Text/File Upload) ➔ Dashboard State ➔ POST /api/compute (Fetch API) ➔ ascii2binary() ➔ xordiv() ➔</a:t>
+            </a:r>
+          </a:p>
+          <a:p>
+            <a:pPr>
+              <a:spcAft>
+                <a:spcPts val="300"/>
+              </a:spcAft>
+              <a:defRPr sz="1050">
+                <a:solidFill>
+                  <a:srgbClr val="6E5D4E"/>
+                </a:solidFill>
+                <a:latin typeface="Arial"/>
+              </a:defRPr>
+            </a:pPr>
+            <a:r>
+              <a:t>➔ Return CRC &amp; Steps JSON ➔ Live Dashboard Telemetry Rendering (Steps 1 to 5) ➔</a:t>
+            </a:r>
+          </a:p>
+          <a:p>
+            <a:pPr>
+              <a:spcAft>
+                <a:spcPts val="300"/>
+              </a:spcAft>
+              <a:defRPr sz="1050">
+                <a:solidFill>
+                  <a:srgbClr val="6E5D4E"/>
+                </a:solidFill>
+                <a:latin typeface="Arial"/>
+              </a:defRPr>
+            </a:pPr>
+            <a:r>
+              <a:t>➔ Receiver Re-ingestion ➔ POST /api/verify ➔ Codeword Remainder Division ➔ Result Chip [✓ ACCEPT / ✗ REJECT]</a:t>
             </a:r>
           </a:p>
         </p:txBody>
@@ -6993,7 +7014,7 @@
             <a:avLst/>
           </a:prstGeom>
           <a:solidFill>
-            <a:srgbClr val="0B0F19"/>
+            <a:srgbClr val="FFF8E7"/>
           </a:solidFill>
           <a:ln>
             <a:noFill/>
@@ -7029,7 +7050,7 @@
         </p:nvSpPr>
         <p:spPr>
           <a:xfrm>
-            <a:off x="731520" y="365760"/>
+            <a:off x="731520" y="320040"/>
             <a:ext cx="8229600" cy="228600"/>
           </a:xfrm>
           <a:prstGeom prst="rect">
@@ -7044,14 +7065,15 @@
           <a:lstStyle/>
           <a:p>
             <a:pPr>
-              <a:defRPr sz="1000" b="1">
-                <a:solidFill>
-                  <a:srgbClr val="38BDF8"/>
-                </a:solidFill>
-              </a:defRPr>
-            </a:pPr>
-            <a:r>
-              <a:t>VIVA DEFENSE</a:t>
+              <a:defRPr sz="950" b="1">
+                <a:solidFill>
+                  <a:srgbClr val="6E5D4E"/>
+                </a:solidFill>
+                <a:latin typeface="Arial"/>
+              </a:defRPr>
+            </a:pPr>
+            <a:r>
+              <a:t>SLIDE 6 • TESTING MATRIX</a:t>
             </a:r>
           </a:p>
         </p:txBody>
@@ -7064,8 +7086,8 @@
         </p:nvSpPr>
         <p:spPr>
           <a:xfrm>
-            <a:off x="731520" y="594360"/>
-            <a:ext cx="8686800" cy="548640"/>
+            <a:off x="731520" y="530352"/>
+            <a:ext cx="8961120" cy="548640"/>
           </a:xfrm>
           <a:prstGeom prst="rect">
             <a:avLst/>
@@ -7079,14 +7101,15 @@
           <a:lstStyle/>
           <a:p>
             <a:pPr>
-              <a:defRPr sz="2200" b="1">
-                <a:solidFill>
-                  <a:srgbClr val="FFFFFF"/>
-                </a:solidFill>
-              </a:defRPr>
-            </a:pPr>
-            <a:r>
-              <a:t>Error Detection Power: CRC-32 vs Other Techniques</a:t>
+              <a:defRPr sz="2100" b="1">
+                <a:solidFill>
+                  <a:srgbClr val="241E17"/>
+                </a:solidFill>
+                <a:latin typeface="Arial"/>
+              </a:defRPr>
+            </a:pPr>
+            <a:r>
+              <a:t>Comprehensive Testing &amp; Test Cases Matrix</a:t>
             </a:r>
           </a:p>
         </p:txBody>
@@ -7099,18 +7122,18 @@
         </p:nvSpPr>
         <p:spPr>
           <a:xfrm>
-            <a:off x="10241280" y="411480"/>
-            <a:ext cx="1188720" cy="365760"/>
+            <a:off x="10241280" y="365760"/>
+            <a:ext cx="1188720" cy="347472"/>
           </a:xfrm>
           <a:prstGeom prst="roundRect">
             <a:avLst/>
           </a:prstGeom>
           <a:solidFill>
-            <a:srgbClr val="162032"/>
+            <a:srgbClr val="FFFFFF"/>
           </a:solidFill>
           <a:ln>
             <a:solidFill>
-              <a:srgbClr val="24344D"/>
+              <a:srgbClr val="E2D5C3"/>
             </a:solidFill>
           </a:ln>
         </p:spPr>
@@ -7144,8 +7167,8 @@
         </p:nvSpPr>
         <p:spPr>
           <a:xfrm>
-            <a:off x="10241280" y="411480"/>
-            <a:ext cx="1188720" cy="365760"/>
+            <a:off x="10241280" y="365760"/>
+            <a:ext cx="1188720" cy="347472"/>
           </a:xfrm>
           <a:prstGeom prst="rect">
             <a:avLst/>
@@ -7159,10 +7182,11 @@
           <a:lstStyle/>
           <a:p>
             <a:pPr algn="ctr">
-              <a:defRPr sz="1000" b="1">
-                <a:solidFill>
-                  <a:srgbClr val="94A3B8"/>
-                </a:solidFill>
+              <a:defRPr sz="950" b="1">
+                <a:solidFill>
+                  <a:srgbClr val="6E5D4E"/>
+                </a:solidFill>
+                <a:latin typeface="Arial"/>
               </a:defRPr>
             </a:pPr>
             <a:r>
@@ -7171,26 +7195,932 @@
           </a:p>
         </p:txBody>
       </p:sp>
-      <p:sp>
-        <p:nvSpPr>
-          <p:cNvPr id="7" name="Rounded Rectangle 6"/>
+      <p:graphicFrame>
+        <p:nvGraphicFramePr>
+          <p:cNvPr id="7" name="Table 6"/>
+          <p:cNvGraphicFramePr>
+            <a:graphicFrameLocks noGrp="1"/>
+          </p:cNvGraphicFramePr>
+          <p:nvPr/>
+        </p:nvGraphicFramePr>
+        <p:xfrm>
+          <a:off x="731520" y="1280160"/>
+          <a:ext cx="10698480" cy="3291840"/>
+        </p:xfrm>
+        <a:graphic>
+          <a:graphicData uri="http://schemas.openxmlformats.org/drawingml/2006/table">
+            <a:tbl>
+              <a:tblPr firstRow="1" bandRow="1">
+                <a:tableStyleId>{5C22544A-7EE6-4342-B048-85BDC9FD1C3A}</a:tableStyleId>
+              </a:tblPr>
+              <a:tblGrid>
+                <a:gridCol w="914400"/>
+                <a:gridCol w="2926080"/>
+                <a:gridCol w="1828800"/>
+                <a:gridCol w="2194560"/>
+                <a:gridCol w="2011680"/>
+                <a:gridCol w="822960"/>
+              </a:tblGrid>
+              <a:tr h="548640">
+                <a:tc>
+                  <a:txBody>
+                    <a:bodyPr/>
+                    <a:lstStyle/>
+                    <a:p>
+                      <a:pPr algn="l">
+                        <a:defRPr sz="1000" b="1">
+                          <a:solidFill>
+                            <a:srgbClr val="241E17"/>
+                          </a:solidFill>
+                          <a:latin typeface="Arial"/>
+                        </a:defRPr>
+                      </a:pPr>
+                      <a:r>
+                        <a:t>Test ID</a:t>
+                      </a:r>
+                    </a:p>
+                  </a:txBody>
+                  <a:tcPr>
+                    <a:solidFill>
+                      <a:srgbClr val="F6E3C8"/>
+                    </a:solidFill>
+                  </a:tcPr>
+                </a:tc>
+                <a:tc>
+                  <a:txBody>
+                    <a:bodyPr/>
+                    <a:lstStyle/>
+                    <a:p>
+                      <a:pPr algn="l">
+                        <a:defRPr sz="1000" b="1">
+                          <a:solidFill>
+                            <a:srgbClr val="241E17"/>
+                          </a:solidFill>
+                          <a:latin typeface="Arial"/>
+                        </a:defRPr>
+                      </a:pPr>
+                      <a:r>
+                        <a:t>Input Data</a:t>
+                      </a:r>
+                    </a:p>
+                  </a:txBody>
+                  <a:tcPr>
+                    <a:solidFill>
+                      <a:srgbClr val="F6E3C8"/>
+                    </a:solidFill>
+                  </a:tcPr>
+                </a:tc>
+                <a:tc>
+                  <a:txBody>
+                    <a:bodyPr/>
+                    <a:lstStyle/>
+                    <a:p>
+                      <a:pPr algn="l">
+                        <a:defRPr sz="1000" b="1">
+                          <a:solidFill>
+                            <a:srgbClr val="241E17"/>
+                          </a:solidFill>
+                          <a:latin typeface="Arial"/>
+                        </a:defRPr>
+                      </a:pPr>
+                      <a:r>
+                        <a:t>Operation</a:t>
+                      </a:r>
+                    </a:p>
+                  </a:txBody>
+                  <a:tcPr>
+                    <a:solidFill>
+                      <a:srgbClr val="F6E3C8"/>
+                    </a:solidFill>
+                  </a:tcPr>
+                </a:tc>
+                <a:tc>
+                  <a:txBody>
+                    <a:bodyPr/>
+                    <a:lstStyle/>
+                    <a:p>
+                      <a:pPr algn="l">
+                        <a:defRPr sz="1000" b="1">
+                          <a:solidFill>
+                            <a:srgbClr val="241E17"/>
+                          </a:solidFill>
+                          <a:latin typeface="Arial"/>
+                        </a:defRPr>
+                      </a:pPr>
+                      <a:r>
+                        <a:t>Expected Result</a:t>
+                      </a:r>
+                    </a:p>
+                  </a:txBody>
+                  <a:tcPr>
+                    <a:solidFill>
+                      <a:srgbClr val="F6E3C8"/>
+                    </a:solidFill>
+                  </a:tcPr>
+                </a:tc>
+                <a:tc>
+                  <a:txBody>
+                    <a:bodyPr/>
+                    <a:lstStyle/>
+                    <a:p>
+                      <a:pPr algn="l">
+                        <a:defRPr sz="1000" b="1">
+                          <a:solidFill>
+                            <a:srgbClr val="241E17"/>
+                          </a:solidFill>
+                          <a:latin typeface="Arial"/>
+                        </a:defRPr>
+                      </a:pPr>
+                      <a:r>
+                        <a:t>Actual Result</a:t>
+                      </a:r>
+                    </a:p>
+                  </a:txBody>
+                  <a:tcPr>
+                    <a:solidFill>
+                      <a:srgbClr val="F6E3C8"/>
+                    </a:solidFill>
+                  </a:tcPr>
+                </a:tc>
+                <a:tc>
+                  <a:txBody>
+                    <a:bodyPr/>
+                    <a:lstStyle/>
+                    <a:p>
+                      <a:pPr algn="l">
+                        <a:defRPr sz="1000" b="1">
+                          <a:solidFill>
+                            <a:srgbClr val="241E17"/>
+                          </a:solidFill>
+                          <a:latin typeface="Arial"/>
+                        </a:defRPr>
+                      </a:pPr>
+                      <a:r>
+                        <a:t>Status</a:t>
+                      </a:r>
+                    </a:p>
+                  </a:txBody>
+                  <a:tcPr>
+                    <a:solidFill>
+                      <a:srgbClr val="F6E3C8"/>
+                    </a:solidFill>
+                  </a:tcPr>
+                </a:tc>
+              </a:tr>
+              <a:tr h="548640">
+                <a:tc>
+                  <a:txBody>
+                    <a:bodyPr/>
+                    <a:lstStyle/>
+                    <a:p>
+                      <a:pPr algn="l">
+                        <a:defRPr sz="950">
+                          <a:solidFill>
+                            <a:srgbClr val="6E5D4E"/>
+                          </a:solidFill>
+                          <a:latin typeface="Arial"/>
+                        </a:defRPr>
+                      </a:pPr>
+                      <a:r>
+                        <a:t>TC-01</a:t>
+                      </a:r>
+                    </a:p>
+                  </a:txBody>
+                  <a:tcPr>
+                    <a:solidFill>
+                      <a:srgbClr val="FFFFFF"/>
+                    </a:solidFill>
+                  </a:tcPr>
+                </a:tc>
+                <a:tc>
+                  <a:txBody>
+                    <a:bodyPr/>
+                    <a:lstStyle/>
+                    <a:p>
+                      <a:pPr algn="l">
+                        <a:defRPr sz="950">
+                          <a:solidFill>
+                            <a:srgbClr val="6E5D4E"/>
+                          </a:solidFill>
+                          <a:latin typeface="Arial"/>
+                        </a:defRPr>
+                      </a:pPr>
+                      <a:r>
+                        <a:t>Binary: 101100101</a:t>
+                      </a:r>
+                    </a:p>
+                  </a:txBody>
+                  <a:tcPr>
+                    <a:solidFill>
+                      <a:srgbClr val="FFFFFF"/>
+                    </a:solidFill>
+                  </a:tcPr>
+                </a:tc>
+                <a:tc>
+                  <a:txBody>
+                    <a:bodyPr/>
+                    <a:lstStyle/>
+                    <a:p>
+                      <a:pPr algn="l">
+                        <a:defRPr sz="950">
+                          <a:solidFill>
+                            <a:srgbClr val="6E5D4E"/>
+                          </a:solidFill>
+                          <a:latin typeface="Arial"/>
+                        </a:defRPr>
+                      </a:pPr>
+                      <a:r>
+                        <a:t>CRC-32 Modulo-2</a:t>
+                      </a:r>
+                    </a:p>
+                  </a:txBody>
+                  <a:tcPr>
+                    <a:solidFill>
+                      <a:srgbClr val="FFFFFF"/>
+                    </a:solidFill>
+                  </a:tcPr>
+                </a:tc>
+                <a:tc>
+                  <a:txBody>
+                    <a:bodyPr/>
+                    <a:lstStyle/>
+                    <a:p>
+                      <a:pPr algn="l">
+                        <a:defRPr sz="950">
+                          <a:solidFill>
+                            <a:srgbClr val="6E5D4E"/>
+                          </a:solidFill>
+                          <a:latin typeface="Arial"/>
+                        </a:defRPr>
+                      </a:pPr>
+                      <a:r>
+                        <a:t>32-bit CRC generated</a:t>
+                      </a:r>
+                    </a:p>
+                  </a:txBody>
+                  <a:tcPr>
+                    <a:solidFill>
+                      <a:srgbClr val="FFFFFF"/>
+                    </a:solidFill>
+                  </a:tcPr>
+                </a:tc>
+                <a:tc>
+                  <a:txBody>
+                    <a:bodyPr/>
+                    <a:lstStyle/>
+                    <a:p>
+                      <a:pPr algn="l">
+                        <a:defRPr sz="950">
+                          <a:solidFill>
+                            <a:srgbClr val="6E5D4E"/>
+                          </a:solidFill>
+                          <a:latin typeface="Arial"/>
+                        </a:defRPr>
+                      </a:pPr>
+                      <a:r>
+                        <a:t>Correct CRC calculated</a:t>
+                      </a:r>
+                    </a:p>
+                  </a:txBody>
+                  <a:tcPr>
+                    <a:solidFill>
+                      <a:srgbClr val="FFFFFF"/>
+                    </a:solidFill>
+                  </a:tcPr>
+                </a:tc>
+                <a:tc>
+                  <a:txBody>
+                    <a:bodyPr/>
+                    <a:lstStyle/>
+                    <a:p>
+                      <a:pPr algn="l">
+                        <a:defRPr sz="950">
+                          <a:solidFill>
+                            <a:srgbClr val="6E5D4E"/>
+                          </a:solidFill>
+                          <a:latin typeface="Arial"/>
+                        </a:defRPr>
+                      </a:pPr>
+                      <a:r>
+                        <a:t>PASS</a:t>
+                      </a:r>
+                    </a:p>
+                  </a:txBody>
+                  <a:tcPr>
+                    <a:solidFill>
+                      <a:srgbClr val="FFFFFF"/>
+                    </a:solidFill>
+                  </a:tcPr>
+                </a:tc>
+              </a:tr>
+              <a:tr h="548640">
+                <a:tc>
+                  <a:txBody>
+                    <a:bodyPr/>
+                    <a:lstStyle/>
+                    <a:p>
+                      <a:pPr algn="l">
+                        <a:defRPr sz="950">
+                          <a:solidFill>
+                            <a:srgbClr val="6E5D4E"/>
+                          </a:solidFill>
+                          <a:latin typeface="Arial"/>
+                        </a:defRPr>
+                      </a:pPr>
+                      <a:r>
+                        <a:t>TC-02</a:t>
+                      </a:r>
+                    </a:p>
+                  </a:txBody>
+                  <a:tcPr>
+                    <a:solidFill>
+                      <a:srgbClr val="F3E6D6"/>
+                    </a:solidFill>
+                  </a:tcPr>
+                </a:tc>
+                <a:tc>
+                  <a:txBody>
+                    <a:bodyPr/>
+                    <a:lstStyle/>
+                    <a:p>
+                      <a:pPr algn="l">
+                        <a:defRPr sz="950">
+                          <a:solidFill>
+                            <a:srgbClr val="6E5D4E"/>
+                          </a:solidFill>
+                          <a:latin typeface="Arial"/>
+                        </a:defRPr>
+                      </a:pPr>
+                      <a:r>
+                        <a:t>Text: [TURBINE_01] RPM:3450</a:t>
+                      </a:r>
+                    </a:p>
+                  </a:txBody>
+                  <a:tcPr>
+                    <a:solidFill>
+                      <a:srgbClr val="F3E6D6"/>
+                    </a:solidFill>
+                  </a:tcPr>
+                </a:tc>
+                <a:tc>
+                  <a:txBody>
+                    <a:bodyPr/>
+                    <a:lstStyle/>
+                    <a:p>
+                      <a:pPr algn="l">
+                        <a:defRPr sz="950">
+                          <a:solidFill>
+                            <a:srgbClr val="6E5D4E"/>
+                          </a:solidFill>
+                          <a:latin typeface="Arial"/>
+                        </a:defRPr>
+                      </a:pPr>
+                      <a:r>
+                        <a:t>CRC Computation</a:t>
+                      </a:r>
+                    </a:p>
+                  </a:txBody>
+                  <a:tcPr>
+                    <a:solidFill>
+                      <a:srgbClr val="F3E6D6"/>
+                    </a:solidFill>
+                  </a:tcPr>
+                </a:tc>
+                <a:tc>
+                  <a:txBody>
+                    <a:bodyPr/>
+                    <a:lstStyle/>
+                    <a:p>
+                      <a:pPr algn="l">
+                        <a:defRPr sz="950">
+                          <a:solidFill>
+                            <a:srgbClr val="6E5D4E"/>
+                          </a:solidFill>
+                          <a:latin typeface="Arial"/>
+                        </a:defRPr>
+                      </a:pPr>
+                      <a:r>
+                        <a:t>32-bit CRC + Hex returned</a:t>
+                      </a:r>
+                    </a:p>
+                  </a:txBody>
+                  <a:tcPr>
+                    <a:solidFill>
+                      <a:srgbClr val="F3E6D6"/>
+                    </a:solidFill>
+                  </a:tcPr>
+                </a:tc>
+                <a:tc>
+                  <a:txBody>
+                    <a:bodyPr/>
+                    <a:lstStyle/>
+                    <a:p>
+                      <a:pPr algn="l">
+                        <a:defRPr sz="950">
+                          <a:solidFill>
+                            <a:srgbClr val="6E5D4E"/>
+                          </a:solidFill>
+                          <a:latin typeface="Arial"/>
+                        </a:defRPr>
+                      </a:pPr>
+                      <a:r>
+                        <a:t>0x367B4724 displayed</a:t>
+                      </a:r>
+                    </a:p>
+                  </a:txBody>
+                  <a:tcPr>
+                    <a:solidFill>
+                      <a:srgbClr val="F3E6D6"/>
+                    </a:solidFill>
+                  </a:tcPr>
+                </a:tc>
+                <a:tc>
+                  <a:txBody>
+                    <a:bodyPr/>
+                    <a:lstStyle/>
+                    <a:p>
+                      <a:pPr algn="l">
+                        <a:defRPr sz="950">
+                          <a:solidFill>
+                            <a:srgbClr val="6E5D4E"/>
+                          </a:solidFill>
+                          <a:latin typeface="Arial"/>
+                        </a:defRPr>
+                      </a:pPr>
+                      <a:r>
+                        <a:t>PASS</a:t>
+                      </a:r>
+                    </a:p>
+                  </a:txBody>
+                  <a:tcPr>
+                    <a:solidFill>
+                      <a:srgbClr val="F3E6D6"/>
+                    </a:solidFill>
+                  </a:tcPr>
+                </a:tc>
+              </a:tr>
+              <a:tr h="548640">
+                <a:tc>
+                  <a:txBody>
+                    <a:bodyPr/>
+                    <a:lstStyle/>
+                    <a:p>
+                      <a:pPr algn="l">
+                        <a:defRPr sz="950">
+                          <a:solidFill>
+                            <a:srgbClr val="6E5D4E"/>
+                          </a:solidFill>
+                          <a:latin typeface="Arial"/>
+                        </a:defRPr>
+                      </a:pPr>
+                      <a:r>
+                        <a:t>TC-03</a:t>
+                      </a:r>
+                    </a:p>
+                  </a:txBody>
+                  <a:tcPr>
+                    <a:solidFill>
+                      <a:srgbClr val="FFFFFF"/>
+                    </a:solidFill>
+                  </a:tcPr>
+                </a:tc>
+                <a:tc>
+                  <a:txBody>
+                    <a:bodyPr/>
+                    <a:lstStyle/>
+                    <a:p>
+                      <a:pPr algn="l">
+                        <a:defRPr sz="950">
+                          <a:solidFill>
+                            <a:srgbClr val="6E5D4E"/>
+                          </a:solidFill>
+                          <a:latin typeface="Arial"/>
+                        </a:defRPr>
+                      </a:pPr>
+                      <a:r>
+                        <a:t>File: Report_01_Turbine.log</a:t>
+                      </a:r>
+                    </a:p>
+                  </a:txBody>
+                  <a:tcPr>
+                    <a:solidFill>
+                      <a:srgbClr val="FFFFFF"/>
+                    </a:solidFill>
+                  </a:tcPr>
+                </a:tc>
+                <a:tc>
+                  <a:txBody>
+                    <a:bodyPr/>
+                    <a:lstStyle/>
+                    <a:p>
+                      <a:pPr algn="l">
+                        <a:defRPr sz="950">
+                          <a:solidFill>
+                            <a:srgbClr val="6E5D4E"/>
+                          </a:solidFill>
+                          <a:latin typeface="Arial"/>
+                        </a:defRPr>
+                      </a:pPr>
+                      <a:r>
+                        <a:t>File Upload CRC</a:t>
+                      </a:r>
+                    </a:p>
+                  </a:txBody>
+                  <a:tcPr>
+                    <a:solidFill>
+                      <a:srgbClr val="FFFFFF"/>
+                    </a:solidFill>
+                  </a:tcPr>
+                </a:tc>
+                <a:tc>
+                  <a:txBody>
+                    <a:bodyPr/>
+                    <a:lstStyle/>
+                    <a:p>
+                      <a:pPr algn="l">
+                        <a:defRPr sz="950">
+                          <a:solidFill>
+                            <a:srgbClr val="6E5D4E"/>
+                          </a:solidFill>
+                          <a:latin typeface="Arial"/>
+                        </a:defRPr>
+                      </a:pPr>
+                      <a:r>
+                        <a:t>Complete file CRC computed</a:t>
+                      </a:r>
+                    </a:p>
+                  </a:txBody>
+                  <a:tcPr>
+                    <a:solidFill>
+                      <a:srgbClr val="FFFFFF"/>
+                    </a:solidFill>
+                  </a:tcPr>
+                </a:tc>
+                <a:tc>
+                  <a:txBody>
+                    <a:bodyPr/>
+                    <a:lstStyle/>
+                    <a:p>
+                      <a:pPr algn="l">
+                        <a:defRPr sz="950">
+                          <a:solidFill>
+                            <a:srgbClr val="6E5D4E"/>
+                          </a:solidFill>
+                          <a:latin typeface="Arial"/>
+                        </a:defRPr>
+                      </a:pPr>
+                      <a:r>
+                        <a:t>Steps 1-5 displayed</a:t>
+                      </a:r>
+                    </a:p>
+                  </a:txBody>
+                  <a:tcPr>
+                    <a:solidFill>
+                      <a:srgbClr val="FFFFFF"/>
+                    </a:solidFill>
+                  </a:tcPr>
+                </a:tc>
+                <a:tc>
+                  <a:txBody>
+                    <a:bodyPr/>
+                    <a:lstStyle/>
+                    <a:p>
+                      <a:pPr algn="l">
+                        <a:defRPr sz="950">
+                          <a:solidFill>
+                            <a:srgbClr val="6E5D4E"/>
+                          </a:solidFill>
+                          <a:latin typeface="Arial"/>
+                        </a:defRPr>
+                      </a:pPr>
+                      <a:r>
+                        <a:t>PASS</a:t>
+                      </a:r>
+                    </a:p>
+                  </a:txBody>
+                  <a:tcPr>
+                    <a:solidFill>
+                      <a:srgbClr val="FFFFFF"/>
+                    </a:solidFill>
+                  </a:tcPr>
+                </a:tc>
+              </a:tr>
+              <a:tr h="548640">
+                <a:tc>
+                  <a:txBody>
+                    <a:bodyPr/>
+                    <a:lstStyle/>
+                    <a:p>
+                      <a:pPr algn="l">
+                        <a:defRPr sz="950">
+                          <a:solidFill>
+                            <a:srgbClr val="6E5D4E"/>
+                          </a:solidFill>
+                          <a:latin typeface="Arial"/>
+                        </a:defRPr>
+                      </a:pPr>
+                      <a:r>
+                        <a:t>TC-04</a:t>
+                      </a:r>
+                    </a:p>
+                  </a:txBody>
+                  <a:tcPr>
+                    <a:solidFill>
+                      <a:srgbClr val="F3E6D6"/>
+                    </a:solidFill>
+                  </a:tcPr>
+                </a:tc>
+                <a:tc>
+                  <a:txBody>
+                    <a:bodyPr/>
+                    <a:lstStyle/>
+                    <a:p>
+                      <a:pPr algn="l">
+                        <a:defRPr sz="950">
+                          <a:solidFill>
+                            <a:srgbClr val="6E5D4E"/>
+                          </a:solidFill>
+                          <a:latin typeface="Arial"/>
+                        </a:defRPr>
+                      </a:pPr>
+                      <a:r>
+                        <a:t>Modified: RPM:3450 -&gt; RPM:3451</a:t>
+                      </a:r>
+                    </a:p>
+                  </a:txBody>
+                  <a:tcPr>
+                    <a:solidFill>
+                      <a:srgbClr val="F3E6D6"/>
+                    </a:solidFill>
+                  </a:tcPr>
+                </a:tc>
+                <a:tc>
+                  <a:txBody>
+                    <a:bodyPr/>
+                    <a:lstStyle/>
+                    <a:p>
+                      <a:pPr algn="l">
+                        <a:defRPr sz="950">
+                          <a:solidFill>
+                            <a:srgbClr val="6E5D4E"/>
+                          </a:solidFill>
+                          <a:latin typeface="Arial"/>
+                        </a:defRPr>
+                      </a:pPr>
+                      <a:r>
+                        <a:t>Error Detection</a:t>
+                      </a:r>
+                    </a:p>
+                  </a:txBody>
+                  <a:tcPr>
+                    <a:solidFill>
+                      <a:srgbClr val="F3E6D6"/>
+                    </a:solidFill>
+                  </a:tcPr>
+                </a:tc>
+                <a:tc>
+                  <a:txBody>
+                    <a:bodyPr/>
+                    <a:lstStyle/>
+                    <a:p>
+                      <a:pPr algn="l">
+                        <a:defRPr sz="950">
+                          <a:solidFill>
+                            <a:srgbClr val="6E5D4E"/>
+                          </a:solidFill>
+                          <a:latin typeface="Arial"/>
+                        </a:defRPr>
+                      </a:pPr>
+                      <a:r>
+                        <a:t>Non-zero Remainder -&gt; REJECT</a:t>
+                      </a:r>
+                    </a:p>
+                  </a:txBody>
+                  <a:tcPr>
+                    <a:solidFill>
+                      <a:srgbClr val="F3E6D6"/>
+                    </a:solidFill>
+                  </a:tcPr>
+                </a:tc>
+                <a:tc>
+                  <a:txBody>
+                    <a:bodyPr/>
+                    <a:lstStyle/>
+                    <a:p>
+                      <a:pPr algn="l">
+                        <a:defRPr sz="950">
+                          <a:solidFill>
+                            <a:srgbClr val="6E5D4E"/>
+                          </a:solidFill>
+                          <a:latin typeface="Arial"/>
+                        </a:defRPr>
+                      </a:pPr>
+                      <a:r>
+                        <a:t>Remainder != 0 (REJECT)</a:t>
+                      </a:r>
+                    </a:p>
+                  </a:txBody>
+                  <a:tcPr>
+                    <a:solidFill>
+                      <a:srgbClr val="F3E6D6"/>
+                    </a:solidFill>
+                  </a:tcPr>
+                </a:tc>
+                <a:tc>
+                  <a:txBody>
+                    <a:bodyPr/>
+                    <a:lstStyle/>
+                    <a:p>
+                      <a:pPr algn="l">
+                        <a:defRPr sz="950">
+                          <a:solidFill>
+                            <a:srgbClr val="6E5D4E"/>
+                          </a:solidFill>
+                          <a:latin typeface="Arial"/>
+                        </a:defRPr>
+                      </a:pPr>
+                      <a:r>
+                        <a:t>PASS</a:t>
+                      </a:r>
+                    </a:p>
+                  </a:txBody>
+                  <a:tcPr>
+                    <a:solidFill>
+                      <a:srgbClr val="F3E6D6"/>
+                    </a:solidFill>
+                  </a:tcPr>
+                </a:tc>
+              </a:tr>
+              <a:tr h="548640">
+                <a:tc>
+                  <a:txBody>
+                    <a:bodyPr/>
+                    <a:lstStyle/>
+                    <a:p>
+                      <a:pPr algn="l">
+                        <a:defRPr sz="950">
+                          <a:solidFill>
+                            <a:srgbClr val="6E5D4E"/>
+                          </a:solidFill>
+                          <a:latin typeface="Arial"/>
+                        </a:defRPr>
+                      </a:pPr>
+                      <a:r>
+                        <a:t>TC-05</a:t>
+                      </a:r>
+                    </a:p>
+                  </a:txBody>
+                  <a:tcPr>
+                    <a:solidFill>
+                      <a:srgbClr val="FFFFFF"/>
+                    </a:solidFill>
+                  </a:tcPr>
+                </a:tc>
+                <a:tc>
+                  <a:txBody>
+                    <a:bodyPr/>
+                    <a:lstStyle/>
+                    <a:p>
+                      <a:pPr algn="l">
+                        <a:defRPr sz="950">
+                          <a:solidFill>
+                            <a:srgbClr val="6E5D4E"/>
+                          </a:solidFill>
+                          <a:latin typeface="Arial"/>
+                        </a:defRPr>
+                      </a:pPr>
+                      <a:r>
+                        <a:t>Unmodified: Valid Log + CRC</a:t>
+                      </a:r>
+                    </a:p>
+                  </a:txBody>
+                  <a:tcPr>
+                    <a:solidFill>
+                      <a:srgbClr val="FFFFFF"/>
+                    </a:solidFill>
+                  </a:tcPr>
+                </a:tc>
+                <a:tc>
+                  <a:txBody>
+                    <a:bodyPr/>
+                    <a:lstStyle/>
+                    <a:p>
+                      <a:pPr algn="l">
+                        <a:defRPr sz="950">
+                          <a:solidFill>
+                            <a:srgbClr val="6E5D4E"/>
+                          </a:solidFill>
+                          <a:latin typeface="Arial"/>
+                        </a:defRPr>
+                      </a:pPr>
+                      <a:r>
+                        <a:t>Verification Check</a:t>
+                      </a:r>
+                    </a:p>
+                  </a:txBody>
+                  <a:tcPr>
+                    <a:solidFill>
+                      <a:srgbClr val="FFFFFF"/>
+                    </a:solidFill>
+                  </a:tcPr>
+                </a:tc>
+                <a:tc>
+                  <a:txBody>
+                    <a:bodyPr/>
+                    <a:lstStyle/>
+                    <a:p>
+                      <a:pPr algn="l">
+                        <a:defRPr sz="950">
+                          <a:solidFill>
+                            <a:srgbClr val="6E5D4E"/>
+                          </a:solidFill>
+                          <a:latin typeface="Arial"/>
+                        </a:defRPr>
+                      </a:pPr>
+                      <a:r>
+                        <a:t>Remainder = 0^32 -&gt; ACCEPT</a:t>
+                      </a:r>
+                    </a:p>
+                  </a:txBody>
+                  <a:tcPr>
+                    <a:solidFill>
+                      <a:srgbClr val="FFFFFF"/>
+                    </a:solidFill>
+                  </a:tcPr>
+                </a:tc>
+                <a:tc>
+                  <a:txBody>
+                    <a:bodyPr/>
+                    <a:lstStyle/>
+                    <a:p>
+                      <a:pPr algn="l">
+                        <a:defRPr sz="950">
+                          <a:solidFill>
+                            <a:srgbClr val="6E5D4E"/>
+                          </a:solidFill>
+                          <a:latin typeface="Arial"/>
+                        </a:defRPr>
+                      </a:pPr>
+                      <a:r>
+                        <a:t>Remainder = 0 (ACCEPT)</a:t>
+                      </a:r>
+                    </a:p>
+                  </a:txBody>
+                  <a:tcPr>
+                    <a:solidFill>
+                      <a:srgbClr val="FFFFFF"/>
+                    </a:solidFill>
+                  </a:tcPr>
+                </a:tc>
+                <a:tc>
+                  <a:txBody>
+                    <a:bodyPr/>
+                    <a:lstStyle/>
+                    <a:p>
+                      <a:pPr algn="l">
+                        <a:defRPr sz="950">
+                          <a:solidFill>
+                            <a:srgbClr val="6E5D4E"/>
+                          </a:solidFill>
+                          <a:latin typeface="Arial"/>
+                        </a:defRPr>
+                      </a:pPr>
+                      <a:r>
+                        <a:t>PASS</a:t>
+                      </a:r>
+                    </a:p>
+                  </a:txBody>
+                  <a:tcPr>
+                    <a:solidFill>
+                      <a:srgbClr val="FFFFFF"/>
+                    </a:solidFill>
+                  </a:tcPr>
+                </a:tc>
+              </a:tr>
+            </a:tbl>
+          </a:graphicData>
+        </a:graphic>
+      </p:graphicFrame>
+      <p:sp>
+        <p:nvSpPr>
+          <p:cNvPr id="8" name="Rounded Rectangle 7"/>
           <p:cNvSpPr/>
           <p:nvPr/>
         </p:nvSpPr>
         <p:spPr>
           <a:xfrm>
-            <a:off x="731520" y="1371600"/>
-            <a:ext cx="3383280" cy="4754880"/>
+            <a:off x="731520" y="4754880"/>
+            <a:ext cx="10698480" cy="1554480"/>
           </a:xfrm>
           <a:prstGeom prst="roundRect">
             <a:avLst/>
           </a:prstGeom>
           <a:solidFill>
-            <a:srgbClr val="2D0F14"/>
+            <a:srgbClr val="EDF5E8"/>
           </a:solidFill>
-          <a:ln w="15240">
+          <a:ln w="13970">
             <a:solidFill>
-              <a:srgbClr val="991B1B"/>
+              <a:srgbClr val="B5D8AC"/>
             </a:solidFill>
           </a:ln>
         </p:spPr>
@@ -7218,14 +8148,14 @@
       </p:sp>
       <p:sp>
         <p:nvSpPr>
-          <p:cNvPr id="8" name="TextBox 7"/>
+          <p:cNvPr id="9" name="TextBox 8"/>
           <p:cNvSpPr txBox="1"/>
           <p:nvPr/>
         </p:nvSpPr>
         <p:spPr>
           <a:xfrm>
-            <a:off x="914400" y="1554480"/>
-            <a:ext cx="3017520" cy="4389120"/>
+            <a:off x="877824" y="4882896"/>
+            <a:ext cx="10405872" cy="1298448"/>
           </a:xfrm>
           <a:prstGeom prst="rect">
             <a:avLst/>
@@ -7242,465 +8172,63 @@
               <a:spcAft>
                 <a:spcPts val="200"/>
               </a:spcAft>
-              <a:defRPr sz="900" b="1">
-                <a:solidFill>
-                  <a:srgbClr val="94A3B8"/>
-                </a:solidFill>
-              </a:defRPr>
-            </a:pPr>
-            <a:r>
-              <a:t>LEGACY SCHEME</a:t>
-            </a:r>
-          </a:p>
-          <a:p>
-            <a:pPr>
-              <a:spcAft>
-                <a:spcPts val="800"/>
-              </a:spcAft>
-              <a:defRPr sz="1500" b="1">
-                <a:solidFill>
-                  <a:srgbClr val="F87171"/>
-                </a:solidFill>
-              </a:defRPr>
-            </a:pPr>
-            <a:r>
-              <a:t>Parity Check (1-bit)</a:t>
-            </a:r>
-          </a:p>
-          <a:p>
-            <a:pPr>
-              <a:spcAft>
-                <a:spcPts val="400"/>
-              </a:spcAft>
-              <a:defRPr sz="1150">
-                <a:solidFill>
-                  <a:srgbClr val="E2E8F0"/>
-                </a:solidFill>
-              </a:defRPr>
-            </a:pPr>
-            <a:r>
-              <a:t>• Single-Bit Errors: 100% Detected</a:t>
-            </a:r>
-          </a:p>
-          <a:p>
-            <a:pPr>
-              <a:spcAft>
-                <a:spcPts val="400"/>
-              </a:spcAft>
-              <a:defRPr sz="1150">
-                <a:solidFill>
-                  <a:srgbClr val="E2E8F0"/>
-                </a:solidFill>
-              </a:defRPr>
-            </a:pPr>
-            <a:r>
-              <a:t>• Double-Bit Errors: 0% (Fails)</a:t>
-            </a:r>
-          </a:p>
-          <a:p>
-            <a:pPr>
-              <a:spcAft>
-                <a:spcPts val="400"/>
-              </a:spcAft>
-              <a:defRPr sz="1150">
-                <a:solidFill>
-                  <a:srgbClr val="E2E8F0"/>
-                </a:solidFill>
-              </a:defRPr>
-            </a:pPr>
-            <a:r>
-              <a:t>• Even Number Errors: Completely Blind</a:t>
-            </a:r>
-          </a:p>
-          <a:p>
-            <a:pPr>
-              <a:spcAft>
-                <a:spcPts val="400"/>
-              </a:spcAft>
-              <a:defRPr sz="1150">
-                <a:solidFill>
-                  <a:srgbClr val="E2E8F0"/>
-                </a:solidFill>
-              </a:defRPr>
-            </a:pPr>
-            <a:r>
-              <a:t>• Burst Errors: Unusable</a:t>
-            </a:r>
-          </a:p>
-          <a:p>
-            <a:pPr>
-              <a:spcAft>
-                <a:spcPts val="400"/>
-              </a:spcAft>
-              <a:defRPr sz="1150">
-                <a:solidFill>
-                  <a:srgbClr val="E2E8F0"/>
-                </a:solidFill>
-              </a:defRPr>
-            </a:pPr>
-            <a:r>
-              <a:t>• Industrial Rating: REJECTED</a:t>
-            </a:r>
-          </a:p>
-        </p:txBody>
-      </p:sp>
-      <p:sp>
-        <p:nvSpPr>
-          <p:cNvPr id="9" name="Rounded Rectangle 8"/>
-          <p:cNvSpPr/>
-          <p:nvPr/>
-        </p:nvSpPr>
-        <p:spPr>
-          <a:xfrm>
-            <a:off x="4389120" y="1371600"/>
-            <a:ext cx="3383280" cy="4754880"/>
-          </a:xfrm>
-          <a:prstGeom prst="roundRect">
-            <a:avLst/>
-          </a:prstGeom>
-          <a:solidFill>
-            <a:srgbClr val="162032"/>
-          </a:solidFill>
-          <a:ln w="15240">
-            <a:solidFill>
-              <a:srgbClr val="24344D"/>
-            </a:solidFill>
-          </a:ln>
-        </p:spPr>
-        <p:style>
-          <a:lnRef idx="1">
-            <a:schemeClr val="accent1"/>
-          </a:lnRef>
-          <a:fillRef idx="3">
-            <a:schemeClr val="accent1"/>
-          </a:fillRef>
-          <a:effectRef idx="2">
-            <a:schemeClr val="accent1"/>
-          </a:effectRef>
-          <a:fontRef idx="minor">
-            <a:schemeClr val="lt1"/>
-          </a:fontRef>
-        </p:style>
-        <p:txBody>
-          <a:bodyPr rtlCol="0" anchor="ctr"/>
-          <a:lstStyle/>
-          <a:p>
-            <a:pPr algn="ctr"/>
-          </a:p>
-        </p:txBody>
-      </p:sp>
-      <p:sp>
-        <p:nvSpPr>
-          <p:cNvPr id="10" name="TextBox 9"/>
-          <p:cNvSpPr txBox="1"/>
-          <p:nvPr/>
-        </p:nvSpPr>
-        <p:spPr>
-          <a:xfrm>
-            <a:off x="4572000" y="1554480"/>
-            <a:ext cx="3017520" cy="4389120"/>
-          </a:xfrm>
-          <a:prstGeom prst="rect">
-            <a:avLst/>
-          </a:prstGeom>
-          <a:noFill/>
-        </p:spPr>
-        <p:txBody>
-          <a:bodyPr wrap="square">
-            <a:spAutoFit/>
-          </a:bodyPr>
-          <a:lstStyle/>
-          <a:p>
-            <a:pPr>
-              <a:spcAft>
-                <a:spcPts val="200"/>
-              </a:spcAft>
-              <a:defRPr sz="900" b="1">
-                <a:solidFill>
-                  <a:srgbClr val="94A3B8"/>
-                </a:solidFill>
-              </a:defRPr>
-            </a:pPr>
-            <a:r>
-              <a:t>BASIC CHECKSUM</a:t>
-            </a:r>
-          </a:p>
-          <a:p>
-            <a:pPr>
-              <a:spcAft>
-                <a:spcPts val="800"/>
-              </a:spcAft>
-              <a:defRPr sz="1500" b="1">
-                <a:solidFill>
-                  <a:srgbClr val="38BDF8"/>
-                </a:solidFill>
-              </a:defRPr>
-            </a:pPr>
-            <a:r>
-              <a:t>Arithmetic Checksum</a:t>
-            </a:r>
-          </a:p>
-          <a:p>
-            <a:pPr>
-              <a:spcAft>
-                <a:spcPts val="400"/>
-              </a:spcAft>
-              <a:defRPr sz="1150">
-                <a:solidFill>
-                  <a:srgbClr val="E2E8F0"/>
-                </a:solidFill>
-              </a:defRPr>
-            </a:pPr>
-            <a:r>
-              <a:t>• Arithmetic Summing: Word-by-word</a:t>
-            </a:r>
-          </a:p>
-          <a:p>
-            <a:pPr>
-              <a:spcAft>
-                <a:spcPts val="400"/>
-              </a:spcAft>
-              <a:defRPr sz="1150">
-                <a:solidFill>
-                  <a:srgbClr val="E2E8F0"/>
-                </a:solidFill>
-              </a:defRPr>
-            </a:pPr>
-            <a:r>
-              <a:t>• Compensating Errors: Fails when opposite bits cancel</a:t>
-            </a:r>
-          </a:p>
-          <a:p>
-            <a:pPr>
-              <a:spcAft>
-                <a:spcPts val="400"/>
-              </a:spcAft>
-              <a:defRPr sz="1150">
-                <a:solidFill>
-                  <a:srgbClr val="E2E8F0"/>
-                </a:solidFill>
-              </a:defRPr>
-            </a:pPr>
-            <a:r>
-              <a:t>• Burst Error Coverage: Weak (&lt; 50%)</a:t>
-            </a:r>
-          </a:p>
-          <a:p>
-            <a:pPr>
-              <a:spcAft>
-                <a:spcPts val="400"/>
-              </a:spcAft>
-              <a:defRPr sz="1150">
-                <a:solidFill>
-                  <a:srgbClr val="E2E8F0"/>
-                </a:solidFill>
-              </a:defRPr>
-            </a:pPr>
-            <a:r>
-              <a:t>• Overhead: 16 to 32 bits</a:t>
-            </a:r>
-          </a:p>
-          <a:p>
-            <a:pPr>
-              <a:spcAft>
-                <a:spcPts val="400"/>
-              </a:spcAft>
-              <a:defRPr sz="1150">
-                <a:solidFill>
-                  <a:srgbClr val="E2E8F0"/>
-                </a:solidFill>
-              </a:defRPr>
-            </a:pPr>
-            <a:r>
-              <a:t>• Industrial Rating: INSUFFICIENT</a:t>
-            </a:r>
-          </a:p>
-        </p:txBody>
-      </p:sp>
-      <p:sp>
-        <p:nvSpPr>
-          <p:cNvPr id="11" name="Rounded Rectangle 10"/>
-          <p:cNvSpPr/>
-          <p:nvPr/>
-        </p:nvSpPr>
-        <p:spPr>
-          <a:xfrm>
-            <a:off x="8046720" y="1371600"/>
-            <a:ext cx="3383280" cy="4754880"/>
-          </a:xfrm>
-          <a:prstGeom prst="roundRect">
-            <a:avLst/>
-          </a:prstGeom>
-          <a:solidFill>
-            <a:srgbClr val="0A2819"/>
-          </a:solidFill>
-          <a:ln w="15240">
-            <a:solidFill>
-              <a:srgbClr val="166534"/>
-            </a:solidFill>
-          </a:ln>
-        </p:spPr>
-        <p:style>
-          <a:lnRef idx="1">
-            <a:schemeClr val="accent1"/>
-          </a:lnRef>
-          <a:fillRef idx="3">
-            <a:schemeClr val="accent1"/>
-          </a:fillRef>
-          <a:effectRef idx="2">
-            <a:schemeClr val="accent1"/>
-          </a:effectRef>
-          <a:fontRef idx="minor">
-            <a:schemeClr val="lt1"/>
-          </a:fontRef>
-        </p:style>
-        <p:txBody>
-          <a:bodyPr rtlCol="0" anchor="ctr"/>
-          <a:lstStyle/>
-          <a:p>
-            <a:pPr algn="ctr"/>
-          </a:p>
-        </p:txBody>
-      </p:sp>
-      <p:sp>
-        <p:nvSpPr>
-          <p:cNvPr id="12" name="TextBox 11"/>
-          <p:cNvSpPr txBox="1"/>
-          <p:nvPr/>
-        </p:nvSpPr>
-        <p:spPr>
-          <a:xfrm>
-            <a:off x="8229600" y="1554480"/>
-            <a:ext cx="3017520" cy="4389120"/>
-          </a:xfrm>
-          <a:prstGeom prst="rect">
-            <a:avLst/>
-          </a:prstGeom>
-          <a:noFill/>
-        </p:spPr>
-        <p:txBody>
-          <a:bodyPr wrap="square">
-            <a:spAutoFit/>
-          </a:bodyPr>
-          <a:lstStyle/>
-          <a:p>
-            <a:pPr>
-              <a:spcAft>
-                <a:spcPts val="200"/>
-              </a:spcAft>
-              <a:defRPr sz="900" b="1">
-                <a:solidFill>
-                  <a:srgbClr val="94A3B8"/>
-                </a:solidFill>
-              </a:defRPr>
-            </a:pPr>
-            <a:r>
-              <a:t>CRC-32 ADVANTAGE</a:t>
-            </a:r>
-          </a:p>
-          <a:p>
-            <a:pPr>
-              <a:spcAft>
-                <a:spcPts val="800"/>
-              </a:spcAft>
-              <a:defRPr sz="1500" b="1">
-                <a:solidFill>
-                  <a:srgbClr val="4ADE80"/>
-                </a:solidFill>
-              </a:defRPr>
-            </a:pPr>
-            <a:r>
-              <a:t>CRC-32 Modulo-2</a:t>
-            </a:r>
-          </a:p>
-          <a:p>
-            <a:pPr>
-              <a:spcAft>
-                <a:spcPts val="400"/>
-              </a:spcAft>
-              <a:defRPr sz="1150">
-                <a:solidFill>
-                  <a:srgbClr val="E2E8F0"/>
-                </a:solidFill>
-              </a:defRPr>
-            </a:pPr>
-            <a:r>
-              <a:t>• Single-Bit Errors: 100%</a:t>
-            </a:r>
-          </a:p>
-          <a:p>
-            <a:pPr>
-              <a:spcAft>
-                <a:spcPts val="400"/>
-              </a:spcAft>
-              <a:defRPr sz="1150">
-                <a:solidFill>
-                  <a:srgbClr val="E2E8F0"/>
-                </a:solidFill>
-              </a:defRPr>
-            </a:pPr>
-            <a:r>
-              <a:t>• Double-Bit Errors: 100%</a:t>
-            </a:r>
-          </a:p>
-          <a:p>
-            <a:pPr>
-              <a:spcAft>
-                <a:spcPts val="400"/>
-              </a:spcAft>
-              <a:defRPr sz="1150">
-                <a:solidFill>
-                  <a:srgbClr val="E2E8F0"/>
-                </a:solidFill>
-              </a:defRPr>
-            </a:pPr>
-            <a:r>
-              <a:t>• Odd Number of Errors: 100%</a:t>
-            </a:r>
-          </a:p>
-          <a:p>
-            <a:pPr>
-              <a:spcAft>
-                <a:spcPts val="400"/>
-              </a:spcAft>
-              <a:defRPr sz="1150">
-                <a:solidFill>
-                  <a:srgbClr val="E2E8F0"/>
-                </a:solidFill>
-              </a:defRPr>
-            </a:pPr>
-            <a:r>
-              <a:t>• Burst Errors &lt;= 32 bits: 100%</a:t>
-            </a:r>
-          </a:p>
-          <a:p>
-            <a:pPr>
-              <a:spcAft>
-                <a:spcPts val="400"/>
-              </a:spcAft>
-              <a:defRPr sz="1150">
-                <a:solidFill>
-                  <a:srgbClr val="E2E8F0"/>
-                </a:solidFill>
-              </a:defRPr>
-            </a:pPr>
-            <a:r>
-              <a:t>• Bursts &gt; 32 bits: &gt; 99.99999997%</a:t>
-            </a:r>
-          </a:p>
-          <a:p>
-            <a:pPr>
-              <a:spcAft>
-                <a:spcPts val="400"/>
-              </a:spcAft>
-              <a:defRPr sz="1150">
-                <a:solidFill>
-                  <a:srgbClr val="E2E8F0"/>
-                </a:solidFill>
-              </a:defRPr>
-            </a:pPr>
-            <a:r>
-              <a:t>• Industrial Rating: GOLD STANDARD</a:t>
+              <a:defRPr sz="850" b="1">
+                <a:solidFill>
+                  <a:srgbClr val="6E5D4E"/>
+                </a:solidFill>
+                <a:latin typeface="Arial"/>
+              </a:defRPr>
+            </a:pPr>
+            <a:r>
+              <a:t>TEST COVERAGE SUMMARY</a:t>
+            </a:r>
+          </a:p>
+          <a:p>
+            <a:pPr>
+              <a:spcAft>
+                <a:spcPts val="500"/>
+              </a:spcAft>
+              <a:defRPr sz="1350" b="1">
+                <a:solidFill>
+                  <a:srgbClr val="275222"/>
+                </a:solidFill>
+                <a:latin typeface="Arial"/>
+              </a:defRPr>
+            </a:pPr>
+            <a:r>
+              <a:t>Mandatory Test Requirements Verified (Guideline Section 6)</a:t>
+            </a:r>
+          </a:p>
+          <a:p>
+            <a:pPr>
+              <a:spcAft>
+                <a:spcPts val="300"/>
+              </a:spcAft>
+              <a:defRPr sz="1050">
+                <a:solidFill>
+                  <a:srgbClr val="6E5D4E"/>
+                </a:solidFill>
+                <a:latin typeface="Arial"/>
+              </a:defRPr>
+            </a:pPr>
+            <a:r>
+              <a:t>✓ Valid binary bitstream input tested  |  ✓ UTF-8 string telemetry tested  |  ✓ Real industrial .log/.txt files tested</a:t>
+            </a:r>
+          </a:p>
+          <a:p>
+            <a:pPr>
+              <a:spcAft>
+                <a:spcPts val="300"/>
+              </a:spcAft>
+              <a:defRPr sz="1050">
+                <a:solidFill>
+                  <a:srgbClr val="6E5D4E"/>
+                </a:solidFill>
+                <a:latin typeface="Arial"/>
+              </a:defRPr>
+            </a:pPr>
+            <a:r>
+              <a:t>✓ Single-bit flipped error detected (REJECT)  |  ✓ Unmodified original log verified authentic (ACCEPT)</a:t>
             </a:r>
           </a:p>
         </p:txBody>
@@ -7738,7 +8266,7 @@
             <a:avLst/>
           </a:prstGeom>
           <a:solidFill>
-            <a:srgbClr val="0B0F19"/>
+            <a:srgbClr val="FFF8E7"/>
           </a:solidFill>
           <a:ln>
             <a:noFill/>
@@ -7774,7 +8302,7 @@
         </p:nvSpPr>
         <p:spPr>
           <a:xfrm>
-            <a:off x="731520" y="365760"/>
+            <a:off x="731520" y="320040"/>
             <a:ext cx="8229600" cy="228600"/>
           </a:xfrm>
           <a:prstGeom prst="rect">
@@ -7789,14 +8317,15 @@
           <a:lstStyle/>
           <a:p>
             <a:pPr>
-              <a:defRPr sz="1000" b="1">
-                <a:solidFill>
-                  <a:srgbClr val="38BDF8"/>
-                </a:solidFill>
-              </a:defRPr>
-            </a:pPr>
-            <a:r>
-              <a:t>BACKEND ARCHITECTURE</a:t>
+              <a:defRPr sz="950" b="1">
+                <a:solidFill>
+                  <a:srgbClr val="6E5D4E"/>
+                </a:solidFill>
+                <a:latin typeface="Arial"/>
+              </a:defRPr>
+            </a:pPr>
+            <a:r>
+              <a:t>SLIDE 7 • ENGINEERING CHALLENGES</a:t>
             </a:r>
           </a:p>
         </p:txBody>
@@ -7809,8 +8338,8 @@
         </p:nvSpPr>
         <p:spPr>
           <a:xfrm>
-            <a:off x="731520" y="594360"/>
-            <a:ext cx="8686800" cy="548640"/>
+            <a:off x="731520" y="530352"/>
+            <a:ext cx="8961120" cy="548640"/>
           </a:xfrm>
           <a:prstGeom prst="rect">
             <a:avLst/>
@@ -7824,14 +8353,15 @@
           <a:lstStyle/>
           <a:p>
             <a:pPr>
-              <a:defRPr sz="2200" b="1">
-                <a:solidFill>
-                  <a:srgbClr val="FFFFFF"/>
-                </a:solidFill>
-              </a:defRPr>
-            </a:pPr>
-            <a:r>
-              <a:t>Flask REST Architecture &amp; Observability</a:t>
+              <a:defRPr sz="2100" b="1">
+                <a:solidFill>
+                  <a:srgbClr val="241E17"/>
+                </a:solidFill>
+                <a:latin typeface="Arial"/>
+              </a:defRPr>
+            </a:pPr>
+            <a:r>
+              <a:t>Errors &amp; Engineering Challenges Faced (Problem -&gt; Reason -&gt; Solution -&gt; Learning)</a:t>
             </a:r>
           </a:p>
         </p:txBody>
@@ -7844,18 +8374,18 @@
         </p:nvSpPr>
         <p:spPr>
           <a:xfrm>
-            <a:off x="10241280" y="411480"/>
-            <a:ext cx="1188720" cy="365760"/>
+            <a:off x="10241280" y="365760"/>
+            <a:ext cx="1188720" cy="347472"/>
           </a:xfrm>
           <a:prstGeom prst="roundRect">
             <a:avLst/>
           </a:prstGeom>
           <a:solidFill>
-            <a:srgbClr val="162032"/>
+            <a:srgbClr val="FFFFFF"/>
           </a:solidFill>
           <a:ln>
             <a:solidFill>
-              <a:srgbClr val="24344D"/>
+              <a:srgbClr val="E2D5C3"/>
             </a:solidFill>
           </a:ln>
         </p:spPr>
@@ -7889,8 +8419,8 @@
         </p:nvSpPr>
         <p:spPr>
           <a:xfrm>
-            <a:off x="10241280" y="411480"/>
-            <a:ext cx="1188720" cy="365760"/>
+            <a:off x="10241280" y="365760"/>
+            <a:ext cx="1188720" cy="347472"/>
           </a:xfrm>
           <a:prstGeom prst="rect">
             <a:avLst/>
@@ -7904,10 +8434,11 @@
           <a:lstStyle/>
           <a:p>
             <a:pPr algn="ctr">
-              <a:defRPr sz="1000" b="1">
-                <a:solidFill>
-                  <a:srgbClr val="94A3B8"/>
-                </a:solidFill>
+              <a:defRPr sz="950" b="1">
+                <a:solidFill>
+                  <a:srgbClr val="6E5D4E"/>
+                </a:solidFill>
+                <a:latin typeface="Arial"/>
               </a:defRPr>
             </a:pPr>
             <a:r>
@@ -7916,613 +8447,524 @@
           </a:p>
         </p:txBody>
       </p:sp>
-      <p:sp>
-        <p:nvSpPr>
-          <p:cNvPr id="7" name="Rounded Rectangle 6"/>
-          <p:cNvSpPr/>
+      <p:graphicFrame>
+        <p:nvGraphicFramePr>
+          <p:cNvPr id="7" name="Table 6"/>
+          <p:cNvGraphicFramePr>
+            <a:graphicFrameLocks noGrp="1"/>
+          </p:cNvGraphicFramePr>
           <p:nvPr/>
-        </p:nvSpPr>
-        <p:spPr>
-          <a:xfrm>
-            <a:off x="731520" y="1371600"/>
-            <a:ext cx="5120640" cy="4754880"/>
-          </a:xfrm>
-          <a:prstGeom prst="roundRect">
-            <a:avLst/>
-          </a:prstGeom>
-          <a:solidFill>
-            <a:srgbClr val="162032"/>
-          </a:solidFill>
-          <a:ln w="15240">
-            <a:solidFill>
-              <a:srgbClr val="24344D"/>
-            </a:solidFill>
-          </a:ln>
-        </p:spPr>
-        <p:style>
-          <a:lnRef idx="1">
-            <a:schemeClr val="accent1"/>
-          </a:lnRef>
-          <a:fillRef idx="3">
-            <a:schemeClr val="accent1"/>
-          </a:fillRef>
-          <a:effectRef idx="2">
-            <a:schemeClr val="accent1"/>
-          </a:effectRef>
-          <a:fontRef idx="minor">
-            <a:schemeClr val="lt1"/>
-          </a:fontRef>
-        </p:style>
-        <p:txBody>
-          <a:bodyPr rtlCol="0" anchor="ctr"/>
-          <a:lstStyle/>
-          <a:p>
-            <a:pPr algn="ctr"/>
-          </a:p>
-        </p:txBody>
-      </p:sp>
-      <p:sp>
-        <p:nvSpPr>
-          <p:cNvPr id="8" name="TextBox 7"/>
-          <p:cNvSpPr txBox="1"/>
-          <p:nvPr/>
-        </p:nvSpPr>
-        <p:spPr>
-          <a:xfrm>
-            <a:off x="914400" y="1554480"/>
-            <a:ext cx="4754880" cy="4389120"/>
-          </a:xfrm>
-          <a:prstGeom prst="rect">
-            <a:avLst/>
-          </a:prstGeom>
-          <a:noFill/>
-        </p:spPr>
-        <p:txBody>
-          <a:bodyPr wrap="square">
-            <a:spAutoFit/>
-          </a:bodyPr>
-          <a:lstStyle/>
-          <a:p>
-            <a:pPr>
-              <a:spcAft>
-                <a:spcPts val="200"/>
-              </a:spcAft>
-              <a:defRPr sz="900" b="1">
-                <a:solidFill>
-                  <a:srgbClr val="94A3B8"/>
-                </a:solidFill>
-              </a:defRPr>
-            </a:pPr>
-            <a:r>
-              <a:t>COMPUTE ENDPOINT</a:t>
-            </a:r>
-          </a:p>
-          <a:p>
-            <a:pPr>
-              <a:spcAft>
-                <a:spcPts val="800"/>
-              </a:spcAft>
-              <a:defRPr sz="1500" b="1">
-                <a:solidFill>
-                  <a:srgbClr val="38BDF8"/>
-                </a:solidFill>
-              </a:defRPr>
-            </a:pPr>
-            <a:r>
-              <a:t>POST /api/compute Contract</a:t>
-            </a:r>
-          </a:p>
-          <a:p>
-            <a:pPr>
-              <a:spcAft>
-                <a:spcPts val="400"/>
-              </a:spcAft>
-              <a:defRPr sz="1150">
-                <a:solidFill>
-                  <a:srgbClr val="E2E8F0"/>
-                </a:solidFill>
-              </a:defRPr>
-            </a:pPr>
-            <a:r>
-              <a:t>Request Body:</a:t>
-            </a:r>
-          </a:p>
-          <a:p>
-            <a:pPr>
-              <a:spcAft>
-                <a:spcPts val="400"/>
-              </a:spcAft>
-              <a:defRPr sz="1150">
-                <a:solidFill>
-                  <a:srgbClr val="E2E8F0"/>
-                </a:solidFill>
-              </a:defRPr>
-            </a:pPr>
-            <a:r>
-              <a:t>{"log": "[2026-09-14] TURBINE_01 RPM:3450"}</a:t>
-            </a:r>
-          </a:p>
-          <a:p>
-            <a:pPr>
-              <a:spcAft>
-                <a:spcPts val="400"/>
-              </a:spcAft>
-              <a:defRPr sz="1150">
-                <a:solidFill>
-                  <a:srgbClr val="E2E8F0"/>
-                </a:solidFill>
-              </a:defRPr>
-            </a:pPr>
-          </a:p>
-          <a:p>
-            <a:pPr>
-              <a:spcAft>
-                <a:spcPts val="400"/>
-              </a:spcAft>
-              <a:defRPr sz="1150">
-                <a:solidFill>
-                  <a:srgbClr val="E2E8F0"/>
-                </a:solidFill>
-              </a:defRPr>
-            </a:pPr>
-            <a:r>
-              <a:t>Response Payload (200 OK):</a:t>
-            </a:r>
-          </a:p>
-          <a:p>
-            <a:pPr>
-              <a:spcAft>
-                <a:spcPts val="400"/>
-              </a:spcAft>
-              <a:defRPr sz="1150">
-                <a:solidFill>
-                  <a:srgbClr val="E2E8F0"/>
-                </a:solidFill>
-              </a:defRPr>
-            </a:pPr>
-            <a:r>
-              <a:t>{</a:t>
-            </a:r>
-          </a:p>
-          <a:p>
-            <a:pPr>
-              <a:spcAft>
-                <a:spcPts val="400"/>
-              </a:spcAft>
-              <a:defRPr sz="1150">
-                <a:solidFill>
-                  <a:srgbClr val="E2E8F0"/>
-                </a:solidFill>
-              </a:defRPr>
-            </a:pPr>
-            <a:r>
-              <a:t>  "crc": "01001001011001001010011100011011",</a:t>
-            </a:r>
-          </a:p>
-          <a:p>
-            <a:pPr>
-              <a:spcAft>
-                <a:spcPts val="400"/>
-              </a:spcAft>
-              <a:defRPr sz="1150">
-                <a:solidFill>
-                  <a:srgbClr val="E2E8F0"/>
-                </a:solidFill>
-              </a:defRPr>
-            </a:pPr>
-            <a:r>
-              <a:t>  "divisor": "100001010100110001101111101000111",</a:t>
-            </a:r>
-          </a:p>
-          <a:p>
-            <a:pPr>
-              <a:spcAft>
-                <a:spcPts val="400"/>
-              </a:spcAft>
-              <a:defRPr sz="1150">
-                <a:solidFill>
-                  <a:srgbClr val="E2E8F0"/>
-                </a:solidFill>
-              </a:defRPr>
-            </a:pPr>
-            <a:r>
-              <a:t>  "steps": {</a:t>
-            </a:r>
-          </a:p>
-          <a:p>
-            <a:pPr>
-              <a:spcAft>
-                <a:spcPts val="400"/>
-              </a:spcAft>
-              <a:defRPr sz="1150">
-                <a:solidFill>
-                  <a:srgbClr val="E2E8F0"/>
-                </a:solidFill>
-              </a:defRPr>
-            </a:pPr>
-            <a:r>
-              <a:t>    "binary": "01011011...",</a:t>
-            </a:r>
-          </a:p>
-          <a:p>
-            <a:pPr>
-              <a:spcAft>
-                <a:spcPts val="400"/>
-              </a:spcAft>
-              <a:defRPr sz="1150">
-                <a:solidFill>
-                  <a:srgbClr val="E2E8F0"/>
-                </a:solidFill>
-              </a:defRPr>
-            </a:pPr>
-            <a:r>
-              <a:t>    "padded": "01011011...00000000...",</a:t>
-            </a:r>
-          </a:p>
-          <a:p>
-            <a:pPr>
-              <a:spcAft>
-                <a:spcPts val="400"/>
-              </a:spcAft>
-              <a:defRPr sz="1150">
-                <a:solidFill>
-                  <a:srgbClr val="E2E8F0"/>
-                </a:solidFill>
-              </a:defRPr>
-            </a:pPr>
-            <a:r>
-              <a:t>    "remainder": "0100100101100100...",</a:t>
-            </a:r>
-          </a:p>
-          <a:p>
-            <a:pPr>
-              <a:spcAft>
-                <a:spcPts val="400"/>
-              </a:spcAft>
-              <a:defRPr sz="1150">
-                <a:solidFill>
-                  <a:srgbClr val="E2E8F0"/>
-                </a:solidFill>
-              </a:defRPr>
-            </a:pPr>
-            <a:r>
-              <a:t>    "hex": "4964A71B"</a:t>
-            </a:r>
-          </a:p>
-          <a:p>
-            <a:pPr>
-              <a:spcAft>
-                <a:spcPts val="400"/>
-              </a:spcAft>
-              <a:defRPr sz="1150">
-                <a:solidFill>
-                  <a:srgbClr val="E2E8F0"/>
-                </a:solidFill>
-              </a:defRPr>
-            </a:pPr>
-            <a:r>
-              <a:t>  }</a:t>
-            </a:r>
-          </a:p>
-          <a:p>
-            <a:pPr>
-              <a:spcAft>
-                <a:spcPts val="400"/>
-              </a:spcAft>
-              <a:defRPr sz="1150">
-                <a:solidFill>
-                  <a:srgbClr val="E2E8F0"/>
-                </a:solidFill>
-              </a:defRPr>
-            </a:pPr>
-            <a:r>
-              <a:t>}</a:t>
-            </a:r>
-          </a:p>
-        </p:txBody>
-      </p:sp>
-      <p:sp>
-        <p:nvSpPr>
-          <p:cNvPr id="9" name="Rounded Rectangle 8"/>
-          <p:cNvSpPr/>
-          <p:nvPr/>
-        </p:nvSpPr>
-        <p:spPr>
-          <a:xfrm>
-            <a:off x="6217920" y="1371600"/>
-            <a:ext cx="5212080" cy="4754880"/>
-          </a:xfrm>
-          <a:prstGeom prst="roundRect">
-            <a:avLst/>
-          </a:prstGeom>
-          <a:solidFill>
-            <a:srgbClr val="162032"/>
-          </a:solidFill>
-          <a:ln w="15240">
-            <a:solidFill>
-              <a:srgbClr val="24344D"/>
-            </a:solidFill>
-          </a:ln>
-        </p:spPr>
-        <p:style>
-          <a:lnRef idx="1">
-            <a:schemeClr val="accent1"/>
-          </a:lnRef>
-          <a:fillRef idx="3">
-            <a:schemeClr val="accent1"/>
-          </a:fillRef>
-          <a:effectRef idx="2">
-            <a:schemeClr val="accent1"/>
-          </a:effectRef>
-          <a:fontRef idx="minor">
-            <a:schemeClr val="lt1"/>
-          </a:fontRef>
-        </p:style>
-        <p:txBody>
-          <a:bodyPr rtlCol="0" anchor="ctr"/>
-          <a:lstStyle/>
-          <a:p>
-            <a:pPr algn="ctr"/>
-          </a:p>
-        </p:txBody>
-      </p:sp>
-      <p:sp>
-        <p:nvSpPr>
-          <p:cNvPr id="10" name="TextBox 9"/>
-          <p:cNvSpPr txBox="1"/>
-          <p:nvPr/>
-        </p:nvSpPr>
-        <p:spPr>
-          <a:xfrm>
-            <a:off x="6400800" y="1554480"/>
-            <a:ext cx="4846320" cy="4389120"/>
-          </a:xfrm>
-          <a:prstGeom prst="rect">
-            <a:avLst/>
-          </a:prstGeom>
-          <a:noFill/>
-        </p:spPr>
-        <p:txBody>
-          <a:bodyPr wrap="square">
-            <a:spAutoFit/>
-          </a:bodyPr>
-          <a:lstStyle/>
-          <a:p>
-            <a:pPr>
-              <a:spcAft>
-                <a:spcPts val="200"/>
-              </a:spcAft>
-              <a:defRPr sz="900" b="1">
-                <a:solidFill>
-                  <a:srgbClr val="94A3B8"/>
-                </a:solidFill>
-              </a:defRPr>
-            </a:pPr>
-            <a:r>
-              <a:t>VERIFY ENDPOINT</a:t>
-            </a:r>
-          </a:p>
-          <a:p>
-            <a:pPr>
-              <a:spcAft>
-                <a:spcPts val="800"/>
-              </a:spcAft>
-              <a:defRPr sz="1500" b="1">
-                <a:solidFill>
-                  <a:srgbClr val="38BDF8"/>
-                </a:solidFill>
-              </a:defRPr>
-            </a:pPr>
-            <a:r>
-              <a:t>POST /api/verify &amp; GET /api/divisor</a:t>
-            </a:r>
-          </a:p>
-          <a:p>
-            <a:pPr>
-              <a:spcAft>
-                <a:spcPts val="400"/>
-              </a:spcAft>
-              <a:defRPr sz="1150">
-                <a:solidFill>
-                  <a:srgbClr val="E2E8F0"/>
-                </a:solidFill>
-              </a:defRPr>
-            </a:pPr>
-            <a:r>
-              <a:t>POST /api/verify Contract:</a:t>
-            </a:r>
-          </a:p>
-          <a:p>
-            <a:pPr>
-              <a:spcAft>
-                <a:spcPts val="400"/>
-              </a:spcAft>
-              <a:defRPr sz="1150">
-                <a:solidFill>
-                  <a:srgbClr val="E2E8F0"/>
-                </a:solidFill>
-              </a:defRPr>
-            </a:pPr>
-            <a:r>
-              <a:t>{"log": "TURBINE_01...", "crc": "01001001..."}</a:t>
-            </a:r>
-          </a:p>
-          <a:p>
-            <a:pPr>
-              <a:spcAft>
-                <a:spcPts val="400"/>
-              </a:spcAft>
-              <a:defRPr sz="1150">
-                <a:solidFill>
-                  <a:srgbClr val="E2E8F0"/>
-                </a:solidFill>
-              </a:defRPr>
-            </a:pPr>
-          </a:p>
-          <a:p>
-            <a:pPr>
-              <a:spcAft>
-                <a:spcPts val="400"/>
-              </a:spcAft>
-              <a:defRPr sz="1150">
-                <a:solidFill>
-                  <a:srgbClr val="E2E8F0"/>
-                </a:solidFill>
-              </a:defRPr>
-            </a:pPr>
-            <a:r>
-              <a:t>Response Payload (200 OK):</a:t>
-            </a:r>
-          </a:p>
-          <a:p>
-            <a:pPr>
-              <a:spcAft>
-                <a:spcPts val="400"/>
-              </a:spcAft>
-              <a:defRPr sz="1150">
-                <a:solidFill>
-                  <a:srgbClr val="E2E8F0"/>
-                </a:solidFill>
-              </a:defRPr>
-            </a:pPr>
-            <a:r>
-              <a:t>{</a:t>
-            </a:r>
-          </a:p>
-          <a:p>
-            <a:pPr>
-              <a:spcAft>
-                <a:spcPts val="400"/>
-              </a:spcAft>
-              <a:defRPr sz="1150">
-                <a:solidFill>
-                  <a:srgbClr val="E2E8F0"/>
-                </a:solidFill>
-              </a:defRPr>
-            </a:pPr>
-            <a:r>
-              <a:t>  "accepted": true,</a:t>
-            </a:r>
-          </a:p>
-          <a:p>
-            <a:pPr>
-              <a:spcAft>
-                <a:spcPts val="400"/>
-              </a:spcAft>
-              <a:defRPr sz="1150">
-                <a:solidFill>
-                  <a:srgbClr val="E2E8F0"/>
-                </a:solidFill>
-              </a:defRPr>
-            </a:pPr>
-            <a:r>
-              <a:t>  "divisor": "100001010100110001101111101000111",</a:t>
-            </a:r>
-          </a:p>
-          <a:p>
-            <a:pPr>
-              <a:spcAft>
-                <a:spcPts val="400"/>
-              </a:spcAft>
-              <a:defRPr sz="1150">
-                <a:solidFill>
-                  <a:srgbClr val="E2E8F0"/>
-                </a:solidFill>
-              </a:defRPr>
-            </a:pPr>
-            <a:r>
-              <a:t>  "steps": {</a:t>
-            </a:r>
-          </a:p>
-          <a:p>
-            <a:pPr>
-              <a:spcAft>
-                <a:spcPts val="400"/>
-              </a:spcAft>
-              <a:defRPr sz="1150">
-                <a:solidFill>
-                  <a:srgbClr val="E2E8F0"/>
-                </a:solidFill>
-              </a:defRPr>
-            </a:pPr>
-            <a:r>
-              <a:t>    "codeword": "01011011...01001001...",</a:t>
-            </a:r>
-          </a:p>
-          <a:p>
-            <a:pPr>
-              <a:spcAft>
-                <a:spcPts val="400"/>
-              </a:spcAft>
-              <a:defRPr sz="1150">
-                <a:solidFill>
-                  <a:srgbClr val="E2E8F0"/>
-                </a:solidFill>
-              </a:defRPr>
-            </a:pPr>
-            <a:r>
-              <a:t>    "remainder": "00000000000000000000000000000000"</a:t>
-            </a:r>
-          </a:p>
-          <a:p>
-            <a:pPr>
-              <a:spcAft>
-                <a:spcPts val="400"/>
-              </a:spcAft>
-              <a:defRPr sz="1150">
-                <a:solidFill>
-                  <a:srgbClr val="E2E8F0"/>
-                </a:solidFill>
-              </a:defRPr>
-            </a:pPr>
-            <a:r>
-              <a:t>  }</a:t>
-            </a:r>
-          </a:p>
-          <a:p>
-            <a:pPr>
-              <a:spcAft>
-                <a:spcPts val="400"/>
-              </a:spcAft>
-              <a:defRPr sz="1150">
-                <a:solidFill>
-                  <a:srgbClr val="E2E8F0"/>
-                </a:solidFill>
-              </a:defRPr>
-            </a:pPr>
-            <a:r>
-              <a:t>}</a:t>
-            </a:r>
-          </a:p>
-          <a:p>
-            <a:pPr>
-              <a:spcAft>
-                <a:spcPts val="400"/>
-              </a:spcAft>
-              <a:defRPr sz="1150">
-                <a:solidFill>
-                  <a:srgbClr val="E2E8F0"/>
-                </a:solidFill>
-              </a:defRPr>
-            </a:pPr>
-          </a:p>
-          <a:p>
-            <a:pPr>
-              <a:spcAft>
-                <a:spcPts val="400"/>
-              </a:spcAft>
-              <a:defRPr sz="1150">
-                <a:solidFill>
-                  <a:srgbClr val="E2E8F0"/>
-                </a:solidFill>
-              </a:defRPr>
-            </a:pPr>
-            <a:r>
-              <a:t>GET /api/divisor -&gt; {"divisor": "10000101..."}</a:t>
-            </a:r>
-          </a:p>
-        </p:txBody>
-      </p:sp>
+        </p:nvGraphicFramePr>
+        <p:xfrm>
+          <a:off x="731520" y="1280160"/>
+          <a:ext cx="10698480" cy="5029200"/>
+        </p:xfrm>
+        <a:graphic>
+          <a:graphicData uri="http://schemas.openxmlformats.org/drawingml/2006/table">
+            <a:tbl>
+              <a:tblPr firstRow="1" bandRow="1">
+                <a:tableStyleId>{5C22544A-7EE6-4342-B048-85BDC9FD1C3A}</a:tableStyleId>
+              </a:tblPr>
+              <a:tblGrid>
+                <a:gridCol w="2011680"/>
+                <a:gridCol w="2651760"/>
+                <a:gridCol w="3291840"/>
+                <a:gridCol w="2743200"/>
+              </a:tblGrid>
+              <a:tr h="1005840">
+                <a:tc>
+                  <a:txBody>
+                    <a:bodyPr/>
+                    <a:lstStyle/>
+                    <a:p>
+                      <a:pPr algn="l">
+                        <a:defRPr sz="1000" b="1">
+                          <a:solidFill>
+                            <a:srgbClr val="241E17"/>
+                          </a:solidFill>
+                          <a:latin typeface="Arial"/>
+                        </a:defRPr>
+                      </a:pPr>
+                      <a:r>
+                        <a:t>Problem / Challenge</a:t>
+                      </a:r>
+                    </a:p>
+                  </a:txBody>
+                  <a:tcPr>
+                    <a:solidFill>
+                      <a:srgbClr val="F6E3C8"/>
+                    </a:solidFill>
+                  </a:tcPr>
+                </a:tc>
+                <a:tc>
+                  <a:txBody>
+                    <a:bodyPr/>
+                    <a:lstStyle/>
+                    <a:p>
+                      <a:pPr algn="l">
+                        <a:defRPr sz="1000" b="1">
+                          <a:solidFill>
+                            <a:srgbClr val="241E17"/>
+                          </a:solidFill>
+                          <a:latin typeface="Arial"/>
+                        </a:defRPr>
+                      </a:pPr>
+                      <a:r>
+                        <a:t>Root Cause</a:t>
+                      </a:r>
+                    </a:p>
+                  </a:txBody>
+                  <a:tcPr>
+                    <a:solidFill>
+                      <a:srgbClr val="F6E3C8"/>
+                    </a:solidFill>
+                  </a:tcPr>
+                </a:tc>
+                <a:tc>
+                  <a:txBody>
+                    <a:bodyPr/>
+                    <a:lstStyle/>
+                    <a:p>
+                      <a:pPr algn="l">
+                        <a:defRPr sz="1000" b="1">
+                          <a:solidFill>
+                            <a:srgbClr val="241E17"/>
+                          </a:solidFill>
+                          <a:latin typeface="Arial"/>
+                        </a:defRPr>
+                      </a:pPr>
+                      <a:r>
+                        <a:t>Engineering Solution</a:t>
+                      </a:r>
+                    </a:p>
+                  </a:txBody>
+                  <a:tcPr>
+                    <a:solidFill>
+                      <a:srgbClr val="F6E3C8"/>
+                    </a:solidFill>
+                  </a:tcPr>
+                </a:tc>
+                <a:tc>
+                  <a:txBody>
+                    <a:bodyPr/>
+                    <a:lstStyle/>
+                    <a:p>
+                      <a:pPr algn="l">
+                        <a:defRPr sz="1000" b="1">
+                          <a:solidFill>
+                            <a:srgbClr val="241E17"/>
+                          </a:solidFill>
+                          <a:latin typeface="Arial"/>
+                        </a:defRPr>
+                      </a:pPr>
+                      <a:r>
+                        <a:t>Learning Outcome</a:t>
+                      </a:r>
+                    </a:p>
+                  </a:txBody>
+                  <a:tcPr>
+                    <a:solidFill>
+                      <a:srgbClr val="F6E3C8"/>
+                    </a:solidFill>
+                  </a:tcPr>
+                </a:tc>
+              </a:tr>
+              <a:tr h="1005840">
+                <a:tc>
+                  <a:txBody>
+                    <a:bodyPr/>
+                    <a:lstStyle/>
+                    <a:p>
+                      <a:pPr algn="l">
+                        <a:defRPr sz="950">
+                          <a:solidFill>
+                            <a:srgbClr val="6E5D4E"/>
+                          </a:solidFill>
+                          <a:latin typeface="Arial"/>
+                        </a:defRPr>
+                      </a:pPr>
+                      <a:r>
+                        <a:t>Polynomial Bit Length</a:t>
+                      </a:r>
+                    </a:p>
+                  </a:txBody>
+                  <a:tcPr>
+                    <a:solidFill>
+                      <a:srgbClr val="FFFFFF"/>
+                    </a:solidFill>
+                  </a:tcPr>
+                </a:tc>
+                <a:tc>
+                  <a:txBody>
+                    <a:bodyPr/>
+                    <a:lstStyle/>
+                    <a:p>
+                      <a:pPr algn="l">
+                        <a:defRPr sz="950">
+                          <a:solidFill>
+                            <a:srgbClr val="6E5D4E"/>
+                          </a:solidFill>
+                          <a:latin typeface="Arial"/>
+                        </a:defRPr>
+                      </a:pPr>
+                      <a:r>
+                        <a:t>Using 32-bit divisor for 32-bit CRC caused degree underflow.</a:t>
+                      </a:r>
+                    </a:p>
+                  </a:txBody>
+                  <a:tcPr>
+                    <a:solidFill>
+                      <a:srgbClr val="FFFFFF"/>
+                    </a:solidFill>
+                  </a:tcPr>
+                </a:tc>
+                <a:tc>
+                  <a:txBody>
+                    <a:bodyPr/>
+                    <a:lstStyle/>
+                    <a:p>
+                      <a:pPr algn="l">
+                        <a:defRPr sz="950">
+                          <a:solidFill>
+                            <a:srgbClr val="6E5D4E"/>
+                          </a:solidFill>
+                          <a:latin typeface="Arial"/>
+                        </a:defRPr>
+                      </a:pPr>
+                      <a:r>
+                        <a:t>Generated 33-bit divisor with MSB=1 and LSB=1 (degree 32).</a:t>
+                      </a:r>
+                    </a:p>
+                  </a:txBody>
+                  <a:tcPr>
+                    <a:solidFill>
+                      <a:srgbClr val="FFFFFF"/>
+                    </a:solidFill>
+                  </a:tcPr>
+                </a:tc>
+                <a:tc>
+                  <a:txBody>
+                    <a:bodyPr/>
+                    <a:lstStyle/>
+                    <a:p>
+                      <a:pPr algn="l">
+                        <a:defRPr sz="950">
+                          <a:solidFill>
+                            <a:srgbClr val="6E5D4E"/>
+                          </a:solidFill>
+                          <a:latin typeface="Arial"/>
+                        </a:defRPr>
+                      </a:pPr>
+                      <a:r>
+                        <a:t>Understood that degree-n polynomial requires n+1 coefficients.</a:t>
+                      </a:r>
+                    </a:p>
+                  </a:txBody>
+                  <a:tcPr>
+                    <a:solidFill>
+                      <a:srgbClr val="FFFFFF"/>
+                    </a:solidFill>
+                  </a:tcPr>
+                </a:tc>
+              </a:tr>
+              <a:tr h="1005840">
+                <a:tc>
+                  <a:txBody>
+                    <a:bodyPr/>
+                    <a:lstStyle/>
+                    <a:p>
+                      <a:pPr algn="l">
+                        <a:defRPr sz="950">
+                          <a:solidFill>
+                            <a:srgbClr val="6E5D4E"/>
+                          </a:solidFill>
+                          <a:latin typeface="Arial"/>
+                        </a:defRPr>
+                      </a:pPr>
+                      <a:r>
+                        <a:t>Modulo-2 Long Division</a:t>
+                      </a:r>
+                    </a:p>
+                  </a:txBody>
+                  <a:tcPr>
+                    <a:solidFill>
+                      <a:srgbClr val="F3E6D6"/>
+                    </a:solidFill>
+                  </a:tcPr>
+                </a:tc>
+                <a:tc>
+                  <a:txBody>
+                    <a:bodyPr/>
+                    <a:lstStyle/>
+                    <a:p>
+                      <a:pPr algn="l">
+                        <a:defRPr sz="950">
+                          <a:solidFill>
+                            <a:srgbClr val="6E5D4E"/>
+                          </a:solidFill>
+                          <a:latin typeface="Arial"/>
+                        </a:defRPr>
+                      </a:pPr>
+                      <a:r>
+                        <a:t>Integer division propagates carries, producing arithmetic quotient.</a:t>
+                      </a:r>
+                    </a:p>
+                  </a:txBody>
+                  <a:tcPr>
+                    <a:solidFill>
+                      <a:srgbClr val="F3E6D6"/>
+                    </a:solidFill>
+                  </a:tcPr>
+                </a:tc>
+                <a:tc>
+                  <a:txBody>
+                    <a:bodyPr/>
+                    <a:lstStyle/>
+                    <a:p>
+                      <a:pPr algn="l">
+                        <a:defRPr sz="950">
+                          <a:solidFill>
+                            <a:srgbClr val="6E5D4E"/>
+                          </a:solidFill>
+                          <a:latin typeface="Arial"/>
+                        </a:defRPr>
+                      </a:pPr>
+                      <a:r>
+                        <a:t>Built handwritten bitwise XOR loop shifting without carries/borrows.</a:t>
+                      </a:r>
+                    </a:p>
+                  </a:txBody>
+                  <a:tcPr>
+                    <a:solidFill>
+                      <a:srgbClr val="F3E6D6"/>
+                    </a:solidFill>
+                  </a:tcPr>
+                </a:tc>
+                <a:tc>
+                  <a:txBody>
+                    <a:bodyPr/>
+                    <a:lstStyle/>
+                    <a:p>
+                      <a:pPr algn="l">
+                        <a:defRPr sz="950">
+                          <a:solidFill>
+                            <a:srgbClr val="6E5D4E"/>
+                          </a:solidFill>
+                          <a:latin typeface="Arial"/>
+                        </a:defRPr>
+                      </a:pPr>
+                      <a:r>
+                        <a:t>Mastered Galois Field GF(2) long division algorithms.</a:t>
+                      </a:r>
+                    </a:p>
+                  </a:txBody>
+                  <a:tcPr>
+                    <a:solidFill>
+                      <a:srgbClr val="F3E6D6"/>
+                    </a:solidFill>
+                  </a:tcPr>
+                </a:tc>
+              </a:tr>
+              <a:tr h="1005840">
+                <a:tc>
+                  <a:txBody>
+                    <a:bodyPr/>
+                    <a:lstStyle/>
+                    <a:p>
+                      <a:pPr algn="l">
+                        <a:defRPr sz="950">
+                          <a:solidFill>
+                            <a:srgbClr val="6E5D4E"/>
+                          </a:solidFill>
+                          <a:latin typeface="Arial"/>
+                        </a:defRPr>
+                      </a:pPr>
+                      <a:r>
+                        <a:t>Divisor Synchronization</a:t>
+                      </a:r>
+                    </a:p>
+                  </a:txBody>
+                  <a:tcPr>
+                    <a:solidFill>
+                      <a:srgbClr val="FFFFFF"/>
+                    </a:solidFill>
+                  </a:tcPr>
+                </a:tc>
+                <a:tc>
+                  <a:txBody>
+                    <a:bodyPr/>
+                    <a:lstStyle/>
+                    <a:p>
+                      <a:pPr algn="l">
+                        <a:defRPr sz="950">
+                          <a:solidFill>
+                            <a:srgbClr val="6E5D4E"/>
+                          </a:solidFill>
+                          <a:latin typeface="Arial"/>
+                        </a:defRPr>
+                      </a:pPr>
+                      <a:r>
+                        <a:t>Sender &amp; receiver generated different random polynomials.</a:t>
+                      </a:r>
+                    </a:p>
+                  </a:txBody>
+                  <a:tcPr>
+                    <a:solidFill>
+                      <a:srgbClr val="FFFFFF"/>
+                    </a:solidFill>
+                  </a:tcPr>
+                </a:tc>
+                <a:tc>
+                  <a:txBody>
+                    <a:bodyPr/>
+                    <a:lstStyle/>
+                    <a:p>
+                      <a:pPr algn="l">
+                        <a:defRPr sz="950">
+                          <a:solidFill>
+                            <a:srgbClr val="6E5D4E"/>
+                          </a:solidFill>
+                          <a:latin typeface="Arial"/>
+                        </a:defRPr>
+                      </a:pPr>
+                      <a:r>
+                        <a:t>Created singleton get_divisor() fixed for entire session in memory.</a:t>
+                      </a:r>
+                    </a:p>
+                  </a:txBody>
+                  <a:tcPr>
+                    <a:solidFill>
+                      <a:srgbClr val="FFFFFF"/>
+                    </a:solidFill>
+                  </a:tcPr>
+                </a:tc>
+                <a:tc>
+                  <a:txBody>
+                    <a:bodyPr/>
+                    <a:lstStyle/>
+                    <a:p>
+                      <a:pPr algn="l">
+                        <a:defRPr sz="950">
+                          <a:solidFill>
+                            <a:srgbClr val="6E5D4E"/>
+                          </a:solidFill>
+                          <a:latin typeface="Arial"/>
+                        </a:defRPr>
+                      </a:pPr>
+                      <a:r>
+                        <a:t>Learned session-level state management and protocol parity.</a:t>
+                      </a:r>
+                    </a:p>
+                  </a:txBody>
+                  <a:tcPr>
+                    <a:solidFill>
+                      <a:srgbClr val="FFFFFF"/>
+                    </a:solidFill>
+                  </a:tcPr>
+                </a:tc>
+              </a:tr>
+              <a:tr h="1005840">
+                <a:tc>
+                  <a:txBody>
+                    <a:bodyPr/>
+                    <a:lstStyle/>
+                    <a:p>
+                      <a:pPr algn="l">
+                        <a:defRPr sz="950">
+                          <a:solidFill>
+                            <a:srgbClr val="6E5D4E"/>
+                          </a:solidFill>
+                          <a:latin typeface="Arial"/>
+                        </a:defRPr>
+                      </a:pPr>
+                      <a:r>
+                        <a:t>Single-Screen Layout</a:t>
+                      </a:r>
+                    </a:p>
+                  </a:txBody>
+                  <a:tcPr>
+                    <a:solidFill>
+                      <a:srgbClr val="F3E6D6"/>
+                    </a:solidFill>
+                  </a:tcPr>
+                </a:tc>
+                <a:tc>
+                  <a:txBody>
+                    <a:bodyPr/>
+                    <a:lstStyle/>
+                    <a:p>
+                      <a:pPr algn="l">
+                        <a:defRPr sz="950">
+                          <a:solidFill>
+                            <a:srgbClr val="6E5D4E"/>
+                          </a:solidFill>
+                          <a:latin typeface="Arial"/>
+                        </a:defRPr>
+                      </a:pPr>
+                      <a:r>
+                        <a:t>Long step outputs created ugly outer window scrolling.</a:t>
+                      </a:r>
+                    </a:p>
+                  </a:txBody>
+                  <a:tcPr>
+                    <a:solidFill>
+                      <a:srgbClr val="F3E6D6"/>
+                    </a:solidFill>
+                  </a:tcPr>
+                </a:tc>
+                <a:tc>
+                  <a:txBody>
+                    <a:bodyPr/>
+                    <a:lstStyle/>
+                    <a:p>
+                      <a:pPr algn="l">
+                        <a:defRPr sz="950">
+                          <a:solidFill>
+                            <a:srgbClr val="6E5D4E"/>
+                          </a:solidFill>
+                          <a:latin typeface="Arial"/>
+                        </a:defRPr>
+                      </a:pPr>
+                      <a:r>
+                        <a:t>Engineered 2-row CSS grid with internal 6px custom scrollbars.</a:t>
+                      </a:r>
+                    </a:p>
+                  </a:txBody>
+                  <a:tcPr>
+                    <a:solidFill>
+                      <a:srgbClr val="F3E6D6"/>
+                    </a:solidFill>
+                  </a:tcPr>
+                </a:tc>
+                <a:tc>
+                  <a:txBody>
+                    <a:bodyPr/>
+                    <a:lstStyle/>
+                    <a:p>
+                      <a:pPr algn="l">
+                        <a:defRPr sz="950">
+                          <a:solidFill>
+                            <a:srgbClr val="6E5D4E"/>
+                          </a:solidFill>
+                          <a:latin typeface="Arial"/>
+                        </a:defRPr>
+                      </a:pPr>
+                      <a:r>
+                        <a:t>Mastered responsive viewport budgeting without layout thrashing.</a:t>
+                      </a:r>
+                    </a:p>
+                  </a:txBody>
+                  <a:tcPr>
+                    <a:solidFill>
+                      <a:srgbClr val="F3E6D6"/>
+                    </a:solidFill>
+                  </a:tcPr>
+                </a:tc>
+              </a:tr>
+            </a:tbl>
+          </a:graphicData>
+        </a:graphic>
+      </p:graphicFrame>
     </p:spTree>
   </p:cSld>
   <p:clrMapOvr>
@@ -8556,7 +8998,7 @@
             <a:avLst/>
           </a:prstGeom>
           <a:solidFill>
-            <a:srgbClr val="0B0F19"/>
+            <a:srgbClr val="FFF8E7"/>
           </a:solidFill>
           <a:ln>
             <a:noFill/>
@@ -8592,7 +9034,7 @@
         </p:nvSpPr>
         <p:spPr>
           <a:xfrm>
-            <a:off x="731520" y="365760"/>
+            <a:off x="731520" y="320040"/>
             <a:ext cx="8229600" cy="228600"/>
           </a:xfrm>
           <a:prstGeom prst="rect">
@@ -8607,14 +9049,15 @@
           <a:lstStyle/>
           <a:p>
             <a:pPr>
-              <a:defRPr sz="1000" b="1">
-                <a:solidFill>
-                  <a:srgbClr val="38BDF8"/>
-                </a:solidFill>
-              </a:defRPr>
-            </a:pPr>
-            <a:r>
-              <a:t>FRONTEND ARCHITECTURE</a:t>
+              <a:defRPr sz="950" b="1">
+                <a:solidFill>
+                  <a:srgbClr val="6E5D4E"/>
+                </a:solidFill>
+                <a:latin typeface="Arial"/>
+              </a:defRPr>
+            </a:pPr>
+            <a:r>
+              <a:t>SLIDE 8 • FEATURES &amp; DEMO GUIDE</a:t>
             </a:r>
           </a:p>
         </p:txBody>
@@ -8627,8 +9070,8 @@
         </p:nvSpPr>
         <p:spPr>
           <a:xfrm>
-            <a:off x="731520" y="594360"/>
-            <a:ext cx="8686800" cy="548640"/>
+            <a:off x="731520" y="530352"/>
+            <a:ext cx="8961120" cy="548640"/>
           </a:xfrm>
           <a:prstGeom prst="rect">
             <a:avLst/>
@@ -8642,14 +9085,15 @@
           <a:lstStyle/>
           <a:p>
             <a:pPr>
-              <a:defRPr sz="2200" b="1">
-                <a:solidFill>
-                  <a:srgbClr val="FFFFFF"/>
-                </a:solidFill>
-              </a:defRPr>
-            </a:pPr>
-            <a:r>
-              <a:t>AEGIS-Inspired UI: 2-Row Viewport Cockpit</a:t>
+              <a:defRPr sz="2100" b="1">
+                <a:solidFill>
+                  <a:srgbClr val="241E17"/>
+                </a:solidFill>
+                <a:latin typeface="Arial"/>
+              </a:defRPr>
+            </a:pPr>
+            <a:r>
+              <a:t>Additional Features &amp; Live Demonstration Sequence</a:t>
             </a:r>
           </a:p>
         </p:txBody>
@@ -8662,18 +9106,18 @@
         </p:nvSpPr>
         <p:spPr>
           <a:xfrm>
-            <a:off x="10241280" y="411480"/>
-            <a:ext cx="1188720" cy="365760"/>
+            <a:off x="10241280" y="365760"/>
+            <a:ext cx="1188720" cy="347472"/>
           </a:xfrm>
           <a:prstGeom prst="roundRect">
             <a:avLst/>
           </a:prstGeom>
           <a:solidFill>
-            <a:srgbClr val="162032"/>
+            <a:srgbClr val="FFFFFF"/>
           </a:solidFill>
           <a:ln>
             <a:solidFill>
-              <a:srgbClr val="24344D"/>
+              <a:srgbClr val="E2D5C3"/>
             </a:solidFill>
           </a:ln>
         </p:spPr>
@@ -8707,8 +9151,8 @@
         </p:nvSpPr>
         <p:spPr>
           <a:xfrm>
-            <a:off x="10241280" y="411480"/>
-            <a:ext cx="1188720" cy="365760"/>
+            <a:off x="10241280" y="365760"/>
+            <a:ext cx="1188720" cy="347472"/>
           </a:xfrm>
           <a:prstGeom prst="rect">
             <a:avLst/>
@@ -8722,10 +9166,11 @@
           <a:lstStyle/>
           <a:p>
             <a:pPr algn="ctr">
-              <a:defRPr sz="1000" b="1">
-                <a:solidFill>
-                  <a:srgbClr val="94A3B8"/>
-                </a:solidFill>
+              <a:defRPr sz="950" b="1">
+                <a:solidFill>
+                  <a:srgbClr val="6E5D4E"/>
+                </a:solidFill>
+                <a:latin typeface="Arial"/>
               </a:defRPr>
             </a:pPr>
             <a:r>
@@ -8742,18 +9187,18 @@
         </p:nvSpPr>
         <p:spPr>
           <a:xfrm>
-            <a:off x="731520" y="1371600"/>
-            <a:ext cx="5120640" cy="4754880"/>
+            <a:off x="731520" y="1280160"/>
+            <a:ext cx="5303520" cy="3931920"/>
           </a:xfrm>
           <a:prstGeom prst="roundRect">
             <a:avLst/>
           </a:prstGeom>
           <a:solidFill>
-            <a:srgbClr val="162032"/>
+            <a:srgbClr val="FFFFFF"/>
           </a:solidFill>
-          <a:ln w="15240">
+          <a:ln w="13970">
             <a:solidFill>
-              <a:srgbClr val="24344D"/>
+              <a:srgbClr val="E2D5C3"/>
             </a:solidFill>
           </a:ln>
         </p:spPr>
@@ -8787,8 +9232,8 @@
         </p:nvSpPr>
         <p:spPr>
           <a:xfrm>
-            <a:off x="914400" y="1554480"/>
-            <a:ext cx="4754880" cy="4389120"/>
+            <a:off x="877824" y="1408176"/>
+            <a:ext cx="5010912" cy="3675888"/>
           </a:xfrm>
           <a:prstGeom prst="rect">
             <a:avLst/>
@@ -8805,89 +9250,95 @@
               <a:spcAft>
                 <a:spcPts val="200"/>
               </a:spcAft>
-              <a:defRPr sz="900" b="1">
-                <a:solidFill>
-                  <a:srgbClr val="94A3B8"/>
-                </a:solidFill>
-              </a:defRPr>
-            </a:pPr>
-            <a:r>
-              <a:t>LAYOUT DISCIPLINE</a:t>
-            </a:r>
-          </a:p>
-          <a:p>
-            <a:pPr>
-              <a:spcAft>
-                <a:spcPts val="800"/>
-              </a:spcAft>
-              <a:defRPr sz="1500" b="1">
-                <a:solidFill>
-                  <a:srgbClr val="38BDF8"/>
-                </a:solidFill>
-              </a:defRPr>
-            </a:pPr>
-            <a:r>
-              <a:t>Spatial Hierarchy &amp; Interactions</a:t>
-            </a:r>
-          </a:p>
-          <a:p>
-            <a:pPr>
-              <a:spcAft>
-                <a:spcPts val="400"/>
-              </a:spcAft>
-              <a:defRPr sz="1150">
-                <a:solidFill>
-                  <a:srgbClr val="E2E8F0"/>
-                </a:solidFill>
-              </a:defRPr>
-            </a:pPr>
-            <a:r>
-              <a:t>• Fixed 56px Top Navbar: Clean typography with plain SVG Sun/Moon theme toggle (no distracting box borders).</a:t>
-            </a:r>
-          </a:p>
-          <a:p>
-            <a:pPr>
-              <a:spcAft>
-                <a:spcPts val="400"/>
-              </a:spcAft>
-              <a:defRPr sz="1150">
-                <a:solidFill>
-                  <a:srgbClr val="E2E8F0"/>
-                </a:solidFill>
-              </a:defRPr>
-            </a:pPr>
-            <a:r>
-              <a:t>• ROW 1 (Inputs): Dual cards (Transmitter vs Receiver) with 110px textareas, FileReader upload (.txt/.log/.md), and live Random Generator.</a:t>
-            </a:r>
-          </a:p>
-          <a:p>
-            <a:pPr>
-              <a:spcAft>
-                <a:spcPts val="400"/>
-              </a:spcAft>
-              <a:defRPr sz="1150">
-                <a:solidFill>
-                  <a:srgbClr val="E2E8F0"/>
-                </a:solidFill>
-              </a:defRPr>
-            </a:pPr>
-            <a:r>
-              <a:t>• ROW 2 (Process Steps): Scrollable live step breakdown with custom 6px thin scrollbars matching dark/light themes.</a:t>
-            </a:r>
-          </a:p>
-          <a:p>
-            <a:pPr>
-              <a:spcAft>
-                <a:spcPts val="400"/>
-              </a:spcAft>
-              <a:defRPr sz="1150">
-                <a:solidFill>
-                  <a:srgbClr val="E2E8F0"/>
-                </a:solidFill>
-              </a:defRPr>
-            </a:pPr>
-            <a:r>
-              <a:t>• Zero Page Scroll: Strictly fits inside single viewport (calc(100vh - 56px)).</a:t>
+              <a:defRPr sz="850" b="1">
+                <a:solidFill>
+                  <a:srgbClr val="6E5D4E"/>
+                </a:solidFill>
+                <a:latin typeface="Arial"/>
+              </a:defRPr>
+            </a:pPr>
+            <a:r>
+              <a:t>UNIQUE SYSTEM HIGHLIGHTS</a:t>
+            </a:r>
+          </a:p>
+          <a:p>
+            <a:pPr>
+              <a:spcAft>
+                <a:spcPts val="500"/>
+              </a:spcAft>
+              <a:defRPr sz="1350" b="1">
+                <a:solidFill>
+                  <a:srgbClr val="241E17"/>
+                </a:solidFill>
+                <a:latin typeface="Arial"/>
+              </a:defRPr>
+            </a:pPr>
+            <a:r>
+              <a:t>Working Additional Features</a:t>
+            </a:r>
+          </a:p>
+          <a:p>
+            <a:pPr>
+              <a:spcAft>
+                <a:spcPts val="300"/>
+              </a:spcAft>
+              <a:defRPr sz="1050">
+                <a:solidFill>
+                  <a:srgbClr val="6E5D4E"/>
+                </a:solidFill>
+                <a:latin typeface="Arial"/>
+              </a:defRPr>
+            </a:pPr>
+            <a:r>
+              <a:t>• Session-Fixed 33-Bit Generator: Singleton generator shared across all endpoints via GET /api/divisor.</a:t>
+            </a:r>
+          </a:p>
+          <a:p>
+            <a:pPr>
+              <a:spcAft>
+                <a:spcPts val="300"/>
+              </a:spcAft>
+              <a:defRPr sz="1050">
+                <a:solidFill>
+                  <a:srgbClr val="6E5D4E"/>
+                </a:solidFill>
+                <a:latin typeface="Arial"/>
+              </a:defRPr>
+            </a:pPr>
+            <a:r>
+              <a:t>• 10-Report Demo Pack: Pre-populated industrial test reports (.log/.txt) in Downloads for instant live testing.</a:t>
+            </a:r>
+          </a:p>
+          <a:p>
+            <a:pPr>
+              <a:spcAft>
+                <a:spcPts val="300"/>
+              </a:spcAft>
+              <a:defRPr sz="1050">
+                <a:solidFill>
+                  <a:srgbClr val="6E5D4E"/>
+                </a:solidFill>
+                <a:latin typeface="Arial"/>
+              </a:defRPr>
+            </a:pPr>
+            <a:r>
+              <a:t>• Step-by-Step Telemetry Audit: Full visibility into ASCII binary, 32-zero padding, divisor, remainder, and hex.</a:t>
+            </a:r>
+          </a:p>
+          <a:p>
+            <a:pPr>
+              <a:spcAft>
+                <a:spcPts val="300"/>
+              </a:spcAft>
+              <a:defRPr sz="1050">
+                <a:solidFill>
+                  <a:srgbClr val="6E5D4E"/>
+                </a:solidFill>
+                <a:latin typeface="Arial"/>
+              </a:defRPr>
+            </a:pPr>
+            <a:r>
+              <a:t>• Dual-Row Single Viewport UI: No page overflow; internal 6px subtle scrollbars; instant random log generator.</a:t>
             </a:r>
           </a:p>
         </p:txBody>
@@ -8900,18 +9351,18 @@
         </p:nvSpPr>
         <p:spPr>
           <a:xfrm>
-            <a:off x="6217920" y="1371600"/>
-            <a:ext cx="5212080" cy="4754880"/>
+            <a:off x="6172200" y="1280160"/>
+            <a:ext cx="5303520" cy="3931920"/>
           </a:xfrm>
           <a:prstGeom prst="roundRect">
             <a:avLst/>
           </a:prstGeom>
           <a:solidFill>
-            <a:srgbClr val="162032"/>
+            <a:srgbClr val="FFFFFF"/>
           </a:solidFill>
-          <a:ln w="15240">
+          <a:ln w="13970">
             <a:solidFill>
-              <a:srgbClr val="24344D"/>
+              <a:srgbClr val="E2D5C3"/>
             </a:solidFill>
           </a:ln>
         </p:spPr>
@@ -8945,8 +9396,8 @@
         </p:nvSpPr>
         <p:spPr>
           <a:xfrm>
-            <a:off x="6400800" y="1554480"/>
-            <a:ext cx="4846320" cy="4389120"/>
+            <a:off x="6318504" y="1408176"/>
+            <a:ext cx="5010912" cy="3675888"/>
           </a:xfrm>
           <a:prstGeom prst="rect">
             <a:avLst/>
@@ -8963,119 +9414,212 @@
               <a:spcAft>
                 <a:spcPts val="200"/>
               </a:spcAft>
-              <a:defRPr sz="900" b="1">
-                <a:solidFill>
-                  <a:srgbClr val="94A3B8"/>
-                </a:solidFill>
-              </a:defRPr>
-            </a:pPr>
-            <a:r>
-              <a:t>DESIGN SYSTEM</a:t>
-            </a:r>
-          </a:p>
-          <a:p>
-            <a:pPr>
-              <a:spcAft>
-                <a:spcPts val="800"/>
-              </a:spcAft>
-              <a:defRPr sz="1500" b="1">
-                <a:solidFill>
-                  <a:srgbClr val="38BDF8"/>
-                </a:solidFill>
-              </a:defRPr>
-            </a:pPr>
-            <a:r>
-              <a:t>Visual Tokens &amp; Status Feedback</a:t>
-            </a:r>
-          </a:p>
-          <a:p>
-            <a:pPr>
-              <a:spcAft>
-                <a:spcPts val="400"/>
-              </a:spcAft>
-              <a:defRPr sz="1150">
-                <a:solidFill>
-                  <a:srgbClr val="E2E8F0"/>
-                </a:solidFill>
-              </a:defRPr>
-            </a:pPr>
-            <a:r>
-              <a:t>• Light Mode: Warm off-white background (#f5f4f0), clean white surface cards (#ffffff), subtle borders (#e0ddd4).</a:t>
-            </a:r>
-          </a:p>
-          <a:p>
-            <a:pPr>
-              <a:spcAft>
-                <a:spcPts val="400"/>
-              </a:spcAft>
-              <a:defRPr sz="1150">
-                <a:solidFill>
-                  <a:srgbClr val="E2E8F0"/>
-                </a:solidFill>
-              </a:defRPr>
-            </a:pPr>
-            <a:r>
-              <a:t>• Dark Mode: Deep background (#0f0f0f), dark surface cards (#1a1a1a), borders (#2a2a2a).</a:t>
-            </a:r>
-          </a:p>
-          <a:p>
-            <a:pPr>
-              <a:spcAft>
-                <a:spcPts val="400"/>
-              </a:spcAft>
-              <a:defRPr sz="1150">
-                <a:solidFill>
-                  <a:srgbClr val="E2E8F0"/>
-                </a:solidFill>
-              </a:defRPr>
-            </a:pPr>
-            <a:r>
-              <a:t>• Compact Result Status Chip (~40px):</a:t>
-            </a:r>
-          </a:p>
-          <a:p>
-            <a:pPr>
-              <a:spcAft>
-                <a:spcPts val="400"/>
-              </a:spcAft>
-              <a:defRPr sz="1150">
-                <a:solidFill>
-                  <a:srgbClr val="E2E8F0"/>
-                </a:solidFill>
-              </a:defRPr>
-            </a:pPr>
-            <a:r>
-              <a:t>  ✓ ACCEPT — Message integrity verified (Green)</a:t>
-            </a:r>
-          </a:p>
-          <a:p>
-            <a:pPr>
-              <a:spcAft>
-                <a:spcPts val="400"/>
-              </a:spcAft>
-              <a:defRPr sz="1150">
-                <a:solidFill>
-                  <a:srgbClr val="E2E8F0"/>
-                </a:solidFill>
-              </a:defRPr>
-            </a:pPr>
-            <a:r>
-              <a:t>  ✗ REJECT — Corruption detected (Red)</a:t>
-            </a:r>
-          </a:p>
-          <a:p>
-            <a:pPr>
-              <a:spcAft>
-                <a:spcPts val="400"/>
-              </a:spcAft>
-              <a:defRPr sz="1150">
-                <a:solidFill>
-                  <a:srgbClr val="E2E8F0"/>
-                </a:solidFill>
-              </a:defRPr>
-            </a:pPr>
-            <a:r>
-              <a:t>• Monospace Discipline: Monospace font strictly scoped to binary/hex bitstreams.</a:t>
+              <a:defRPr sz="850" b="1">
+                <a:solidFill>
+                  <a:srgbClr val="6E5D4E"/>
+                </a:solidFill>
+                <a:latin typeface="Arial"/>
+              </a:defRPr>
+            </a:pPr>
+            <a:r>
+              <a:t>DEMONSTRATION PLAYBOOK</a:t>
+            </a:r>
+          </a:p>
+          <a:p>
+            <a:pPr>
+              <a:spcAft>
+                <a:spcPts val="500"/>
+              </a:spcAft>
+              <a:defRPr sz="1350" b="1">
+                <a:solidFill>
+                  <a:srgbClr val="241E17"/>
+                </a:solidFill>
+                <a:latin typeface="Arial"/>
+              </a:defRPr>
+            </a:pPr>
+            <a:r>
+              <a:t>Live Demonstration Sequence (Guideline Section 12)</a:t>
+            </a:r>
+          </a:p>
+          <a:p>
+            <a:pPr>
+              <a:spcAft>
+                <a:spcPts val="300"/>
+              </a:spcAft>
+              <a:defRPr sz="1050">
+                <a:solidFill>
+                  <a:srgbClr val="6E5D4E"/>
+                </a:solidFill>
+                <a:latin typeface="Arial"/>
+              </a:defRPr>
+            </a:pPr>
+            <a:r>
+              <a:t>Step 1 (PPT): Explain Problem, Math &amp; Architecture (Slides 1-4).</a:t>
+            </a:r>
+          </a:p>
+          <a:p>
+            <a:pPr>
+              <a:spcAft>
+                <a:spcPts val="300"/>
+              </a:spcAft>
+              <a:defRPr sz="1050">
+                <a:solidFill>
+                  <a:srgbClr val="6E5D4E"/>
+                </a:solidFill>
+                <a:latin typeface="Arial"/>
+              </a:defRPr>
+            </a:pPr>
+            <a:r>
+              <a:t>Step 2 (Dashboard): Upload Report_01_Turbine.log &amp; click Compute CRC.</a:t>
+            </a:r>
+          </a:p>
+          <a:p>
+            <a:pPr>
+              <a:spcAft>
+                <a:spcPts val="300"/>
+              </a:spcAft>
+              <a:defRPr sz="1050">
+                <a:solidFill>
+                  <a:srgbClr val="6E5D4E"/>
+                </a:solidFill>
+                <a:latin typeface="Arial"/>
+              </a:defRPr>
+            </a:pPr>
+            <a:r>
+              <a:t>Step 3 (Code): Trace ascii2binary() and xordiv() in crc_checker.py.</a:t>
+            </a:r>
+          </a:p>
+          <a:p>
+            <a:pPr>
+              <a:spcAft>
+                <a:spcPts val="300"/>
+              </a:spcAft>
+              <a:defRPr sz="1050">
+                <a:solidFill>
+                  <a:srgbClr val="6E5D4E"/>
+                </a:solidFill>
+                <a:latin typeface="Arial"/>
+              </a:defRPr>
+            </a:pPr>
+            <a:r>
+              <a:t>Step 4 (Dashboard): Demonstrate Accept (0^32) &amp; Reject (modify 1 character).</a:t>
+            </a:r>
+          </a:p>
+          <a:p>
+            <a:pPr>
+              <a:spcAft>
+                <a:spcPts val="300"/>
+              </a:spcAft>
+              <a:defRPr sz="1050">
+                <a:solidFill>
+                  <a:srgbClr val="6E5D4E"/>
+                </a:solidFill>
+                <a:latin typeface="Arial"/>
+              </a:defRPr>
+            </a:pPr>
+            <a:r>
+              <a:t>Step 5 (Summary): Conclude with integrity guarantees &amp; Viva defense.</a:t>
+            </a:r>
+          </a:p>
+        </p:txBody>
+      </p:sp>
+      <p:sp>
+        <p:nvSpPr>
+          <p:cNvPr id="11" name="Rounded Rectangle 10"/>
+          <p:cNvSpPr/>
+          <p:nvPr/>
+        </p:nvSpPr>
+        <p:spPr>
+          <a:xfrm>
+            <a:off x="731520" y="5394960"/>
+            <a:ext cx="10698480" cy="914400"/>
+          </a:xfrm>
+          <a:prstGeom prst="roundRect">
+            <a:avLst/>
+          </a:prstGeom>
+          <a:solidFill>
+            <a:srgbClr val="F6E3C8"/>
+          </a:solidFill>
+          <a:ln w="13970">
+            <a:solidFill>
+              <a:srgbClr val="E3C08F"/>
+            </a:solidFill>
+          </a:ln>
+        </p:spPr>
+        <p:style>
+          <a:lnRef idx="1">
+            <a:schemeClr val="accent1"/>
+          </a:lnRef>
+          <a:fillRef idx="3">
+            <a:schemeClr val="accent1"/>
+          </a:fillRef>
+          <a:effectRef idx="2">
+            <a:schemeClr val="accent1"/>
+          </a:effectRef>
+          <a:fontRef idx="minor">
+            <a:schemeClr val="lt1"/>
+          </a:fontRef>
+        </p:style>
+        <p:txBody>
+          <a:bodyPr rtlCol="0" anchor="ctr"/>
+          <a:lstStyle/>
+          <a:p>
+            <a:pPr algn="ctr"/>
+          </a:p>
+        </p:txBody>
+      </p:sp>
+      <p:sp>
+        <p:nvSpPr>
+          <p:cNvPr id="12" name="TextBox 11"/>
+          <p:cNvSpPr txBox="1"/>
+          <p:nvPr/>
+        </p:nvSpPr>
+        <p:spPr>
+          <a:xfrm>
+            <a:off x="877824" y="5522976"/>
+            <a:ext cx="10405872" cy="658368"/>
+          </a:xfrm>
+          <a:prstGeom prst="rect">
+            <a:avLst/>
+          </a:prstGeom>
+          <a:noFill/>
+        </p:spPr>
+        <p:txBody>
+          <a:bodyPr wrap="square">
+            <a:spAutoFit/>
+          </a:bodyPr>
+          <a:lstStyle/>
+          <a:p>
+            <a:pPr>
+              <a:spcAft>
+                <a:spcPts val="200"/>
+              </a:spcAft>
+              <a:defRPr sz="850" b="1">
+                <a:solidFill>
+                  <a:srgbClr val="6E5D4E"/>
+                </a:solidFill>
+                <a:latin typeface="Arial"/>
+              </a:defRPr>
+            </a:pPr>
+            <a:r>
+              <a:t>THREE-WINDOW DEMONSTRATION READY</a:t>
+            </a:r>
+          </a:p>
+          <a:p/>
+          <a:p>
+            <a:pPr>
+              <a:spcAft>
+                <a:spcPts val="300"/>
+              </a:spcAft>
+              <a:defRPr sz="1050">
+                <a:solidFill>
+                  <a:srgbClr val="6E5D4E"/>
+                </a:solidFill>
+                <a:latin typeface="Arial"/>
+              </a:defRPr>
+            </a:pPr>
+            <a:r>
+              <a:t>Live Demo Windows Prepared: 1. PowerPoint Presentation  |  2. Dashboard (http://localhost:5000)  |  3. Python Code (VS Code)</a:t>
             </a:r>
           </a:p>
         </p:txBody>
@@ -9113,7 +9657,7 @@
             <a:avLst/>
           </a:prstGeom>
           <a:solidFill>
-            <a:srgbClr val="0B0F19"/>
+            <a:srgbClr val="FFF8E7"/>
           </a:solidFill>
           <a:ln>
             <a:noFill/>
@@ -9149,7 +9693,7 @@
         </p:nvSpPr>
         <p:spPr>
           <a:xfrm>
-            <a:off x="731520" y="365760"/>
+            <a:off x="731520" y="320040"/>
             <a:ext cx="8229600" cy="228600"/>
           </a:xfrm>
           <a:prstGeom prst="rect">
@@ -9164,14 +9708,15 @@
           <a:lstStyle/>
           <a:p>
             <a:pPr>
-              <a:defRPr sz="1000" b="1">
-                <a:solidFill>
-                  <a:srgbClr val="38BDF8"/>
-                </a:solidFill>
-              </a:defRPr>
-            </a:pPr>
-            <a:r>
-              <a:t>TEST RESULTS</a:t>
+              <a:defRPr sz="950" b="1">
+                <a:solidFill>
+                  <a:srgbClr val="6E5D4E"/>
+                </a:solidFill>
+                <a:latin typeface="Arial"/>
+              </a:defRPr>
+            </a:pPr>
+            <a:r>
+              <a:t>SLIDE 9 • VIVA DEFENSE</a:t>
             </a:r>
           </a:p>
         </p:txBody>
@@ -9184,8 +9729,8 @@
         </p:nvSpPr>
         <p:spPr>
           <a:xfrm>
-            <a:off x="731520" y="594360"/>
-            <a:ext cx="8686800" cy="548640"/>
+            <a:off x="731520" y="530352"/>
+            <a:ext cx="8961120" cy="548640"/>
           </a:xfrm>
           <a:prstGeom prst="rect">
             <a:avLst/>
@@ -9199,14 +9744,15 @@
           <a:lstStyle/>
           <a:p>
             <a:pPr>
-              <a:defRPr sz="2200" b="1">
-                <a:solidFill>
-                  <a:srgbClr val="FFFFFF"/>
-                </a:solidFill>
-              </a:defRPr>
-            </a:pPr>
-            <a:r>
-              <a:t>Empirical Validation &amp; Test Evidence</a:t>
+              <a:defRPr sz="2100" b="1">
+                <a:solidFill>
+                  <a:srgbClr val="241E17"/>
+                </a:solidFill>
+                <a:latin typeface="Arial"/>
+              </a:defRPr>
+            </a:pPr>
+            <a:r>
+              <a:t>Viva Voce &amp; Technical Defense Preparation</a:t>
             </a:r>
           </a:p>
         </p:txBody>
@@ -9219,18 +9765,18 @@
         </p:nvSpPr>
         <p:spPr>
           <a:xfrm>
-            <a:off x="10241280" y="411480"/>
-            <a:ext cx="1188720" cy="365760"/>
+            <a:off x="10241280" y="365760"/>
+            <a:ext cx="1188720" cy="347472"/>
           </a:xfrm>
           <a:prstGeom prst="roundRect">
             <a:avLst/>
           </a:prstGeom>
           <a:solidFill>
-            <a:srgbClr val="162032"/>
+            <a:srgbClr val="FFFFFF"/>
           </a:solidFill>
           <a:ln>
             <a:solidFill>
-              <a:srgbClr val="24344D"/>
+              <a:srgbClr val="E2D5C3"/>
             </a:solidFill>
           </a:ln>
         </p:spPr>
@@ -9264,8 +9810,8 @@
         </p:nvSpPr>
         <p:spPr>
           <a:xfrm>
-            <a:off x="10241280" y="411480"/>
-            <a:ext cx="1188720" cy="365760"/>
+            <a:off x="10241280" y="365760"/>
+            <a:ext cx="1188720" cy="347472"/>
           </a:xfrm>
           <a:prstGeom prst="rect">
             <a:avLst/>
@@ -9279,10 +9825,11 @@
           <a:lstStyle/>
           <a:p>
             <a:pPr algn="ctr">
-              <a:defRPr sz="1000" b="1">
-                <a:solidFill>
-                  <a:srgbClr val="94A3B8"/>
-                </a:solidFill>
+              <a:defRPr sz="950" b="1">
+                <a:solidFill>
+                  <a:srgbClr val="6E5D4E"/>
+                </a:solidFill>
+                <a:latin typeface="Arial"/>
               </a:defRPr>
             </a:pPr>
             <a:r>
@@ -9299,18 +9846,18 @@
         </p:nvSpPr>
         <p:spPr>
           <a:xfrm>
-            <a:off x="731520" y="1371600"/>
-            <a:ext cx="3383280" cy="4754880"/>
+            <a:off x="731520" y="1280160"/>
+            <a:ext cx="5212080" cy="5029200"/>
           </a:xfrm>
           <a:prstGeom prst="roundRect">
             <a:avLst/>
           </a:prstGeom>
           <a:solidFill>
-            <a:srgbClr val="0A2819"/>
+            <a:srgbClr val="FFFFFF"/>
           </a:solidFill>
-          <a:ln w="15240">
+          <a:ln w="13970">
             <a:solidFill>
-              <a:srgbClr val="166534"/>
+              <a:srgbClr val="E2D5C3"/>
             </a:solidFill>
           </a:ln>
         </p:spPr>
@@ -9344,8 +9891,8 @@
         </p:nvSpPr>
         <p:spPr>
           <a:xfrm>
-            <a:off x="914400" y="1554480"/>
-            <a:ext cx="3017520" cy="4389120"/>
+            <a:off x="877824" y="1408176"/>
+            <a:ext cx="4919472" cy="4773168"/>
           </a:xfrm>
           <a:prstGeom prst="rect">
             <a:avLst/>
@@ -9362,143 +9909,198 @@
               <a:spcAft>
                 <a:spcPts val="200"/>
               </a:spcAft>
-              <a:defRPr sz="900" b="1">
-                <a:solidFill>
-                  <a:srgbClr val="94A3B8"/>
-                </a:solidFill>
-              </a:defRPr>
-            </a:pPr>
-            <a:r>
-              <a:t>BASELINE PASS</a:t>
-            </a:r>
-          </a:p>
-          <a:p>
-            <a:pPr>
-              <a:spcAft>
-                <a:spcPts val="800"/>
-              </a:spcAft>
-              <a:defRPr sz="1500" b="1">
-                <a:solidFill>
-                  <a:srgbClr val="4ADE80"/>
-                </a:solidFill>
-              </a:defRPr>
-            </a:pPr>
-            <a:r>
-              <a:t>Test 1: Authentic Log</a:t>
-            </a:r>
-          </a:p>
-          <a:p>
-            <a:pPr>
-              <a:spcAft>
-                <a:spcPts val="400"/>
-              </a:spcAft>
-              <a:defRPr sz="1150">
-                <a:solidFill>
-                  <a:srgbClr val="E2E8F0"/>
-                </a:solidFill>
-              </a:defRPr>
-            </a:pPr>
-            <a:r>
-              <a:t>Original Telemetry:</a:t>
-            </a:r>
-          </a:p>
-          <a:p>
-            <a:pPr>
-              <a:spcAft>
-                <a:spcPts val="400"/>
-              </a:spcAft>
-              <a:defRPr sz="1150">
-                <a:solidFill>
-                  <a:srgbClr val="E2E8F0"/>
-                </a:solidFill>
-              </a:defRPr>
-            </a:pPr>
-            <a:r>
-              <a:t>TURBINE_01 RPM:3450</a:t>
-            </a:r>
-          </a:p>
-          <a:p>
-            <a:pPr>
-              <a:spcAft>
-                <a:spcPts val="400"/>
-              </a:spcAft>
-              <a:defRPr sz="1150">
-                <a:solidFill>
-                  <a:srgbClr val="E2E8F0"/>
-                </a:solidFill>
-              </a:defRPr>
-            </a:pPr>
-          </a:p>
-          <a:p>
-            <a:pPr>
-              <a:spcAft>
-                <a:spcPts val="400"/>
-              </a:spcAft>
-              <a:defRPr sz="1150">
-                <a:solidFill>
-                  <a:srgbClr val="E2E8F0"/>
-                </a:solidFill>
-              </a:defRPr>
-            </a:pPr>
-            <a:r>
-              <a:t>Division Remainder:</a:t>
-            </a:r>
-          </a:p>
-          <a:p>
-            <a:pPr>
-              <a:spcAft>
-                <a:spcPts val="400"/>
-              </a:spcAft>
-              <a:defRPr sz="1150">
-                <a:solidFill>
-                  <a:srgbClr val="E2E8F0"/>
-                </a:solidFill>
-              </a:defRPr>
-            </a:pPr>
-            <a:r>
-              <a:t>00000000000000000000000000000000</a:t>
-            </a:r>
-          </a:p>
-          <a:p>
-            <a:pPr>
-              <a:spcAft>
-                <a:spcPts val="400"/>
-              </a:spcAft>
-              <a:defRPr sz="1150">
-                <a:solidFill>
-                  <a:srgbClr val="E2E8F0"/>
-                </a:solidFill>
-              </a:defRPr>
-            </a:pPr>
-          </a:p>
-          <a:p>
-            <a:pPr>
-              <a:spcAft>
-                <a:spcPts val="400"/>
-              </a:spcAft>
-              <a:defRPr sz="1150">
-                <a:solidFill>
-                  <a:srgbClr val="E2E8F0"/>
-                </a:solidFill>
-              </a:defRPr>
-            </a:pPr>
-            <a:r>
-              <a:t>Status: ✓ ACCEPT</a:t>
-            </a:r>
-          </a:p>
-          <a:p>
-            <a:pPr>
-              <a:spcAft>
-                <a:spcPts val="400"/>
-              </a:spcAft>
-              <a:defRPr sz="1150">
-                <a:solidFill>
-                  <a:srgbClr val="E2E8F0"/>
-                </a:solidFill>
-              </a:defRPr>
-            </a:pPr>
-            <a:r>
-              <a:t>Zero bit errors detected in codeword.</a:t>
+              <a:defRPr sz="850" b="1">
+                <a:solidFill>
+                  <a:srgbClr val="6E5D4E"/>
+                </a:solidFill>
+                <a:latin typeface="Arial"/>
+              </a:defRPr>
+            </a:pPr>
+            <a:r>
+              <a:t>MATHEMATICAL VIVA QUESTIONS</a:t>
+            </a:r>
+          </a:p>
+          <a:p>
+            <a:pPr>
+              <a:spcAft>
+                <a:spcPts val="500"/>
+              </a:spcAft>
+              <a:defRPr sz="1350" b="1">
+                <a:solidFill>
+                  <a:srgbClr val="241E17"/>
+                </a:solidFill>
+                <a:latin typeface="Arial"/>
+              </a:defRPr>
+            </a:pPr>
+            <a:r>
+              <a:t>Key Mathematical &amp; Concept Questions</a:t>
+            </a:r>
+          </a:p>
+          <a:p>
+            <a:pPr>
+              <a:spcAft>
+                <a:spcPts val="300"/>
+              </a:spcAft>
+              <a:defRPr sz="1050">
+                <a:solidFill>
+                  <a:srgbClr val="6E5D4E"/>
+                </a:solidFill>
+                <a:latin typeface="Arial"/>
+              </a:defRPr>
+            </a:pPr>
+            <a:r>
+              <a:t>Q1: What is CRC &amp; why is it used?</a:t>
+            </a:r>
+          </a:p>
+          <a:p>
+            <a:pPr>
+              <a:spcAft>
+                <a:spcPts val="300"/>
+              </a:spcAft>
+              <a:defRPr sz="1050">
+                <a:solidFill>
+                  <a:srgbClr val="6E5D4E"/>
+                </a:solidFill>
+                <a:latin typeface="Arial"/>
+              </a:defRPr>
+            </a:pPr>
+            <a:r>
+              <a:t>-&gt; Cyclic Redundancy Check; detects burst errors in bitstreams using polynomial long division over GF(2).</a:t>
+            </a:r>
+          </a:p>
+          <a:p>
+            <a:pPr>
+              <a:spcAft>
+                <a:spcPts val="300"/>
+              </a:spcAft>
+              <a:defRPr sz="1050">
+                <a:solidFill>
+                  <a:srgbClr val="6E5D4E"/>
+                </a:solidFill>
+                <a:latin typeface="Arial"/>
+              </a:defRPr>
+            </a:pPr>
+          </a:p>
+          <a:p>
+            <a:pPr>
+              <a:spcAft>
+                <a:spcPts val="300"/>
+              </a:spcAft>
+              <a:defRPr sz="1050">
+                <a:solidFill>
+                  <a:srgbClr val="6E5D4E"/>
+                </a:solidFill>
+                <a:latin typeface="Arial"/>
+              </a:defRPr>
+            </a:pPr>
+            <a:r>
+              <a:t>Q2: Why 33-bit divisor for 32-bit CRC?</a:t>
+            </a:r>
+          </a:p>
+          <a:p>
+            <a:pPr>
+              <a:spcAft>
+                <a:spcPts val="300"/>
+              </a:spcAft>
+              <a:defRPr sz="1050">
+                <a:solidFill>
+                  <a:srgbClr val="6E5D4E"/>
+                </a:solidFill>
+                <a:latin typeface="Arial"/>
+              </a:defRPr>
+            </a:pPr>
+            <a:r>
+              <a:t>-&gt; A degree-32 polynomial has 33 coefficients. Dividing by degree-32 strictly leaves a remainder of degree &lt;= 31 (32 bits).</a:t>
+            </a:r>
+          </a:p>
+          <a:p>
+            <a:pPr>
+              <a:spcAft>
+                <a:spcPts val="300"/>
+              </a:spcAft>
+              <a:defRPr sz="1050">
+                <a:solidFill>
+                  <a:srgbClr val="6E5D4E"/>
+                </a:solidFill>
+                <a:latin typeface="Arial"/>
+              </a:defRPr>
+            </a:pPr>
+          </a:p>
+          <a:p>
+            <a:pPr>
+              <a:spcAft>
+                <a:spcPts val="300"/>
+              </a:spcAft>
+              <a:defRPr sz="1050">
+                <a:solidFill>
+                  <a:srgbClr val="6E5D4E"/>
+                </a:solidFill>
+                <a:latin typeface="Arial"/>
+              </a:defRPr>
+            </a:pPr>
+            <a:r>
+              <a:t>Q3: Why is XOR used instead of subtraction?</a:t>
+            </a:r>
+          </a:p>
+          <a:p>
+            <a:pPr>
+              <a:spcAft>
+                <a:spcPts val="300"/>
+              </a:spcAft>
+              <a:defRPr sz="1050">
+                <a:solidFill>
+                  <a:srgbClr val="6E5D4E"/>
+                </a:solidFill>
+                <a:latin typeface="Arial"/>
+              </a:defRPr>
+            </a:pPr>
+            <a:r>
+              <a:t>-&gt; In GF(2) arithmetic, addition and subtraction are identical to bitwise XOR with no carries or borrows.</a:t>
+            </a:r>
+          </a:p>
+          <a:p>
+            <a:pPr>
+              <a:spcAft>
+                <a:spcPts val="300"/>
+              </a:spcAft>
+              <a:defRPr sz="1050">
+                <a:solidFill>
+                  <a:srgbClr val="6E5D4E"/>
+                </a:solidFill>
+                <a:latin typeface="Arial"/>
+              </a:defRPr>
+            </a:pPr>
+          </a:p>
+          <a:p>
+            <a:pPr>
+              <a:spcAft>
+                <a:spcPts val="300"/>
+              </a:spcAft>
+              <a:defRPr sz="1050">
+                <a:solidFill>
+                  <a:srgbClr val="6E5D4E"/>
+                </a:solidFill>
+                <a:latin typeface="Arial"/>
+              </a:defRPr>
+            </a:pPr>
+            <a:r>
+              <a:t>Q4: Can CRC correct errors?</a:t>
+            </a:r>
+          </a:p>
+          <a:p>
+            <a:pPr>
+              <a:spcAft>
+                <a:spcPts val="300"/>
+              </a:spcAft>
+              <a:defRPr sz="1050">
+                <a:solidFill>
+                  <a:srgbClr val="6E5D4E"/>
+                </a:solidFill>
+                <a:latin typeface="Arial"/>
+              </a:defRPr>
+            </a:pPr>
+            <a:r>
+              <a:t>-&gt; CRC is primarily for error detection. In pure form it flags corruption; error correction requires FEC (e.g. Reed-Solomon/Hamming).</a:t>
             </a:r>
           </a:p>
         </p:txBody>
@@ -9511,18 +10113,18 @@
         </p:nvSpPr>
         <p:spPr>
           <a:xfrm>
-            <a:off x="4389120" y="1371600"/>
-            <a:ext cx="3383280" cy="4754880"/>
+            <a:off x="6217920" y="1280160"/>
+            <a:ext cx="5212080" cy="5029200"/>
           </a:xfrm>
           <a:prstGeom prst="roundRect">
             <a:avLst/>
           </a:prstGeom>
           <a:solidFill>
-            <a:srgbClr val="2D0F14"/>
+            <a:srgbClr val="EFE5D5"/>
           </a:solidFill>
-          <a:ln w="15240">
+          <a:ln w="13970">
             <a:solidFill>
-              <a:srgbClr val="991B1B"/>
+              <a:srgbClr val="E3C08F"/>
             </a:solidFill>
           </a:ln>
         </p:spPr>
@@ -9556,8 +10158,8 @@
         </p:nvSpPr>
         <p:spPr>
           <a:xfrm>
-            <a:off x="4572000" y="1554480"/>
-            <a:ext cx="3017520" cy="4389120"/>
+            <a:off x="6364224" y="1408176"/>
+            <a:ext cx="4919472" cy="4773168"/>
           </a:xfrm>
           <a:prstGeom prst="rect">
             <a:avLst/>
@@ -9574,412 +10176,198 @@
               <a:spcAft>
                 <a:spcPts val="200"/>
               </a:spcAft>
-              <a:defRPr sz="900" b="1">
-                <a:solidFill>
-                  <a:srgbClr val="94A3B8"/>
-                </a:solidFill>
-              </a:defRPr>
-            </a:pPr>
-            <a:r>
-              <a:t>TAMPER DETECTED</a:t>
-            </a:r>
-          </a:p>
-          <a:p>
-            <a:pPr>
-              <a:spcAft>
-                <a:spcPts val="800"/>
-              </a:spcAft>
-              <a:defRPr sz="1500" b="1">
-                <a:solidFill>
-                  <a:srgbClr val="F87171"/>
-                </a:solidFill>
-              </a:defRPr>
-            </a:pPr>
-            <a:r>
-              <a:t>Test 2: 1-Bit Mutation</a:t>
-            </a:r>
-          </a:p>
-          <a:p>
-            <a:pPr>
-              <a:spcAft>
-                <a:spcPts val="400"/>
-              </a:spcAft>
-              <a:defRPr sz="1150">
-                <a:solidFill>
-                  <a:srgbClr val="E2E8F0"/>
-                </a:solidFill>
-              </a:defRPr>
-            </a:pPr>
-            <a:r>
-              <a:t>Received Telemetry:</a:t>
-            </a:r>
-          </a:p>
-          <a:p>
-            <a:pPr>
-              <a:spcAft>
-                <a:spcPts val="400"/>
-              </a:spcAft>
-              <a:defRPr sz="1150">
-                <a:solidFill>
-                  <a:srgbClr val="E2E8F0"/>
-                </a:solidFill>
-              </a:defRPr>
-            </a:pPr>
-            <a:r>
-              <a:t>TURBINE_01 RPM:3451</a:t>
-            </a:r>
-          </a:p>
-          <a:p>
-            <a:pPr>
-              <a:spcAft>
-                <a:spcPts val="400"/>
-              </a:spcAft>
-              <a:defRPr sz="1150">
-                <a:solidFill>
-                  <a:srgbClr val="E2E8F0"/>
-                </a:solidFill>
-              </a:defRPr>
-            </a:pPr>
-            <a:r>
-              <a:t>(1 character mutated)</a:t>
-            </a:r>
-          </a:p>
-          <a:p>
-            <a:pPr>
-              <a:spcAft>
-                <a:spcPts val="400"/>
-              </a:spcAft>
-              <a:defRPr sz="1150">
-                <a:solidFill>
-                  <a:srgbClr val="E2E8F0"/>
-                </a:solidFill>
-              </a:defRPr>
-            </a:pPr>
-          </a:p>
-          <a:p>
-            <a:pPr>
-              <a:spcAft>
-                <a:spcPts val="400"/>
-              </a:spcAft>
-              <a:defRPr sz="1150">
-                <a:solidFill>
-                  <a:srgbClr val="E2E8F0"/>
-                </a:solidFill>
-              </a:defRPr>
-            </a:pPr>
-            <a:r>
-              <a:t>Division Remainder:</a:t>
-            </a:r>
-          </a:p>
-          <a:p>
-            <a:pPr>
-              <a:spcAft>
-                <a:spcPts val="400"/>
-              </a:spcAft>
-              <a:defRPr sz="1150">
-                <a:solidFill>
-                  <a:srgbClr val="E2E8F0"/>
-                </a:solidFill>
-              </a:defRPr>
-            </a:pPr>
-            <a:r>
-              <a:t>01000100101001111100111011000000</a:t>
-            </a:r>
-          </a:p>
-          <a:p>
-            <a:pPr>
-              <a:spcAft>
-                <a:spcPts val="400"/>
-              </a:spcAft>
-              <a:defRPr sz="1150">
-                <a:solidFill>
-                  <a:srgbClr val="E2E8F0"/>
-                </a:solidFill>
-              </a:defRPr>
-            </a:pPr>
-          </a:p>
-          <a:p>
-            <a:pPr>
-              <a:spcAft>
-                <a:spcPts val="400"/>
-              </a:spcAft>
-              <a:defRPr sz="1150">
-                <a:solidFill>
-                  <a:srgbClr val="E2E8F0"/>
-                </a:solidFill>
-              </a:defRPr>
-            </a:pPr>
-            <a:r>
-              <a:t>Status: ✗ REJECT</a:t>
-            </a:r>
-          </a:p>
-          <a:p>
-            <a:pPr>
-              <a:spcAft>
-                <a:spcPts val="400"/>
-              </a:spcAft>
-              <a:defRPr sz="1150">
-                <a:solidFill>
-                  <a:srgbClr val="E2E8F0"/>
-                </a:solidFill>
-              </a:defRPr>
-            </a:pPr>
-            <a:r>
-              <a:t>Caught instant single bit change.</a:t>
-            </a:r>
-          </a:p>
-        </p:txBody>
-      </p:sp>
-      <p:sp>
-        <p:nvSpPr>
-          <p:cNvPr id="11" name="Rounded Rectangle 10"/>
-          <p:cNvSpPr/>
-          <p:nvPr/>
-        </p:nvSpPr>
-        <p:spPr>
-          <a:xfrm>
-            <a:off x="8046720" y="1371600"/>
-            <a:ext cx="3383280" cy="4754880"/>
-          </a:xfrm>
-          <a:prstGeom prst="roundRect">
-            <a:avLst/>
-          </a:prstGeom>
-          <a:solidFill>
-            <a:srgbClr val="2D0F14"/>
-          </a:solidFill>
-          <a:ln w="15240">
-            <a:solidFill>
-              <a:srgbClr val="991B1B"/>
-            </a:solidFill>
-          </a:ln>
-        </p:spPr>
-        <p:style>
-          <a:lnRef idx="1">
-            <a:schemeClr val="accent1"/>
-          </a:lnRef>
-          <a:fillRef idx="3">
-            <a:schemeClr val="accent1"/>
-          </a:fillRef>
-          <a:effectRef idx="2">
-            <a:schemeClr val="accent1"/>
-          </a:effectRef>
-          <a:fontRef idx="minor">
-            <a:schemeClr val="lt1"/>
-          </a:fontRef>
-        </p:style>
-        <p:txBody>
-          <a:bodyPr rtlCol="0" anchor="ctr"/>
-          <a:lstStyle/>
-          <a:p>
-            <a:pPr algn="ctr"/>
-          </a:p>
-        </p:txBody>
-      </p:sp>
-      <p:sp>
-        <p:nvSpPr>
-          <p:cNvPr id="12" name="TextBox 11"/>
-          <p:cNvSpPr txBox="1"/>
-          <p:nvPr/>
-        </p:nvSpPr>
-        <p:spPr>
-          <a:xfrm>
-            <a:off x="8229600" y="1554480"/>
-            <a:ext cx="3017520" cy="4389120"/>
-          </a:xfrm>
-          <a:prstGeom prst="rect">
-            <a:avLst/>
-          </a:prstGeom>
-          <a:noFill/>
-        </p:spPr>
-        <p:txBody>
-          <a:bodyPr wrap="square">
-            <a:spAutoFit/>
-          </a:bodyPr>
-          <a:lstStyle/>
-          <a:p>
-            <a:pPr>
-              <a:spcAft>
-                <a:spcPts val="200"/>
-              </a:spcAft>
-              <a:defRPr sz="900" b="1">
-                <a:solidFill>
-                  <a:srgbClr val="94A3B8"/>
-                </a:solidFill>
-              </a:defRPr>
-            </a:pPr>
-            <a:r>
-              <a:t>PACKET FORGERY</a:t>
-            </a:r>
-          </a:p>
-          <a:p>
-            <a:pPr>
-              <a:spcAft>
-                <a:spcPts val="800"/>
-              </a:spcAft>
-              <a:defRPr sz="1500" b="1">
-                <a:solidFill>
-                  <a:srgbClr val="F87171"/>
-                </a:solidFill>
-              </a:defRPr>
-            </a:pPr>
-            <a:r>
-              <a:t>Test 3: Forged CRC</a:t>
-            </a:r>
-          </a:p>
-          <a:p>
-            <a:pPr>
-              <a:spcAft>
-                <a:spcPts val="400"/>
-              </a:spcAft>
-              <a:defRPr sz="1150">
-                <a:solidFill>
-                  <a:srgbClr val="E2E8F0"/>
-                </a:solidFill>
-              </a:defRPr>
-            </a:pPr>
-            <a:r>
-              <a:t>Received Telemetry:</a:t>
-            </a:r>
-          </a:p>
-          <a:p>
-            <a:pPr>
-              <a:spcAft>
-                <a:spcPts val="400"/>
-              </a:spcAft>
-              <a:defRPr sz="1150">
-                <a:solidFill>
-                  <a:srgbClr val="E2E8F0"/>
-                </a:solidFill>
-              </a:defRPr>
-            </a:pPr>
-            <a:r>
-              <a:t>TURBINE_01 RPM:3450</a:t>
-            </a:r>
-          </a:p>
-          <a:p>
-            <a:pPr>
-              <a:spcAft>
-                <a:spcPts val="400"/>
-              </a:spcAft>
-              <a:defRPr sz="1150">
-                <a:solidFill>
-                  <a:srgbClr val="E2E8F0"/>
-                </a:solidFill>
-              </a:defRPr>
-            </a:pPr>
-          </a:p>
-          <a:p>
-            <a:pPr>
-              <a:spcAft>
-                <a:spcPts val="400"/>
-              </a:spcAft>
-              <a:defRPr sz="1150">
-                <a:solidFill>
-                  <a:srgbClr val="E2E8F0"/>
-                </a:solidFill>
-              </a:defRPr>
-            </a:pPr>
-            <a:r>
-              <a:t>Corrupted CRC Checksum:</a:t>
-            </a:r>
-          </a:p>
-          <a:p>
-            <a:pPr>
-              <a:spcAft>
-                <a:spcPts val="400"/>
-              </a:spcAft>
-              <a:defRPr sz="1150">
-                <a:solidFill>
-                  <a:srgbClr val="E2E8F0"/>
-                </a:solidFill>
-              </a:defRPr>
-            </a:pPr>
-            <a:r>
-              <a:t>11111111011001...</a:t>
-            </a:r>
-          </a:p>
-          <a:p>
-            <a:pPr>
-              <a:spcAft>
-                <a:spcPts val="400"/>
-              </a:spcAft>
-              <a:defRPr sz="1150">
-                <a:solidFill>
-                  <a:srgbClr val="E2E8F0"/>
-                </a:solidFill>
-              </a:defRPr>
-            </a:pPr>
-          </a:p>
-          <a:p>
-            <a:pPr>
-              <a:spcAft>
-                <a:spcPts val="400"/>
-              </a:spcAft>
-              <a:defRPr sz="1150">
-                <a:solidFill>
-                  <a:srgbClr val="E2E8F0"/>
-                </a:solidFill>
-              </a:defRPr>
-            </a:pPr>
-            <a:r>
-              <a:t>Division Remainder:</a:t>
-            </a:r>
-          </a:p>
-          <a:p>
-            <a:pPr>
-              <a:spcAft>
-                <a:spcPts val="400"/>
-              </a:spcAft>
-              <a:defRPr sz="1150">
-                <a:solidFill>
-                  <a:srgbClr val="E2E8F0"/>
-                </a:solidFill>
-              </a:defRPr>
-            </a:pPr>
-            <a:r>
-              <a:t>10110110100110100110011001101101</a:t>
-            </a:r>
-          </a:p>
-          <a:p>
-            <a:pPr>
-              <a:spcAft>
-                <a:spcPts val="400"/>
-              </a:spcAft>
-              <a:defRPr sz="1150">
-                <a:solidFill>
-                  <a:srgbClr val="E2E8F0"/>
-                </a:solidFill>
-              </a:defRPr>
-            </a:pPr>
-          </a:p>
-          <a:p>
-            <a:pPr>
-              <a:spcAft>
-                <a:spcPts val="400"/>
-              </a:spcAft>
-              <a:defRPr sz="1150">
-                <a:solidFill>
-                  <a:srgbClr val="E2E8F0"/>
-                </a:solidFill>
-              </a:defRPr>
-            </a:pPr>
-            <a:r>
-              <a:t>Status: ✗ REJECT</a:t>
-            </a:r>
-          </a:p>
-          <a:p>
-            <a:pPr>
-              <a:spcAft>
-                <a:spcPts val="400"/>
-              </a:spcAft>
-              <a:defRPr sz="1150">
-                <a:solidFill>
-                  <a:srgbClr val="E2E8F0"/>
-                </a:solidFill>
-              </a:defRPr>
-            </a:pPr>
-            <a:r>
-              <a:t>Guards against forged packets.</a:t>
+              <a:defRPr sz="850" b="1">
+                <a:solidFill>
+                  <a:srgbClr val="6E5D4E"/>
+                </a:solidFill>
+                <a:latin typeface="Arial"/>
+              </a:defRPr>
+            </a:pPr>
+            <a:r>
+              <a:t>ENGINEERING VIVA QUESTIONS</a:t>
+            </a:r>
+          </a:p>
+          <a:p>
+            <a:pPr>
+              <a:spcAft>
+                <a:spcPts val="500"/>
+              </a:spcAft>
+              <a:defRPr sz="1350" b="1">
+                <a:solidFill>
+                  <a:srgbClr val="241E17"/>
+                </a:solidFill>
+                <a:latin typeface="Arial"/>
+              </a:defRPr>
+            </a:pPr>
+            <a:r>
+              <a:t>Implementation &amp; Verification Questions</a:t>
+            </a:r>
+          </a:p>
+          <a:p>
+            <a:pPr>
+              <a:spcAft>
+                <a:spcPts val="300"/>
+              </a:spcAft>
+              <a:defRPr sz="1050">
+                <a:solidFill>
+                  <a:srgbClr val="6E5D4E"/>
+                </a:solidFill>
+                <a:latin typeface="Arial"/>
+              </a:defRPr>
+            </a:pPr>
+            <a:r>
+              <a:t>Q5: How is text converted before CRC calculation?</a:t>
+            </a:r>
+          </a:p>
+          <a:p>
+            <a:pPr>
+              <a:spcAft>
+                <a:spcPts val="300"/>
+              </a:spcAft>
+              <a:defRPr sz="1050">
+                <a:solidFill>
+                  <a:srgbClr val="6E5D4E"/>
+                </a:solidFill>
+                <a:latin typeface="Arial"/>
+              </a:defRPr>
+            </a:pPr>
+            <a:r>
+              <a:t>-&gt; Each character is converted to its 8-bit ASCII binary representation via ascii2binary() and concatenated.</a:t>
+            </a:r>
+          </a:p>
+          <a:p>
+            <a:pPr>
+              <a:spcAft>
+                <a:spcPts val="300"/>
+              </a:spcAft>
+              <a:defRPr sz="1050">
+                <a:solidFill>
+                  <a:srgbClr val="6E5D4E"/>
+                </a:solidFill>
+                <a:latin typeface="Arial"/>
+              </a:defRPr>
+            </a:pPr>
+          </a:p>
+          <a:p>
+            <a:pPr>
+              <a:spcAft>
+                <a:spcPts val="300"/>
+              </a:spcAft>
+              <a:defRPr sz="1050">
+                <a:solidFill>
+                  <a:srgbClr val="6E5D4E"/>
+                </a:solidFill>
+                <a:latin typeface="Arial"/>
+              </a:defRPr>
+            </a:pPr>
+            <a:r>
+              <a:t>Q6: How does the receiver detect an error?</a:t>
+            </a:r>
+          </a:p>
+          <a:p>
+            <a:pPr>
+              <a:spcAft>
+                <a:spcPts val="300"/>
+              </a:spcAft>
+              <a:defRPr sz="1050">
+                <a:solidFill>
+                  <a:srgbClr val="6E5D4E"/>
+                </a:solidFill>
+                <a:latin typeface="Arial"/>
+              </a:defRPr>
+            </a:pPr>
+            <a:r>
+              <a:t>-&gt; Codeword T'(x) = Data + Received CRC is divided by G(x). If remainder is 0^32 -&gt; ACCEPT; else REJECT.</a:t>
+            </a:r>
+          </a:p>
+          <a:p>
+            <a:pPr>
+              <a:spcAft>
+                <a:spcPts val="300"/>
+              </a:spcAft>
+              <a:defRPr sz="1050">
+                <a:solidFill>
+                  <a:srgbClr val="6E5D4E"/>
+                </a:solidFill>
+                <a:latin typeface="Arial"/>
+              </a:defRPr>
+            </a:pPr>
+          </a:p>
+          <a:p>
+            <a:pPr>
+              <a:spcAft>
+                <a:spcPts val="300"/>
+              </a:spcAft>
+              <a:defRPr sz="1050">
+                <a:solidFill>
+                  <a:srgbClr val="6E5D4E"/>
+                </a:solidFill>
+                <a:latin typeface="Arial"/>
+              </a:defRPr>
+            </a:pPr>
+            <a:r>
+              <a:t>Q7: What happens if one bit is changed?</a:t>
+            </a:r>
+          </a:p>
+          <a:p>
+            <a:pPr>
+              <a:spcAft>
+                <a:spcPts val="300"/>
+              </a:spcAft>
+              <a:defRPr sz="1050">
+                <a:solidFill>
+                  <a:srgbClr val="6E5D4E"/>
+                </a:solidFill>
+                <a:latin typeface="Arial"/>
+              </a:defRPr>
+            </a:pPr>
+            <a:r>
+              <a:t>-&gt; The polynomial M'(x) differs from M(x), resulting in a non-zero syndrome remainder vector R'(x) != 0.</a:t>
+            </a:r>
+          </a:p>
+          <a:p>
+            <a:pPr>
+              <a:spcAft>
+                <a:spcPts val="300"/>
+              </a:spcAft>
+              <a:defRPr sz="1050">
+                <a:solidFill>
+                  <a:srgbClr val="6E5D4E"/>
+                </a:solidFill>
+                <a:latin typeface="Arial"/>
+              </a:defRPr>
+            </a:pPr>
+          </a:p>
+          <a:p>
+            <a:pPr>
+              <a:spcAft>
+                <a:spcPts val="300"/>
+              </a:spcAft>
+              <a:defRPr sz="1050">
+                <a:solidFill>
+                  <a:srgbClr val="6E5D4E"/>
+                </a:solidFill>
+                <a:latin typeface="Arial"/>
+              </a:defRPr>
+            </a:pPr>
+            <a:r>
+              <a:t>Q8: What error types are 100% detected?</a:t>
+            </a:r>
+          </a:p>
+          <a:p>
+            <a:pPr>
+              <a:spcAft>
+                <a:spcPts val="300"/>
+              </a:spcAft>
+              <a:defRPr sz="1050">
+                <a:solidFill>
+                  <a:srgbClr val="6E5D4E"/>
+                </a:solidFill>
+                <a:latin typeface="Arial"/>
+              </a:defRPr>
+            </a:pPr>
+            <a:r>
+              <a:t>-&gt; All single-bit errors, all double-bit errors, and all burst errors &lt;= 32 bits.</a:t>
             </a:r>
           </a:p>
         </p:txBody>
